--- a/docs/Infrastructure.pptx
+++ b/docs/Infrastructure.pptx
@@ -14,9 +14,10 @@
     <p:sldId id="262" r:id="rId8"/>
     <p:sldId id="263" r:id="rId9"/>
     <p:sldId id="264" r:id="rId10"/>
+    <p:sldId id="265" r:id="rId11"/>
   </p:sldIdLst>
   <p:notesMasterIdLst>
-    <p:notesMasterId r:id="rId11"/>
+    <p:notesMasterId r:id="rId12"/>
   </p:notesMasterIdLst>
   <p:sldSz cx="12191695" cy="6858000"/>
   <p:notesSz cx="6858000" cy="12191695"/>
@@ -552,6 +553,94 @@
 </p:notes>
 </file>
 
+<file path=ppt/notesSlides/notesSlide10.xml><?xml version="1.0" encoding="utf-8"?>
+<p:notes xmlns:a="http://schemas.openxmlformats.org/drawingml/2006/main" xmlns:r="http://schemas.openxmlformats.org/officeDocument/2006/relationships" xmlns:p="http://schemas.openxmlformats.org/presentationml/2006/main">
+  <p:cSld>
+    <p:spTree>
+      <p:nvGrpSpPr>
+        <p:cNvPr id="1" name=""/>
+        <p:cNvGrpSpPr/>
+        <p:nvPr/>
+      </p:nvGrpSpPr>
+      <p:grpSpPr>
+        <a:xfrm>
+          <a:off x="0" y="0"/>
+          <a:ext cx="0" cy="0"/>
+          <a:chOff x="0" y="0"/>
+          <a:chExt cx="0" cy="0"/>
+        </a:xfrm>
+      </p:grpSpPr>
+      <p:sp>
+        <p:nvSpPr>
+          <p:cNvPr id="2" name="Slide Image Placeholder 1"/>
+          <p:cNvSpPr>
+            <a:spLocks noGrp="1" noRot="1" noChangeAspect="1"/>
+          </p:cNvSpPr>
+          <p:nvPr>
+            <p:ph type="sldImg"/>
+          </p:nvPr>
+        </p:nvSpPr>
+        <p:spPr/>
+      </p:sp>
+      <p:sp>
+        <p:nvSpPr>
+          <p:cNvPr id="3" name="Notes Placeholder 2"/>
+          <p:cNvSpPr>
+            <a:spLocks noGrp="1"/>
+          </p:cNvSpPr>
+          <p:nvPr>
+            <p:ph type="body" idx="1"/>
+          </p:nvPr>
+        </p:nvSpPr>
+        <p:spPr/>
+        <p:txBody>
+          <a:bodyPr/>
+          <a:lstStyle/>
+          <a:p>
+            <a:r>
+              <a:rPr lang="en-US" dirty="0"/>
+              <a:t/>
+            </a:r>
+            <a:endParaRPr lang="en-US" dirty="0"/>
+          </a:p>
+        </p:txBody>
+      </p:sp>
+      <p:sp>
+        <p:nvSpPr>
+          <p:cNvPr id="4" name="Slide Number Placeholder 3"/>
+          <p:cNvSpPr>
+            <a:spLocks noGrp="1"/>
+          </p:cNvSpPr>
+          <p:nvPr>
+            <p:ph type="sldNum" sz="quarter" idx="10"/>
+          </p:nvPr>
+        </p:nvSpPr>
+        <p:spPr/>
+        <p:txBody>
+          <a:bodyPr/>
+          <a:lstStyle/>
+          <a:p>
+            <a:fld id="{F7021451-1387-4CA6-816F-3879F97B5CBC}" type="slidenum">
+              <a:rPr lang="en-US"/>
+              <a:t>10</a:t>
+            </a:fld>
+            <a:endParaRPr lang="en-US"/>
+          </a:p>
+        </p:txBody>
+      </p:sp>
+    </p:spTree>
+    <p:extLst>
+      <p:ext uri="{BB962C8B-B14F-4D97-AF65-F5344CB8AC3E}">
+        <p14:creationId xmlns:p14="http://schemas.microsoft.com/office/powerpoint/2010/main" val="1024086991"/>
+      </p:ext>
+    </p:extLst>
+  </p:cSld>
+  <p:clrMapOvr>
+    <a:masterClrMapping/>
+  </p:clrMapOvr>
+</p:notes>
+</file>
+
 <file path=ppt/notesSlides/notesSlide2.xml><?xml version="1.0" encoding="utf-8"?>
 <p:notes xmlns:a="http://schemas.openxmlformats.org/drawingml/2006/main" xmlns:r="http://schemas.openxmlformats.org/officeDocument/2006/relationships" xmlns:p="http://schemas.openxmlformats.org/presentationml/2006/main">
   <p:cSld>
@@ -862,7 +951,7 @@
           <a:p>
             <a:r>
               <a:rPr lang="en-US" dirty="0"/>
-              <a:t/>
+              <a:t>스키마는 CDC가 아니라 마이그레이션으로 개발→운영. 데이터는 연속 CDC가 아니라 마스킹 스냅샷으로 운영→개발(PII 원본 금지). CDC(ETL/Realtime)의 본래 용도는 분석·라이브이지 환경 미러링이 아니다.</a:t>
             </a:r>
             <a:endParaRPr lang="en-US" dirty="0"/>
           </a:p>
@@ -1879,6 +1968,699 @@
 </p:sld>
 </file>
 
+<file path=ppt/slides/slide10.xml><?xml version="1.0" encoding="utf-8"?>
+<p:sld xmlns:a="http://schemas.openxmlformats.org/drawingml/2006/main" xmlns:r="http://schemas.openxmlformats.org/officeDocument/2006/relationships" xmlns:p="http://schemas.openxmlformats.org/presentationml/2006/main">
+  <p:cSld name="Slide 10">
+    <p:bg>
+      <p:bgPr>
+        <a:solidFill>
+          <a:srgbClr val="1A1145"/>
+        </a:solidFill>
+      </p:bgPr>
+    </p:bg>
+    <p:spTree>
+      <p:nvGrpSpPr>
+        <p:cNvPr id="1" name=""/>
+        <p:cNvGrpSpPr/>
+        <p:nvPr/>
+      </p:nvGrpSpPr>
+      <p:grpSpPr>
+        <a:xfrm>
+          <a:off x="0" y="0"/>
+          <a:ext cx="0" cy="0"/>
+          <a:chOff x="0" y="0"/>
+          <a:chExt cx="0" cy="0"/>
+        </a:xfrm>
+      </p:grpSpPr>
+      <p:sp>
+        <p:nvSpPr>
+          <p:cNvPr id="2" name="Shape 0"/>
+          <p:cNvSpPr/>
+          <p:nvPr/>
+        </p:nvSpPr>
+        <p:spPr>
+          <a:xfrm>
+            <a:off x="-1371600" y="-1371600"/>
+            <a:ext cx="4572000" cy="4572000"/>
+          </a:xfrm>
+          <a:prstGeom prst="ellipse">
+            <a:avLst/>
+          </a:prstGeom>
+          <a:solidFill>
+            <a:srgbClr val="5B2A9D">
+              <a:alpha val="35000"/>
+            </a:srgbClr>
+          </a:solidFill>
+          <a:ln/>
+        </p:spPr>
+      </p:sp>
+      <p:sp>
+        <p:nvSpPr>
+          <p:cNvPr id="3" name="Shape 1"/>
+          <p:cNvSpPr/>
+          <p:nvPr/>
+        </p:nvSpPr>
+        <p:spPr>
+          <a:xfrm>
+            <a:off x="9601200" y="3840480"/>
+            <a:ext cx="4114800" cy="4114800"/>
+          </a:xfrm>
+          <a:prstGeom prst="ellipse">
+            <a:avLst/>
+          </a:prstGeom>
+          <a:solidFill>
+            <a:srgbClr val="F5B731">
+              <a:alpha val="20000"/>
+            </a:srgbClr>
+          </a:solidFill>
+          <a:ln/>
+        </p:spPr>
+      </p:sp>
+      <p:sp>
+        <p:nvSpPr>
+          <p:cNvPr id="4" name="Text 2"/>
+          <p:cNvSpPr/>
+          <p:nvPr/>
+        </p:nvSpPr>
+        <p:spPr>
+          <a:xfrm>
+            <a:off x="731520" y="731520"/>
+            <a:ext cx="10058400" cy="365760"/>
+          </a:xfrm>
+          <a:prstGeom prst="rect">
+            <a:avLst/>
+          </a:prstGeom>
+          <a:noFill/>
+          <a:ln/>
+        </p:spPr>
+        <p:txBody>
+          <a:bodyPr wrap="square" lIns="0" tIns="0" rIns="0" bIns="0" rtlCol="0" anchor="ctr"/>
+          <a:lstStyle/>
+          <a:p>
+            <a:pPr indent="0" marL="0">
+              <a:buNone/>
+            </a:pPr>
+            <a:r>
+              <a:rPr lang="en-US" sz="1400" b="1" spc="300" kern="0" dirty="0">
+                <a:solidFill>
+                  <a:srgbClr val="F5B731"/>
+                </a:solidFill>
+                <a:latin typeface="Malgun Gothic" pitchFamily="34" charset="0"/>
+                <a:ea typeface="Malgun Gothic" pitchFamily="34" charset="-122"/>
+                <a:cs typeface="Malgun Gothic" pitchFamily="34" charset="-120"/>
+              </a:rPr>
+              <a:t>GOVERNANCE · 5대 원칙</a:t>
+            </a:r>
+            <a:endParaRPr lang="en-US" sz="1400" dirty="0"/>
+          </a:p>
+        </p:txBody>
+      </p:sp>
+      <p:sp>
+        <p:nvSpPr>
+          <p:cNvPr id="5" name="Text 3"/>
+          <p:cNvSpPr/>
+          <p:nvPr/>
+        </p:nvSpPr>
+        <p:spPr>
+          <a:xfrm>
+            <a:off x="731520" y="1097280"/>
+            <a:ext cx="10058400" cy="640080"/>
+          </a:xfrm>
+          <a:prstGeom prst="rect">
+            <a:avLst/>
+          </a:prstGeom>
+          <a:noFill/>
+          <a:ln/>
+        </p:spPr>
+        <p:txBody>
+          <a:bodyPr wrap="square" lIns="0" tIns="0" rIns="0" bIns="0" rtlCol="0" anchor="ctr"/>
+          <a:lstStyle/>
+          <a:p>
+            <a:pPr indent="0" marL="0">
+              <a:buNone/>
+            </a:pPr>
+            <a:r>
+              <a:rPr lang="en-US" sz="3000" b="1" dirty="0">
+                <a:solidFill>
+                  <a:srgbClr val="FFFFFF"/>
+                </a:solidFill>
+                <a:latin typeface="Malgun Gothic" pitchFamily="34" charset="0"/>
+                <a:ea typeface="Malgun Gothic" pitchFamily="34" charset="-122"/>
+                <a:cs typeface="Malgun Gothic" pitchFamily="34" charset="-120"/>
+              </a:rPr>
+              <a:t>환경 거버넌스 원칙</a:t>
+            </a:r>
+            <a:endParaRPr lang="en-US" sz="3000" dirty="0"/>
+          </a:p>
+        </p:txBody>
+      </p:sp>
+      <p:sp>
+        <p:nvSpPr>
+          <p:cNvPr id="6" name="Shape 4"/>
+          <p:cNvSpPr/>
+          <p:nvPr/>
+        </p:nvSpPr>
+        <p:spPr>
+          <a:xfrm>
+            <a:off x="731520" y="2057400"/>
+            <a:ext cx="10698480" cy="676656"/>
+          </a:xfrm>
+          <a:prstGeom prst="roundRect">
+            <a:avLst>
+              <a:gd name="adj" fmla="val 9459"/>
+            </a:avLst>
+          </a:prstGeom>
+          <a:solidFill>
+            <a:srgbClr val="2A1A66"/>
+          </a:solidFill>
+          <a:ln/>
+        </p:spPr>
+      </p:sp>
+      <p:sp>
+        <p:nvSpPr>
+          <p:cNvPr id="7" name="Text 5"/>
+          <p:cNvSpPr/>
+          <p:nvPr/>
+        </p:nvSpPr>
+        <p:spPr>
+          <a:xfrm>
+            <a:off x="914400" y="2057400"/>
+            <a:ext cx="548640" cy="676656"/>
+          </a:xfrm>
+          <a:prstGeom prst="rect">
+            <a:avLst/>
+          </a:prstGeom>
+          <a:noFill/>
+          <a:ln/>
+        </p:spPr>
+        <p:txBody>
+          <a:bodyPr wrap="square" lIns="0" tIns="0" rIns="0" bIns="0" rtlCol="0" anchor="ctr"/>
+          <a:lstStyle/>
+          <a:p>
+            <a:pPr algn="ctr" indent="0" marL="0">
+              <a:buNone/>
+            </a:pPr>
+            <a:r>
+              <a:rPr lang="en-US" sz="2000" b="1" dirty="0">
+                <a:solidFill>
+                  <a:srgbClr val="F5B731"/>
+                </a:solidFill>
+                <a:latin typeface="Malgun Gothic" pitchFamily="34" charset="0"/>
+                <a:ea typeface="Malgun Gothic" pitchFamily="34" charset="-122"/>
+                <a:cs typeface="Malgun Gothic" pitchFamily="34" charset="-120"/>
+              </a:rPr>
+              <a:t>1</a:t>
+            </a:r>
+            <a:endParaRPr lang="en-US" sz="2000" dirty="0"/>
+          </a:p>
+        </p:txBody>
+      </p:sp>
+      <p:sp>
+        <p:nvSpPr>
+          <p:cNvPr id="8" name="Text 6"/>
+          <p:cNvSpPr/>
+          <p:nvPr/>
+        </p:nvSpPr>
+        <p:spPr>
+          <a:xfrm>
+            <a:off x="1600200" y="2057400"/>
+            <a:ext cx="9601200" cy="676656"/>
+          </a:xfrm>
+          <a:prstGeom prst="rect">
+            <a:avLst/>
+          </a:prstGeom>
+          <a:noFill/>
+          <a:ln/>
+        </p:spPr>
+        <p:txBody>
+          <a:bodyPr wrap="square" lIns="0" tIns="0" rIns="0" bIns="0" rtlCol="0" anchor="ctr"/>
+          <a:lstStyle/>
+          <a:p>
+            <a:pPr indent="0" marL="0">
+              <a:buNone/>
+            </a:pPr>
+            <a:r>
+              <a:rPr lang="en-US" sz="1450" b="1" dirty="0">
+                <a:solidFill>
+                  <a:srgbClr val="FFFFFF"/>
+                </a:solidFill>
+                <a:latin typeface="Malgun Gothic" pitchFamily="34" charset="0"/>
+                <a:ea typeface="Malgun Gothic" pitchFamily="34" charset="-122"/>
+                <a:cs typeface="Malgun Gothic" pitchFamily="34" charset="-120"/>
+              </a:rPr>
+              <a:t>DB는 환경마다 분리 — 절대 공유 금지</a:t>
+            </a:r>
+            <a:endParaRPr lang="en-US" sz="1450" dirty="0"/>
+          </a:p>
+        </p:txBody>
+      </p:sp>
+      <p:sp>
+        <p:nvSpPr>
+          <p:cNvPr id="9" name="Shape 7"/>
+          <p:cNvSpPr/>
+          <p:nvPr/>
+        </p:nvSpPr>
+        <p:spPr>
+          <a:xfrm>
+            <a:off x="731520" y="2834640"/>
+            <a:ext cx="10698480" cy="676656"/>
+          </a:xfrm>
+          <a:prstGeom prst="roundRect">
+            <a:avLst>
+              <a:gd name="adj" fmla="val 9459"/>
+            </a:avLst>
+          </a:prstGeom>
+          <a:solidFill>
+            <a:srgbClr val="2A1A66"/>
+          </a:solidFill>
+          <a:ln/>
+        </p:spPr>
+      </p:sp>
+      <p:sp>
+        <p:nvSpPr>
+          <p:cNvPr id="10" name="Text 8"/>
+          <p:cNvSpPr/>
+          <p:nvPr/>
+        </p:nvSpPr>
+        <p:spPr>
+          <a:xfrm>
+            <a:off x="914400" y="2834640"/>
+            <a:ext cx="548640" cy="676656"/>
+          </a:xfrm>
+          <a:prstGeom prst="rect">
+            <a:avLst/>
+          </a:prstGeom>
+          <a:noFill/>
+          <a:ln/>
+        </p:spPr>
+        <p:txBody>
+          <a:bodyPr wrap="square" lIns="0" tIns="0" rIns="0" bIns="0" rtlCol="0" anchor="ctr"/>
+          <a:lstStyle/>
+          <a:p>
+            <a:pPr algn="ctr" indent="0" marL="0">
+              <a:buNone/>
+            </a:pPr>
+            <a:r>
+              <a:rPr lang="en-US" sz="2000" b="1" dirty="0">
+                <a:solidFill>
+                  <a:srgbClr val="F5B731"/>
+                </a:solidFill>
+                <a:latin typeface="Malgun Gothic" pitchFamily="34" charset="0"/>
+                <a:ea typeface="Malgun Gothic" pitchFamily="34" charset="-122"/>
+                <a:cs typeface="Malgun Gothic" pitchFamily="34" charset="-120"/>
+              </a:rPr>
+              <a:t>2</a:t>
+            </a:r>
+            <a:endParaRPr lang="en-US" sz="2000" dirty="0"/>
+          </a:p>
+        </p:txBody>
+      </p:sp>
+      <p:sp>
+        <p:nvSpPr>
+          <p:cNvPr id="11" name="Text 9"/>
+          <p:cNvSpPr/>
+          <p:nvPr/>
+        </p:nvSpPr>
+        <p:spPr>
+          <a:xfrm>
+            <a:off x="1600200" y="2834640"/>
+            <a:ext cx="9601200" cy="676656"/>
+          </a:xfrm>
+          <a:prstGeom prst="rect">
+            <a:avLst/>
+          </a:prstGeom>
+          <a:noFill/>
+          <a:ln/>
+        </p:spPr>
+        <p:txBody>
+          <a:bodyPr wrap="square" lIns="0" tIns="0" rIns="0" bIns="0" rtlCol="0" anchor="ctr"/>
+          <a:lstStyle/>
+          <a:p>
+            <a:pPr indent="0" marL="0">
+              <a:buNone/>
+            </a:pPr>
+            <a:r>
+              <a:rPr lang="en-US" sz="1450" b="1" dirty="0">
+                <a:solidFill>
+                  <a:srgbClr val="FFFFFF"/>
+                </a:solidFill>
+                <a:latin typeface="Malgun Gothic" pitchFamily="34" charset="0"/>
+                <a:ea typeface="Malgun Gothic" pitchFamily="34" charset="-122"/>
+                <a:cs typeface="Malgun Gothic" pitchFamily="34" charset="-120"/>
+              </a:rPr>
+              <a:t>마이그레이션은 Dev → Staging → Prod 순서로만</a:t>
+            </a:r>
+            <a:endParaRPr lang="en-US" sz="1450" dirty="0"/>
+          </a:p>
+        </p:txBody>
+      </p:sp>
+      <p:sp>
+        <p:nvSpPr>
+          <p:cNvPr id="12" name="Shape 10"/>
+          <p:cNvSpPr/>
+          <p:nvPr/>
+        </p:nvSpPr>
+        <p:spPr>
+          <a:xfrm>
+            <a:off x="731520" y="3611880"/>
+            <a:ext cx="10698480" cy="676656"/>
+          </a:xfrm>
+          <a:prstGeom prst="roundRect">
+            <a:avLst>
+              <a:gd name="adj" fmla="val 9459"/>
+            </a:avLst>
+          </a:prstGeom>
+          <a:solidFill>
+            <a:srgbClr val="2A1A66"/>
+          </a:solidFill>
+          <a:ln/>
+        </p:spPr>
+      </p:sp>
+      <p:sp>
+        <p:nvSpPr>
+          <p:cNvPr id="13" name="Text 11"/>
+          <p:cNvSpPr/>
+          <p:nvPr/>
+        </p:nvSpPr>
+        <p:spPr>
+          <a:xfrm>
+            <a:off x="914400" y="3611880"/>
+            <a:ext cx="548640" cy="676656"/>
+          </a:xfrm>
+          <a:prstGeom prst="rect">
+            <a:avLst/>
+          </a:prstGeom>
+          <a:noFill/>
+          <a:ln/>
+        </p:spPr>
+        <p:txBody>
+          <a:bodyPr wrap="square" lIns="0" tIns="0" rIns="0" bIns="0" rtlCol="0" anchor="ctr"/>
+          <a:lstStyle/>
+          <a:p>
+            <a:pPr algn="ctr" indent="0" marL="0">
+              <a:buNone/>
+            </a:pPr>
+            <a:r>
+              <a:rPr lang="en-US" sz="2000" b="1" dirty="0">
+                <a:solidFill>
+                  <a:srgbClr val="F5B731"/>
+                </a:solidFill>
+                <a:latin typeface="Malgun Gothic" pitchFamily="34" charset="0"/>
+                <a:ea typeface="Malgun Gothic" pitchFamily="34" charset="-122"/>
+                <a:cs typeface="Malgun Gothic" pitchFamily="34" charset="-120"/>
+              </a:rPr>
+              <a:t>3</a:t>
+            </a:r>
+            <a:endParaRPr lang="en-US" sz="2000" dirty="0"/>
+          </a:p>
+        </p:txBody>
+      </p:sp>
+      <p:sp>
+        <p:nvSpPr>
+          <p:cNvPr id="14" name="Text 12"/>
+          <p:cNvSpPr/>
+          <p:nvPr/>
+        </p:nvSpPr>
+        <p:spPr>
+          <a:xfrm>
+            <a:off x="1600200" y="3611880"/>
+            <a:ext cx="9601200" cy="676656"/>
+          </a:xfrm>
+          <a:prstGeom prst="rect">
+            <a:avLst/>
+          </a:prstGeom>
+          <a:noFill/>
+          <a:ln/>
+        </p:spPr>
+        <p:txBody>
+          <a:bodyPr wrap="square" lIns="0" tIns="0" rIns="0" bIns="0" rtlCol="0" anchor="ctr"/>
+          <a:lstStyle/>
+          <a:p>
+            <a:pPr indent="0" marL="0">
+              <a:buNone/>
+            </a:pPr>
+            <a:r>
+              <a:rPr lang="en-US" sz="1450" b="1" dirty="0">
+                <a:solidFill>
+                  <a:srgbClr val="FFFFFF"/>
+                </a:solidFill>
+                <a:latin typeface="Malgun Gothic" pitchFamily="34" charset="0"/>
+                <a:ea typeface="Malgun Gothic" pitchFamily="34" charset="-122"/>
+                <a:cs typeface="Malgun Gothic" pitchFamily="34" charset="-120"/>
+              </a:rPr>
+              <a:t>운영 데이터·시크릿은 하위 환경으로 흐르지 않는다</a:t>
+            </a:r>
+            <a:endParaRPr lang="en-US" sz="1450" dirty="0"/>
+          </a:p>
+        </p:txBody>
+      </p:sp>
+      <p:sp>
+        <p:nvSpPr>
+          <p:cNvPr id="15" name="Shape 13"/>
+          <p:cNvSpPr/>
+          <p:nvPr/>
+        </p:nvSpPr>
+        <p:spPr>
+          <a:xfrm>
+            <a:off x="731520" y="4389120"/>
+            <a:ext cx="10698480" cy="676656"/>
+          </a:xfrm>
+          <a:prstGeom prst="roundRect">
+            <a:avLst>
+              <a:gd name="adj" fmla="val 9459"/>
+            </a:avLst>
+          </a:prstGeom>
+          <a:solidFill>
+            <a:srgbClr val="2A1A66"/>
+          </a:solidFill>
+          <a:ln/>
+        </p:spPr>
+      </p:sp>
+      <p:sp>
+        <p:nvSpPr>
+          <p:cNvPr id="16" name="Text 14"/>
+          <p:cNvSpPr/>
+          <p:nvPr/>
+        </p:nvSpPr>
+        <p:spPr>
+          <a:xfrm>
+            <a:off x="914400" y="4389120"/>
+            <a:ext cx="548640" cy="676656"/>
+          </a:xfrm>
+          <a:prstGeom prst="rect">
+            <a:avLst/>
+          </a:prstGeom>
+          <a:noFill/>
+          <a:ln/>
+        </p:spPr>
+        <p:txBody>
+          <a:bodyPr wrap="square" lIns="0" tIns="0" rIns="0" bIns="0" rtlCol="0" anchor="ctr"/>
+          <a:lstStyle/>
+          <a:p>
+            <a:pPr algn="ctr" indent="0" marL="0">
+              <a:buNone/>
+            </a:pPr>
+            <a:r>
+              <a:rPr lang="en-US" sz="2000" b="1" dirty="0">
+                <a:solidFill>
+                  <a:srgbClr val="F5B731"/>
+                </a:solidFill>
+                <a:latin typeface="Malgun Gothic" pitchFamily="34" charset="0"/>
+                <a:ea typeface="Malgun Gothic" pitchFamily="34" charset="-122"/>
+                <a:cs typeface="Malgun Gothic" pitchFamily="34" charset="-120"/>
+              </a:rPr>
+              <a:t>4</a:t>
+            </a:r>
+            <a:endParaRPr lang="en-US" sz="2000" dirty="0"/>
+          </a:p>
+        </p:txBody>
+      </p:sp>
+      <p:sp>
+        <p:nvSpPr>
+          <p:cNvPr id="17" name="Text 15"/>
+          <p:cNvSpPr/>
+          <p:nvPr/>
+        </p:nvSpPr>
+        <p:spPr>
+          <a:xfrm>
+            <a:off x="1600200" y="4389120"/>
+            <a:ext cx="9601200" cy="676656"/>
+          </a:xfrm>
+          <a:prstGeom prst="rect">
+            <a:avLst/>
+          </a:prstGeom>
+          <a:noFill/>
+          <a:ln/>
+        </p:spPr>
+        <p:txBody>
+          <a:bodyPr wrap="square" lIns="0" tIns="0" rIns="0" bIns="0" rtlCol="0" anchor="ctr"/>
+          <a:lstStyle/>
+          <a:p>
+            <a:pPr indent="0" marL="0">
+              <a:buNone/>
+            </a:pPr>
+            <a:r>
+              <a:rPr lang="en-US" sz="1450" b="1" dirty="0">
+                <a:solidFill>
+                  <a:srgbClr val="FFFFFF"/>
+                </a:solidFill>
+                <a:latin typeface="Malgun Gothic" pitchFamily="34" charset="0"/>
+                <a:ea typeface="Malgun Gothic" pitchFamily="34" charset="-122"/>
+                <a:cs typeface="Malgun Gothic" pitchFamily="34" charset="-120"/>
+              </a:rPr>
+              <a:t>코드는 git, 스키마는 sql/NNN — 둘 다 단방향 승격</a:t>
+            </a:r>
+            <a:endParaRPr lang="en-US" sz="1450" dirty="0"/>
+          </a:p>
+        </p:txBody>
+      </p:sp>
+      <p:sp>
+        <p:nvSpPr>
+          <p:cNvPr id="18" name="Shape 16"/>
+          <p:cNvSpPr/>
+          <p:nvPr/>
+        </p:nvSpPr>
+        <p:spPr>
+          <a:xfrm>
+            <a:off x="731520" y="5166360"/>
+            <a:ext cx="10698480" cy="676656"/>
+          </a:xfrm>
+          <a:prstGeom prst="roundRect">
+            <a:avLst>
+              <a:gd name="adj" fmla="val 9459"/>
+            </a:avLst>
+          </a:prstGeom>
+          <a:solidFill>
+            <a:srgbClr val="2A1A66"/>
+          </a:solidFill>
+          <a:ln/>
+        </p:spPr>
+      </p:sp>
+      <p:sp>
+        <p:nvSpPr>
+          <p:cNvPr id="19" name="Text 17"/>
+          <p:cNvSpPr/>
+          <p:nvPr/>
+        </p:nvSpPr>
+        <p:spPr>
+          <a:xfrm>
+            <a:off x="914400" y="5166360"/>
+            <a:ext cx="548640" cy="676656"/>
+          </a:xfrm>
+          <a:prstGeom prst="rect">
+            <a:avLst/>
+          </a:prstGeom>
+          <a:noFill/>
+          <a:ln/>
+        </p:spPr>
+        <p:txBody>
+          <a:bodyPr wrap="square" lIns="0" tIns="0" rIns="0" bIns="0" rtlCol="0" anchor="ctr"/>
+          <a:lstStyle/>
+          <a:p>
+            <a:pPr algn="ctr" indent="0" marL="0">
+              <a:buNone/>
+            </a:pPr>
+            <a:r>
+              <a:rPr lang="en-US" sz="2000" b="1" dirty="0">
+                <a:solidFill>
+                  <a:srgbClr val="F5B731"/>
+                </a:solidFill>
+                <a:latin typeface="Malgun Gothic" pitchFamily="34" charset="0"/>
+                <a:ea typeface="Malgun Gothic" pitchFamily="34" charset="-122"/>
+                <a:cs typeface="Malgun Gothic" pitchFamily="34" charset="-120"/>
+              </a:rPr>
+              <a:t>5</a:t>
+            </a:r>
+            <a:endParaRPr lang="en-US" sz="2000" dirty="0"/>
+          </a:p>
+        </p:txBody>
+      </p:sp>
+      <p:sp>
+        <p:nvSpPr>
+          <p:cNvPr id="20" name="Text 18"/>
+          <p:cNvSpPr/>
+          <p:nvPr/>
+        </p:nvSpPr>
+        <p:spPr>
+          <a:xfrm>
+            <a:off x="1600200" y="5166360"/>
+            <a:ext cx="9601200" cy="676656"/>
+          </a:xfrm>
+          <a:prstGeom prst="rect">
+            <a:avLst/>
+          </a:prstGeom>
+          <a:noFill/>
+          <a:ln/>
+        </p:spPr>
+        <p:txBody>
+          <a:bodyPr wrap="square" lIns="0" tIns="0" rIns="0" bIns="0" rtlCol="0" anchor="ctr"/>
+          <a:lstStyle/>
+          <a:p>
+            <a:pPr indent="0" marL="0">
+              <a:buNone/>
+            </a:pPr>
+            <a:r>
+              <a:rPr lang="en-US" sz="1450" b="1" dirty="0">
+                <a:solidFill>
+                  <a:srgbClr val="FFFFFF"/>
+                </a:solidFill>
+                <a:latin typeface="Malgun Gothic" pitchFamily="34" charset="0"/>
+                <a:ea typeface="Malgun Gothic" pitchFamily="34" charset="-122"/>
+                <a:cs typeface="Malgun Gothic" pitchFamily="34" charset="-120"/>
+              </a:rPr>
+              <a:t>운영 직접 변경 금지 — 항상 스테이징에서 리허설</a:t>
+            </a:r>
+            <a:endParaRPr lang="en-US" sz="1450" dirty="0"/>
+          </a:p>
+        </p:txBody>
+      </p:sp>
+      <p:sp>
+        <p:nvSpPr>
+          <p:cNvPr id="21" name="Text 19"/>
+          <p:cNvSpPr/>
+          <p:nvPr/>
+        </p:nvSpPr>
+        <p:spPr>
+          <a:xfrm>
+            <a:off x="731520" y="6309360"/>
+            <a:ext cx="10058400" cy="320040"/>
+          </a:xfrm>
+          <a:prstGeom prst="rect">
+            <a:avLst/>
+          </a:prstGeom>
+          <a:noFill/>
+          <a:ln/>
+        </p:spPr>
+        <p:txBody>
+          <a:bodyPr wrap="square" lIns="0" tIns="0" rIns="0" bIns="0" rtlCol="0" anchor="ctr"/>
+          <a:lstStyle/>
+          <a:p>
+            <a:pPr indent="0" marL="0">
+              <a:buNone/>
+            </a:pPr>
+            <a:r>
+              <a:rPr lang="en-US" sz="1000" dirty="0">
+                <a:solidFill>
+                  <a:srgbClr val="9B8BC4"/>
+                </a:solidFill>
+                <a:latin typeface="Malgun Gothic" pitchFamily="34" charset="0"/>
+                <a:ea typeface="Malgun Gothic" pitchFamily="34" charset="-122"/>
+                <a:cs typeface="Malgun Gothic" pitchFamily="34" charset="-120"/>
+              </a:rPr>
+              <a:t>cafe.pi · 인프라 환경 전략 · 2026-06-26</a:t>
+            </a:r>
+            <a:endParaRPr lang="en-US" sz="1000" dirty="0"/>
+          </a:p>
+        </p:txBody>
+      </p:sp>
+    </p:spTree>
+  </p:cSld>
+  <p:clrMapOvr>
+    <a:masterClrMapping/>
+  </p:clrMapOvr>
+</p:sld>
+</file>
+
 <file path=ppt/slides/slide2.xml><?xml version="1.0" encoding="utf-8"?>
 <p:sld xmlns:a="http://schemas.openxmlformats.org/drawingml/2006/main" xmlns:r="http://schemas.openxmlformats.org/officeDocument/2006/relationships" xmlns:p="http://schemas.openxmlformats.org/presentationml/2006/main">
   <p:cSld name="Slide 2">
@@ -5591,7 +6373,7 @@
                 <a:ea typeface="Malgun Gothic" pitchFamily="34" charset="-122"/>
                 <a:cs typeface="Malgun Gothic" pitchFamily="34" charset="-120"/>
               </a:rPr>
-              <a:t>FLOW · 승격 파이프라인</a:t>
+              <a:t>SYNC · 환경 간 동기화</a:t>
             </a:r>
             <a:endParaRPr lang="en-US" sz="1200" dirty="0"/>
           </a:p>
@@ -5630,7 +6412,7 @@
                 <a:ea typeface="Malgun Gothic" pitchFamily="34" charset="-122"/>
                 <a:cs typeface="Malgun Gothic" pitchFamily="34" charset="-120"/>
               </a:rPr>
-              <a:t>코드와 DB는 단방향으로만 흐른다</a:t>
+              <a:t>스키마 ↑ / 데이터 ↓ — 올바른 도구 선택</a:t>
             </a:r>
             <a:endParaRPr lang="en-US" sz="2600" dirty="0"/>
           </a:p>
@@ -5638,63 +6420,136 @@
       </p:sp>
       <p:sp>
         <p:nvSpPr>
-          <p:cNvPr id="4" name="Text 2"/>
-          <p:cNvSpPr/>
-          <p:nvPr/>
-        </p:nvSpPr>
-        <p:spPr>
-          <a:xfrm>
-            <a:off x="548640" y="1783080"/>
-            <a:ext cx="1828800" cy="365760"/>
-          </a:xfrm>
-          <a:prstGeom prst="rect">
-            <a:avLst/>
-          </a:prstGeom>
-          <a:noFill/>
-          <a:ln/>
-        </p:spPr>
-        <p:txBody>
-          <a:bodyPr wrap="square" lIns="0" tIns="0" rIns="0" bIns="0" rtlCol="0" anchor="ctr"/>
-          <a:lstStyle/>
-          <a:p>
-            <a:pPr indent="0" marL="0">
-              <a:buNone/>
-            </a:pPr>
-            <a:r>
-              <a:rPr lang="en-US" sz="1300" b="1" dirty="0">
-                <a:solidFill>
-                  <a:srgbClr val="5B2A9D"/>
-                </a:solidFill>
-                <a:latin typeface="Malgun Gothic" pitchFamily="34" charset="0"/>
-                <a:ea typeface="Malgun Gothic" pitchFamily="34" charset="-122"/>
-                <a:cs typeface="Malgun Gothic" pitchFamily="34" charset="-120"/>
-              </a:rPr>
-              <a:t>코드 (git)</a:t>
-            </a:r>
-            <a:endParaRPr lang="en-US" sz="1300" dirty="0"/>
-          </a:p>
-        </p:txBody>
-      </p:sp>
-      <p:sp>
-        <p:nvSpPr>
-          <p:cNvPr id="5" name="Shape 3"/>
-          <p:cNvSpPr/>
-          <p:nvPr/>
-        </p:nvSpPr>
-        <p:spPr>
-          <a:xfrm>
-            <a:off x="2286000" y="1664208"/>
-            <a:ext cx="2468880" cy="868680"/>
+          <p:cNvPr id="4" name="Shape 2"/>
+          <p:cNvSpPr/>
+          <p:nvPr/>
+        </p:nvSpPr>
+        <p:spPr>
+          <a:xfrm>
+            <a:off x="822960" y="2514600"/>
+            <a:ext cx="3383280" cy="1600200"/>
           </a:xfrm>
           <a:prstGeom prst="roundRect">
             <a:avLst>
-              <a:gd name="adj" fmla="val 8421"/>
+              <a:gd name="adj" fmla="val 5714"/>
             </a:avLst>
           </a:prstGeom>
           <a:solidFill>
             <a:srgbClr val="FFFFFF"/>
           </a:solidFill>
-          <a:ln w="15875">
+          <a:ln w="19050">
+            <a:solidFill>
+              <a:srgbClr val="2563EB"/>
+            </a:solidFill>
+            <a:prstDash val="solid"/>
+          </a:ln>
+          <a:effectLst>
+            <a:outerShdw sx="100000" sy="100000" kx="0" ky="0" algn="bl" rotWithShape="0" blurRad="101600" dist="38100" dir="8100000">
+              <a:srgbClr val="1A1145">
+                <a:alpha val="16000"/>
+              </a:srgbClr>
+            </a:outerShdw>
+          </a:effectLst>
+        </p:spPr>
+      </p:sp>
+      <p:sp>
+        <p:nvSpPr>
+          <p:cNvPr id="5" name="Text 3"/>
+          <p:cNvSpPr/>
+          <p:nvPr/>
+        </p:nvSpPr>
+        <p:spPr>
+          <a:xfrm>
+            <a:off x="822960" y="2788920"/>
+            <a:ext cx="3383280" cy="411480"/>
+          </a:xfrm>
+          <a:prstGeom prst="rect">
+            <a:avLst/>
+          </a:prstGeom>
+          <a:noFill/>
+          <a:ln/>
+        </p:spPr>
+        <p:txBody>
+          <a:bodyPr wrap="square" lIns="0" tIns="0" rIns="0" bIns="0" rtlCol="0" anchor="ctr"/>
+          <a:lstStyle/>
+          <a:p>
+            <a:pPr algn="ctr" indent="0" marL="0">
+              <a:buNone/>
+            </a:pPr>
+            <a:r>
+              <a:rPr lang="en-US" sz="1600" b="1" dirty="0">
+                <a:solidFill>
+                  <a:srgbClr val="2563EB"/>
+                </a:solidFill>
+                <a:latin typeface="Malgun Gothic" pitchFamily="34" charset="0"/>
+                <a:ea typeface="Malgun Gothic" pitchFamily="34" charset="-122"/>
+                <a:cs typeface="Malgun Gothic" pitchFamily="34" charset="-120"/>
+              </a:rPr>
+              <a:t>🛠️  개발 DB</a:t>
+            </a:r>
+            <a:endParaRPr lang="en-US" sz="1600" dirty="0"/>
+          </a:p>
+        </p:txBody>
+      </p:sp>
+      <p:sp>
+        <p:nvSpPr>
+          <p:cNvPr id="6" name="Text 4"/>
+          <p:cNvSpPr/>
+          <p:nvPr/>
+        </p:nvSpPr>
+        <p:spPr>
+          <a:xfrm>
+            <a:off x="822960" y="3246120"/>
+            <a:ext cx="3383280" cy="365760"/>
+          </a:xfrm>
+          <a:prstGeom prst="rect">
+            <a:avLst/>
+          </a:prstGeom>
+          <a:noFill/>
+          <a:ln/>
+        </p:spPr>
+        <p:txBody>
+          <a:bodyPr wrap="square" lIns="0" tIns="0" rIns="0" bIns="0" rtlCol="0" anchor="ctr"/>
+          <a:lstStyle/>
+          <a:p>
+            <a:pPr algn="ctr" indent="0" marL="0">
+              <a:buNone/>
+            </a:pPr>
+            <a:r>
+              <a:rPr lang="en-US" sz="1150" dirty="0">
+                <a:solidFill>
+                  <a:srgbClr val="241B3A"/>
+                </a:solidFill>
+                <a:latin typeface="Malgun Gothic" pitchFamily="34" charset="0"/>
+                <a:ea typeface="Malgun Gothic" pitchFamily="34" charset="-122"/>
+                <a:cs typeface="Malgun Gothic" pitchFamily="34" charset="-120"/>
+              </a:rPr>
+              <a:t>로컬 Supabase (CLI)</a:t>
+            </a:r>
+            <a:endParaRPr lang="en-US" sz="1150" dirty="0"/>
+          </a:p>
+        </p:txBody>
+      </p:sp>
+      <p:sp>
+        <p:nvSpPr>
+          <p:cNvPr id="7" name="Shape 5"/>
+          <p:cNvSpPr/>
+          <p:nvPr/>
+        </p:nvSpPr>
+        <p:spPr>
+          <a:xfrm>
+            <a:off x="7982712" y="2514600"/>
+            <a:ext cx="3383280" cy="1600200"/>
+          </a:xfrm>
+          <a:prstGeom prst="roundRect">
+            <a:avLst>
+              <a:gd name="adj" fmla="val 5714"/>
+            </a:avLst>
+          </a:prstGeom>
+          <a:solidFill>
+            <a:srgbClr val="EEE9F8"/>
+          </a:solidFill>
+          <a:ln w="19050">
             <a:solidFill>
               <a:srgbClr val="5B2A9D"/>
             </a:solidFill>
@@ -5711,14 +6566,14 @@
       </p:sp>
       <p:sp>
         <p:nvSpPr>
-          <p:cNvPr id="6" name="Text 4"/>
-          <p:cNvSpPr/>
-          <p:nvPr/>
-        </p:nvSpPr>
-        <p:spPr>
-          <a:xfrm>
-            <a:off x="2377440" y="1664208"/>
-            <a:ext cx="2286000" cy="868680"/>
+          <p:cNvPr id="8" name="Text 6"/>
+          <p:cNvSpPr/>
+          <p:nvPr/>
+        </p:nvSpPr>
+        <p:spPr>
+          <a:xfrm>
+            <a:off x="7982712" y="2788920"/>
+            <a:ext cx="3383280" cy="411480"/>
           </a:xfrm>
           <a:prstGeom prst="rect">
             <a:avLst/>
@@ -5734,7 +6589,46 @@
               <a:buNone/>
             </a:pPr>
             <a:r>
-              <a:rPr lang="en-US" sz="1150" b="1" dirty="0">
+              <a:rPr lang="en-US" sz="1600" b="1" dirty="0">
+                <a:solidFill>
+                  <a:srgbClr val="5B2A9D"/>
+                </a:solidFill>
+                <a:latin typeface="Malgun Gothic" pitchFamily="34" charset="0"/>
+                <a:ea typeface="Malgun Gothic" pitchFamily="34" charset="-122"/>
+                <a:cs typeface="Malgun Gothic" pitchFamily="34" charset="-120"/>
+              </a:rPr>
+              <a:t>🚀  운영 DB</a:t>
+            </a:r>
+            <a:endParaRPr lang="en-US" sz="1600" dirty="0"/>
+          </a:p>
+        </p:txBody>
+      </p:sp>
+      <p:sp>
+        <p:nvSpPr>
+          <p:cNvPr id="9" name="Text 7"/>
+          <p:cNvSpPr/>
+          <p:nvPr/>
+        </p:nvSpPr>
+        <p:spPr>
+          <a:xfrm>
+            <a:off x="7982712" y="3246120"/>
+            <a:ext cx="3383280" cy="365760"/>
+          </a:xfrm>
+          <a:prstGeom prst="rect">
+            <a:avLst/>
+          </a:prstGeom>
+          <a:noFill/>
+          <a:ln/>
+        </p:spPr>
+        <p:txBody>
+          <a:bodyPr wrap="square" lIns="0" tIns="0" rIns="0" bIns="0" rtlCol="0" anchor="ctr"/>
+          <a:lstStyle/>
+          <a:p>
+            <a:pPr algn="ctr" indent="0" marL="0">
+              <a:buNone/>
+            </a:pPr>
+            <a:r>
+              <a:rPr lang="en-US" sz="1150" dirty="0">
                 <a:solidFill>
                   <a:srgbClr val="241B3A"/>
                 </a:solidFill>
@@ -5742,63 +6636,222 @@
                 <a:ea typeface="Malgun Gothic" pitchFamily="34" charset="-122"/>
                 <a:cs typeface="Malgun Gothic" pitchFamily="34" charset="-120"/>
               </a:rPr>
-              <a:t>feature/*</a:t>
+              <a:t>Supabase Prod</a:t>
             </a:r>
             <a:endParaRPr lang="en-US" sz="1150" dirty="0"/>
           </a:p>
+        </p:txBody>
+      </p:sp>
+      <p:sp>
+        <p:nvSpPr>
+          <p:cNvPr id="10" name="Text 8"/>
+          <p:cNvSpPr/>
+          <p:nvPr/>
+        </p:nvSpPr>
+        <p:spPr>
+          <a:xfrm>
+            <a:off x="4160520" y="2286000"/>
+            <a:ext cx="3794760" cy="274320"/>
+          </a:xfrm>
+          <a:prstGeom prst="rect">
+            <a:avLst/>
+          </a:prstGeom>
+          <a:noFill/>
+          <a:ln/>
+        </p:spPr>
+        <p:txBody>
+          <a:bodyPr wrap="square" lIns="0" tIns="0" rIns="0" bIns="0" rtlCol="0" anchor="ctr"/>
+          <a:lstStyle/>
           <a:p>
             <a:pPr algn="ctr" indent="0" marL="0">
               <a:buNone/>
             </a:pPr>
             <a:r>
-              <a:rPr lang="en-US" sz="1150" b="1" dirty="0">
-                <a:solidFill>
-                  <a:srgbClr val="241B3A"/>
-                </a:solidFill>
-                <a:latin typeface="Malgun Gothic" pitchFamily="34" charset="0"/>
-                <a:ea typeface="Malgun Gothic" pitchFamily="34" charset="-122"/>
-                <a:cs typeface="Malgun Gothic" pitchFamily="34" charset="-120"/>
-              </a:rPr>
-              <a:t>(개발)</a:t>
-            </a:r>
-            <a:endParaRPr lang="en-US" sz="1150" dirty="0"/>
-          </a:p>
-        </p:txBody>
-      </p:sp>
-      <p:sp>
-        <p:nvSpPr>
-          <p:cNvPr id="7" name="Shape 5"/>
-          <p:cNvSpPr/>
-          <p:nvPr/>
-        </p:nvSpPr>
-        <p:spPr>
-          <a:xfrm>
-            <a:off x="4828032" y="1874520"/>
-            <a:ext cx="539496" cy="457200"/>
+              <a:rPr lang="en-US" sz="1200" b="1" dirty="0">
+                <a:solidFill>
+                  <a:srgbClr val="16A34A"/>
+                </a:solidFill>
+                <a:latin typeface="Malgun Gothic" pitchFamily="34" charset="0"/>
+                <a:ea typeface="Malgun Gothic" pitchFamily="34" charset="-122"/>
+                <a:cs typeface="Malgun Gothic" pitchFamily="34" charset="-120"/>
+              </a:rPr>
+              <a:t>①  스키마 ↑  —  마이그레이션</a:t>
+            </a:r>
+            <a:endParaRPr lang="en-US" sz="1200" dirty="0"/>
+          </a:p>
+        </p:txBody>
+      </p:sp>
+      <p:sp>
+        <p:nvSpPr>
+          <p:cNvPr id="11" name="Shape 9"/>
+          <p:cNvSpPr/>
+          <p:nvPr/>
+        </p:nvSpPr>
+        <p:spPr>
+          <a:xfrm>
+            <a:off x="4315968" y="2606040"/>
+            <a:ext cx="3474720" cy="457200"/>
           </a:xfrm>
           <a:prstGeom prst="rightArrow">
             <a:avLst/>
           </a:prstGeom>
           <a:solidFill>
-            <a:srgbClr val="5B2A9D"/>
+            <a:srgbClr val="16A34A"/>
           </a:solidFill>
           <a:ln/>
         </p:spPr>
       </p:sp>
       <p:sp>
         <p:nvSpPr>
-          <p:cNvPr id="8" name="Shape 6"/>
-          <p:cNvSpPr/>
-          <p:nvPr/>
-        </p:nvSpPr>
-        <p:spPr>
-          <a:xfrm>
-            <a:off x="5440680" y="1664208"/>
-            <a:ext cx="2468880" cy="868680"/>
+          <p:cNvPr id="12" name="Text 10"/>
+          <p:cNvSpPr/>
+          <p:nvPr/>
+        </p:nvSpPr>
+        <p:spPr>
+          <a:xfrm>
+            <a:off x="4206240" y="2670048"/>
+            <a:ext cx="3694176" cy="329184"/>
+          </a:xfrm>
+          <a:prstGeom prst="rect">
+            <a:avLst/>
+          </a:prstGeom>
+          <a:noFill/>
+          <a:ln/>
+        </p:spPr>
+        <p:txBody>
+          <a:bodyPr wrap="square" lIns="0" tIns="0" rIns="0" bIns="0" rtlCol="0" anchor="ctr"/>
+          <a:lstStyle/>
+          <a:p>
+            <a:pPr algn="ctr" indent="0" marL="0">
+              <a:buNone/>
+            </a:pPr>
+            <a:r>
+              <a:rPr lang="en-US" sz="1000" b="1" dirty="0">
+                <a:solidFill>
+                  <a:srgbClr val="FFFFFF"/>
+                </a:solidFill>
+                <a:latin typeface="Malgun Gothic" pitchFamily="34" charset="0"/>
+                <a:ea typeface="Malgun Gothic" pitchFamily="34" charset="-122"/>
+                <a:cs typeface="Malgun Gothic" pitchFamily="34" charset="-120"/>
+              </a:rPr>
+              <a:t>db diff → db push  /  Branching</a:t>
+            </a:r>
+            <a:endParaRPr lang="en-US" sz="1000" dirty="0"/>
+          </a:p>
+        </p:txBody>
+      </p:sp>
+      <p:sp>
+        <p:nvSpPr>
+          <p:cNvPr id="13" name="Shape 11"/>
+          <p:cNvSpPr/>
+          <p:nvPr/>
+        </p:nvSpPr>
+        <p:spPr>
+          <a:xfrm>
+            <a:off x="4315968" y="3566160"/>
+            <a:ext cx="3474720" cy="457200"/>
+          </a:xfrm>
+          <a:prstGeom prst="leftArrow">
+            <a:avLst/>
+          </a:prstGeom>
+          <a:solidFill>
+            <a:srgbClr val="2563EB"/>
+          </a:solidFill>
+          <a:ln/>
+        </p:spPr>
+      </p:sp>
+      <p:sp>
+        <p:nvSpPr>
+          <p:cNvPr id="14" name="Text 12"/>
+          <p:cNvSpPr/>
+          <p:nvPr/>
+        </p:nvSpPr>
+        <p:spPr>
+          <a:xfrm>
+            <a:off x="4206240" y="3630168"/>
+            <a:ext cx="3694176" cy="329184"/>
+          </a:xfrm>
+          <a:prstGeom prst="rect">
+            <a:avLst/>
+          </a:prstGeom>
+          <a:noFill/>
+          <a:ln/>
+        </p:spPr>
+        <p:txBody>
+          <a:bodyPr wrap="square" lIns="0" tIns="0" rIns="0" bIns="0" rtlCol="0" anchor="ctr"/>
+          <a:lstStyle/>
+          <a:p>
+            <a:pPr algn="ctr" indent="0" marL="0">
+              <a:buNone/>
+            </a:pPr>
+            <a:r>
+              <a:rPr lang="en-US" sz="1000" b="1" dirty="0">
+                <a:solidFill>
+                  <a:srgbClr val="FFFFFF"/>
+                </a:solidFill>
+                <a:latin typeface="Malgun Gothic" pitchFamily="34" charset="0"/>
+                <a:ea typeface="Malgun Gothic" pitchFamily="34" charset="-122"/>
+                <a:cs typeface="Malgun Gothic" pitchFamily="34" charset="-120"/>
+              </a:rPr>
+              <a:t>🔒  마스킹 스냅샷 / seed</a:t>
+            </a:r>
+            <a:endParaRPr lang="en-US" sz="1000" dirty="0"/>
+          </a:p>
+        </p:txBody>
+      </p:sp>
+      <p:sp>
+        <p:nvSpPr>
+          <p:cNvPr id="15" name="Text 13"/>
+          <p:cNvSpPr/>
+          <p:nvPr/>
+        </p:nvSpPr>
+        <p:spPr>
+          <a:xfrm>
+            <a:off x="4160520" y="4069080"/>
+            <a:ext cx="3794760" cy="274320"/>
+          </a:xfrm>
+          <a:prstGeom prst="rect">
+            <a:avLst/>
+          </a:prstGeom>
+          <a:noFill/>
+          <a:ln/>
+        </p:spPr>
+        <p:txBody>
+          <a:bodyPr wrap="square" lIns="0" tIns="0" rIns="0" bIns="0" rtlCol="0" anchor="ctr"/>
+          <a:lstStyle/>
+          <a:p>
+            <a:pPr algn="ctr" indent="0" marL="0">
+              <a:buNone/>
+            </a:pPr>
+            <a:r>
+              <a:rPr lang="en-US" sz="1200" b="1" dirty="0">
+                <a:solidFill>
+                  <a:srgbClr val="2563EB"/>
+                </a:solidFill>
+                <a:latin typeface="Malgun Gothic" pitchFamily="34" charset="0"/>
+                <a:ea typeface="Malgun Gothic" pitchFamily="34" charset="-122"/>
+                <a:cs typeface="Malgun Gothic" pitchFamily="34" charset="-120"/>
+              </a:rPr>
+              <a:t>②  데이터 ↓  —  운영 PII 원본 금지</a:t>
+            </a:r>
+            <a:endParaRPr lang="en-US" sz="1200" dirty="0"/>
+          </a:p>
+        </p:txBody>
+      </p:sp>
+      <p:sp>
+        <p:nvSpPr>
+          <p:cNvPr id="16" name="Shape 14"/>
+          <p:cNvSpPr/>
+          <p:nvPr/>
+        </p:nvSpPr>
+        <p:spPr>
+          <a:xfrm>
+            <a:off x="548640" y="4709160"/>
+            <a:ext cx="5349240" cy="960120"/>
           </a:xfrm>
           <a:prstGeom prst="roundRect">
             <a:avLst>
-              <a:gd name="adj" fmla="val 8421"/>
+              <a:gd name="adj" fmla="val 7619"/>
             </a:avLst>
           </a:prstGeom>
           <a:solidFill>
@@ -5806,7 +6859,7 @@
           </a:solidFill>
           <a:ln w="15875">
             <a:solidFill>
-              <a:srgbClr val="5B2A9D"/>
+              <a:srgbClr val="16A34A"/>
             </a:solidFill>
             <a:prstDash val="solid"/>
           </a:ln>
@@ -5821,30 +6874,69 @@
       </p:sp>
       <p:sp>
         <p:nvSpPr>
-          <p:cNvPr id="9" name="Text 7"/>
-          <p:cNvSpPr/>
-          <p:nvPr/>
-        </p:nvSpPr>
-        <p:spPr>
-          <a:xfrm>
-            <a:off x="5532120" y="1664208"/>
-            <a:ext cx="2286000" cy="868680"/>
-          </a:xfrm>
-          <a:prstGeom prst="rect">
-            <a:avLst/>
-          </a:prstGeom>
-          <a:noFill/>
-          <a:ln/>
-        </p:spPr>
-        <p:txBody>
-          <a:bodyPr wrap="square" lIns="0" tIns="0" rIns="0" bIns="0" rtlCol="0" anchor="ctr"/>
-          <a:lstStyle/>
-          <a:p>
-            <a:pPr algn="ctr" indent="0" marL="0">
-              <a:buNone/>
-            </a:pPr>
-            <a:r>
-              <a:rPr lang="en-US" sz="1150" b="1" dirty="0">
+          <p:cNvPr id="17" name="Text 15"/>
+          <p:cNvSpPr/>
+          <p:nvPr/>
+        </p:nvSpPr>
+        <p:spPr>
+          <a:xfrm>
+            <a:off x="777240" y="4818888"/>
+            <a:ext cx="4937760" cy="320040"/>
+          </a:xfrm>
+          <a:prstGeom prst="rect">
+            <a:avLst/>
+          </a:prstGeom>
+          <a:noFill/>
+          <a:ln/>
+        </p:spPr>
+        <p:txBody>
+          <a:bodyPr wrap="square" lIns="0" tIns="0" rIns="0" bIns="0" rtlCol="0" anchor="ctr"/>
+          <a:lstStyle/>
+          <a:p>
+            <a:pPr indent="0" marL="0">
+              <a:buNone/>
+            </a:pPr>
+            <a:r>
+              <a:rPr lang="en-US" sz="1250" b="1" dirty="0">
+                <a:solidFill>
+                  <a:srgbClr val="16A34A"/>
+                </a:solidFill>
+                <a:latin typeface="Malgun Gothic" pitchFamily="34" charset="0"/>
+                <a:ea typeface="Malgun Gothic" pitchFamily="34" charset="-122"/>
+                <a:cs typeface="Malgun Gothic" pitchFamily="34" charset="-120"/>
+              </a:rPr>
+              <a:t>✅  CDC가 진짜 필요한 곳</a:t>
+            </a:r>
+            <a:endParaRPr lang="en-US" sz="1250" dirty="0"/>
+          </a:p>
+        </p:txBody>
+      </p:sp>
+      <p:sp>
+        <p:nvSpPr>
+          <p:cNvPr id="18" name="Text 16"/>
+          <p:cNvSpPr/>
+          <p:nvPr/>
+        </p:nvSpPr>
+        <p:spPr>
+          <a:xfrm>
+            <a:off x="777240" y="5138928"/>
+            <a:ext cx="4937760" cy="457200"/>
+          </a:xfrm>
+          <a:prstGeom prst="rect">
+            <a:avLst/>
+          </a:prstGeom>
+          <a:noFill/>
+          <a:ln/>
+        </p:spPr>
+        <p:txBody>
+          <a:bodyPr wrap="square" lIns="0" tIns="0" rIns="0" bIns="0" rtlCol="0" anchor="ctr"/>
+          <a:lstStyle/>
+          <a:p>
+            <a:pPr indent="0" marL="0">
+              <a:buNone/>
+            </a:pPr>
+            <a:r>
+              <a:rPr lang="en-US" sz="1050" dirty="0">
                 <a:solidFill>
                   <a:srgbClr val="241B3A"/>
                 </a:solidFill>
@@ -5852,63 +6944,26 @@
                 <a:ea typeface="Malgun Gothic" pitchFamily="34" charset="-122"/>
                 <a:cs typeface="Malgun Gothic" pitchFamily="34" charset="-120"/>
               </a:rPr>
-              <a:t>staging</a:t>
-            </a:r>
-            <a:endParaRPr lang="en-US" sz="1150" dirty="0"/>
-          </a:p>
-          <a:p>
-            <a:pPr algn="ctr" indent="0" marL="0">
-              <a:buNone/>
-            </a:pPr>
-            <a:r>
-              <a:rPr lang="en-US" sz="1150" b="1" dirty="0">
-                <a:solidFill>
-                  <a:srgbClr val="241B3A"/>
-                </a:solidFill>
-                <a:latin typeface="Malgun Gothic" pitchFamily="34" charset="0"/>
-                <a:ea typeface="Malgun Gothic" pitchFamily="34" charset="-122"/>
-                <a:cs typeface="Malgun Gothic" pitchFamily="34" charset="-120"/>
-              </a:rPr>
-              <a:t>(PR·리뷰·검증)</a:t>
-            </a:r>
-            <a:endParaRPr lang="en-US" sz="1150" dirty="0"/>
-          </a:p>
-        </p:txBody>
-      </p:sp>
-      <p:sp>
-        <p:nvSpPr>
-          <p:cNvPr id="10" name="Shape 8"/>
-          <p:cNvSpPr/>
-          <p:nvPr/>
-        </p:nvSpPr>
-        <p:spPr>
-          <a:xfrm>
-            <a:off x="7982712" y="1874520"/>
-            <a:ext cx="539496" cy="457200"/>
-          </a:xfrm>
-          <a:prstGeom prst="rightArrow">
-            <a:avLst/>
-          </a:prstGeom>
-          <a:solidFill>
-            <a:srgbClr val="5B2A9D"/>
-          </a:solidFill>
-          <a:ln/>
-        </p:spPr>
-      </p:sp>
-      <p:sp>
-        <p:nvSpPr>
-          <p:cNvPr id="11" name="Shape 9"/>
-          <p:cNvSpPr/>
-          <p:nvPr/>
-        </p:nvSpPr>
-        <p:spPr>
-          <a:xfrm>
-            <a:off x="8595360" y="1664208"/>
-            <a:ext cx="2468880" cy="868680"/>
+              <a:t>분석 웨어하우스(ETL/Pipelines) · 라이브 UI(Realtime). dev-prod 미러링용 아님</a:t>
+            </a:r>
+            <a:endParaRPr lang="en-US" sz="1050" dirty="0"/>
+          </a:p>
+        </p:txBody>
+      </p:sp>
+      <p:sp>
+        <p:nvSpPr>
+          <p:cNvPr id="19" name="Shape 17"/>
+          <p:cNvSpPr/>
+          <p:nvPr/>
+        </p:nvSpPr>
+        <p:spPr>
+          <a:xfrm>
+            <a:off x="6291072" y="4709160"/>
+            <a:ext cx="5349240" cy="960120"/>
           </a:xfrm>
           <a:prstGeom prst="roundRect">
             <a:avLst>
-              <a:gd name="adj" fmla="val 8421"/>
+              <a:gd name="adj" fmla="val 7619"/>
             </a:avLst>
           </a:prstGeom>
           <a:solidFill>
@@ -5916,7 +6971,7 @@
           </a:solidFill>
           <a:ln w="15875">
             <a:solidFill>
-              <a:srgbClr val="5B2A9D"/>
+              <a:srgbClr val="DC2626"/>
             </a:solidFill>
             <a:prstDash val="solid"/>
           </a:ln>
@@ -5931,30 +6986,69 @@
       </p:sp>
       <p:sp>
         <p:nvSpPr>
-          <p:cNvPr id="12" name="Text 10"/>
-          <p:cNvSpPr/>
-          <p:nvPr/>
-        </p:nvSpPr>
-        <p:spPr>
-          <a:xfrm>
-            <a:off x="8686800" y="1664208"/>
-            <a:ext cx="2286000" cy="868680"/>
-          </a:xfrm>
-          <a:prstGeom prst="rect">
-            <a:avLst/>
-          </a:prstGeom>
-          <a:noFill/>
-          <a:ln/>
-        </p:spPr>
-        <p:txBody>
-          <a:bodyPr wrap="square" lIns="0" tIns="0" rIns="0" bIns="0" rtlCol="0" anchor="ctr"/>
-          <a:lstStyle/>
-          <a:p>
-            <a:pPr algn="ctr" indent="0" marL="0">
-              <a:buNone/>
-            </a:pPr>
-            <a:r>
-              <a:rPr lang="en-US" sz="1150" b="1" dirty="0">
+          <p:cNvPr id="20" name="Text 18"/>
+          <p:cNvSpPr/>
+          <p:nvPr/>
+        </p:nvSpPr>
+        <p:spPr>
+          <a:xfrm>
+            <a:off x="6519672" y="4818888"/>
+            <a:ext cx="4937760" cy="320040"/>
+          </a:xfrm>
+          <a:prstGeom prst="rect">
+            <a:avLst/>
+          </a:prstGeom>
+          <a:noFill/>
+          <a:ln/>
+        </p:spPr>
+        <p:txBody>
+          <a:bodyPr wrap="square" lIns="0" tIns="0" rIns="0" bIns="0" rtlCol="0" anchor="ctr"/>
+          <a:lstStyle/>
+          <a:p>
+            <a:pPr indent="0" marL="0">
+              <a:buNone/>
+            </a:pPr>
+            <a:r>
+              <a:rPr lang="en-US" sz="1250" b="1" dirty="0">
+                <a:solidFill>
+                  <a:srgbClr val="DC2626"/>
+                </a:solidFill>
+                <a:latin typeface="Malgun Gothic" pitchFamily="34" charset="0"/>
+                <a:ea typeface="Malgun Gothic" pitchFamily="34" charset="-122"/>
+                <a:cs typeface="Malgun Gothic" pitchFamily="34" charset="-120"/>
+              </a:rPr>
+              <a:t>⛔  CDC ≠ dev-prod 동기화</a:t>
+            </a:r>
+            <a:endParaRPr lang="en-US" sz="1250" dirty="0"/>
+          </a:p>
+        </p:txBody>
+      </p:sp>
+      <p:sp>
+        <p:nvSpPr>
+          <p:cNvPr id="21" name="Text 19"/>
+          <p:cNvSpPr/>
+          <p:nvPr/>
+        </p:nvSpPr>
+        <p:spPr>
+          <a:xfrm>
+            <a:off x="6519672" y="5138928"/>
+            <a:ext cx="4937760" cy="457200"/>
+          </a:xfrm>
+          <a:prstGeom prst="rect">
+            <a:avLst/>
+          </a:prstGeom>
+          <a:noFill/>
+          <a:ln/>
+        </p:spPr>
+        <p:txBody>
+          <a:bodyPr wrap="square" lIns="0" tIns="0" rIns="0" bIns="0" rtlCol="0" anchor="ctr"/>
+          <a:lstStyle/>
+          <a:p>
+            <a:pPr indent="0" marL="0">
+              <a:buNone/>
+            </a:pPr>
+            <a:r>
+              <a:rPr lang="en-US" sz="1050" dirty="0">
                 <a:solidFill>
                   <a:srgbClr val="241B3A"/>
                 </a:solidFill>
@@ -5962,405 +7056,32 @@
                 <a:ea typeface="Malgun Gothic" pitchFamily="34" charset="-122"/>
                 <a:cs typeface="Malgun Gothic" pitchFamily="34" charset="-120"/>
               </a:rPr>
-              <a:t>master</a:t>
-            </a:r>
-            <a:endParaRPr lang="en-US" sz="1150" dirty="0"/>
-          </a:p>
-          <a:p>
-            <a:pPr algn="ctr" indent="0" marL="0">
-              <a:buNone/>
-            </a:pPr>
-            <a:r>
-              <a:rPr lang="en-US" sz="1150" b="1" dirty="0">
-                <a:solidFill>
-                  <a:srgbClr val="241B3A"/>
-                </a:solidFill>
-                <a:latin typeface="Malgun Gothic" pitchFamily="34" charset="0"/>
-                <a:ea typeface="Malgun Gothic" pitchFamily="34" charset="-122"/>
-                <a:cs typeface="Malgun Gothic" pitchFamily="34" charset="-120"/>
-              </a:rPr>
-              <a:t>(운영 배포)</a:t>
-            </a:r>
-            <a:endParaRPr lang="en-US" sz="1150" dirty="0"/>
-          </a:p>
-        </p:txBody>
-      </p:sp>
-      <p:sp>
-        <p:nvSpPr>
-          <p:cNvPr id="13" name="Text 11"/>
-          <p:cNvSpPr/>
-          <p:nvPr/>
-        </p:nvSpPr>
-        <p:spPr>
-          <a:xfrm>
-            <a:off x="548640" y="3200400"/>
-            <a:ext cx="1828800" cy="365760"/>
-          </a:xfrm>
-          <a:prstGeom prst="rect">
-            <a:avLst/>
-          </a:prstGeom>
-          <a:noFill/>
-          <a:ln/>
-        </p:spPr>
-        <p:txBody>
-          <a:bodyPr wrap="square" lIns="0" tIns="0" rIns="0" bIns="0" rtlCol="0" anchor="ctr"/>
-          <a:lstStyle/>
-          <a:p>
-            <a:pPr indent="0" marL="0">
-              <a:buNone/>
-            </a:pPr>
-            <a:r>
-              <a:rPr lang="en-US" sz="1300" b="1" dirty="0">
-                <a:solidFill>
-                  <a:srgbClr val="2563EB"/>
-                </a:solidFill>
-                <a:latin typeface="Malgun Gothic" pitchFamily="34" charset="0"/>
-                <a:ea typeface="Malgun Gothic" pitchFamily="34" charset="-122"/>
-                <a:cs typeface="Malgun Gothic" pitchFamily="34" charset="-120"/>
-              </a:rPr>
-              <a:t>DB (sql/NNN)</a:t>
-            </a:r>
-            <a:endParaRPr lang="en-US" sz="1300" dirty="0"/>
-          </a:p>
-        </p:txBody>
-      </p:sp>
-      <p:sp>
-        <p:nvSpPr>
-          <p:cNvPr id="14" name="Shape 12"/>
-          <p:cNvSpPr/>
-          <p:nvPr/>
-        </p:nvSpPr>
-        <p:spPr>
-          <a:xfrm>
-            <a:off x="2286000" y="3081528"/>
-            <a:ext cx="2468880" cy="868680"/>
+              <a:t>운영 PII 연속 복제 금지 · Kafka CDC는 과하고 부적합</a:t>
+            </a:r>
+            <a:endParaRPr lang="en-US" sz="1050" dirty="0"/>
+          </a:p>
+        </p:txBody>
+      </p:sp>
+      <p:sp>
+        <p:nvSpPr>
+          <p:cNvPr id="22" name="Shape 20"/>
+          <p:cNvSpPr/>
+          <p:nvPr/>
+        </p:nvSpPr>
+        <p:spPr>
+          <a:xfrm>
+            <a:off x="548640" y="5852160"/>
+            <a:ext cx="11091672" cy="457200"/>
           </a:xfrm>
           <a:prstGeom prst="roundRect">
             <a:avLst>
-              <a:gd name="adj" fmla="val 8421"/>
-            </a:avLst>
-          </a:prstGeom>
-          <a:solidFill>
-            <a:srgbClr val="FFFFFF"/>
-          </a:solidFill>
-          <a:ln w="15875">
-            <a:solidFill>
-              <a:srgbClr val="2563EB"/>
-            </a:solidFill>
-            <a:prstDash val="solid"/>
-          </a:ln>
-          <a:effectLst>
-            <a:outerShdw sx="100000" sy="100000" kx="0" ky="0" algn="bl" rotWithShape="0" blurRad="101600" dist="38100" dir="8100000">
-              <a:srgbClr val="1A1145">
-                <a:alpha val="16000"/>
-              </a:srgbClr>
-            </a:outerShdw>
-          </a:effectLst>
-        </p:spPr>
-      </p:sp>
-      <p:sp>
-        <p:nvSpPr>
-          <p:cNvPr id="15" name="Text 13"/>
-          <p:cNvSpPr/>
-          <p:nvPr/>
-        </p:nvSpPr>
-        <p:spPr>
-          <a:xfrm>
-            <a:off x="2377440" y="3081528"/>
-            <a:ext cx="2286000" cy="868680"/>
-          </a:xfrm>
-          <a:prstGeom prst="rect">
-            <a:avLst/>
-          </a:prstGeom>
-          <a:noFill/>
-          <a:ln/>
-        </p:spPr>
-        <p:txBody>
-          <a:bodyPr wrap="square" lIns="0" tIns="0" rIns="0" bIns="0" rtlCol="0" anchor="ctr"/>
-          <a:lstStyle/>
-          <a:p>
-            <a:pPr algn="ctr" indent="0" marL="0">
-              <a:buNone/>
-            </a:pPr>
-            <a:r>
-              <a:rPr lang="en-US" sz="1150" b="1" dirty="0">
-                <a:solidFill>
-                  <a:srgbClr val="241B3A"/>
-                </a:solidFill>
-                <a:latin typeface="Malgun Gothic" pitchFamily="34" charset="0"/>
-                <a:ea typeface="Malgun Gothic" pitchFamily="34" charset="-122"/>
-                <a:cs typeface="Malgun Gothic" pitchFamily="34" charset="-120"/>
-              </a:rPr>
-              <a:t>Dev 적용</a:t>
-            </a:r>
-            <a:endParaRPr lang="en-US" sz="1150" dirty="0"/>
-          </a:p>
-          <a:p>
-            <a:pPr algn="ctr" indent="0" marL="0">
-              <a:buNone/>
-            </a:pPr>
-            <a:r>
-              <a:rPr lang="en-US" sz="1150" b="1" dirty="0">
-                <a:solidFill>
-                  <a:srgbClr val="241B3A"/>
-                </a:solidFill>
-                <a:latin typeface="Malgun Gothic" pitchFamily="34" charset="0"/>
-                <a:ea typeface="Malgun Gothic" pitchFamily="34" charset="-122"/>
-                <a:cs typeface="Malgun Gothic" pitchFamily="34" charset="-120"/>
-              </a:rPr>
-              <a:t>검증</a:t>
-            </a:r>
-            <a:endParaRPr lang="en-US" sz="1150" dirty="0"/>
-          </a:p>
-        </p:txBody>
-      </p:sp>
-      <p:sp>
-        <p:nvSpPr>
-          <p:cNvPr id="16" name="Shape 14"/>
-          <p:cNvSpPr/>
-          <p:nvPr/>
-        </p:nvSpPr>
-        <p:spPr>
-          <a:xfrm>
-            <a:off x="4828032" y="3291840"/>
-            <a:ext cx="539496" cy="457200"/>
-          </a:xfrm>
-          <a:prstGeom prst="rightArrow">
-            <a:avLst/>
-          </a:prstGeom>
-          <a:solidFill>
-            <a:srgbClr val="2563EB"/>
-          </a:solidFill>
-          <a:ln/>
-        </p:spPr>
-      </p:sp>
-      <p:sp>
-        <p:nvSpPr>
-          <p:cNvPr id="17" name="Shape 15"/>
-          <p:cNvSpPr/>
-          <p:nvPr/>
-        </p:nvSpPr>
-        <p:spPr>
-          <a:xfrm>
-            <a:off x="5440680" y="3081528"/>
-            <a:ext cx="2468880" cy="868680"/>
-          </a:xfrm>
-          <a:prstGeom prst="roundRect">
-            <a:avLst>
-              <a:gd name="adj" fmla="val 8421"/>
-            </a:avLst>
-          </a:prstGeom>
-          <a:solidFill>
-            <a:srgbClr val="FFFFFF"/>
-          </a:solidFill>
-          <a:ln w="15875">
-            <a:solidFill>
-              <a:srgbClr val="2563EB"/>
-            </a:solidFill>
-            <a:prstDash val="solid"/>
-          </a:ln>
-          <a:effectLst>
-            <a:outerShdw sx="100000" sy="100000" kx="0" ky="0" algn="bl" rotWithShape="0" blurRad="101600" dist="38100" dir="8100000">
-              <a:srgbClr val="1A1145">
-                <a:alpha val="16000"/>
-              </a:srgbClr>
-            </a:outerShdw>
-          </a:effectLst>
-        </p:spPr>
-      </p:sp>
-      <p:sp>
-        <p:nvSpPr>
-          <p:cNvPr id="18" name="Text 16"/>
-          <p:cNvSpPr/>
-          <p:nvPr/>
-        </p:nvSpPr>
-        <p:spPr>
-          <a:xfrm>
-            <a:off x="5532120" y="3081528"/>
-            <a:ext cx="2286000" cy="868680"/>
-          </a:xfrm>
-          <a:prstGeom prst="rect">
-            <a:avLst/>
-          </a:prstGeom>
-          <a:noFill/>
-          <a:ln/>
-        </p:spPr>
-        <p:txBody>
-          <a:bodyPr wrap="square" lIns="0" tIns="0" rIns="0" bIns="0" rtlCol="0" anchor="ctr"/>
-          <a:lstStyle/>
-          <a:p>
-            <a:pPr algn="ctr" indent="0" marL="0">
-              <a:buNone/>
-            </a:pPr>
-            <a:r>
-              <a:rPr lang="en-US" sz="1150" b="1" dirty="0">
-                <a:solidFill>
-                  <a:srgbClr val="241B3A"/>
-                </a:solidFill>
-                <a:latin typeface="Malgun Gothic" pitchFamily="34" charset="0"/>
-                <a:ea typeface="Malgun Gothic" pitchFamily="34" charset="-122"/>
-                <a:cs typeface="Malgun Gothic" pitchFamily="34" charset="-120"/>
-              </a:rPr>
-              <a:t>Staging 적용</a:t>
-            </a:r>
-            <a:endParaRPr lang="en-US" sz="1150" dirty="0"/>
-          </a:p>
-          <a:p>
-            <a:pPr algn="ctr" indent="0" marL="0">
-              <a:buNone/>
-            </a:pPr>
-            <a:r>
-              <a:rPr lang="en-US" sz="1150" b="1" dirty="0">
-                <a:solidFill>
-                  <a:srgbClr val="241B3A"/>
-                </a:solidFill>
-                <a:latin typeface="Malgun Gothic" pitchFamily="34" charset="0"/>
-                <a:ea typeface="Malgun Gothic" pitchFamily="34" charset="-122"/>
-                <a:cs typeface="Malgun Gothic" pitchFamily="34" charset="-120"/>
-              </a:rPr>
-              <a:t>검증</a:t>
-            </a:r>
-            <a:endParaRPr lang="en-US" sz="1150" dirty="0"/>
-          </a:p>
-        </p:txBody>
-      </p:sp>
-      <p:sp>
-        <p:nvSpPr>
-          <p:cNvPr id="19" name="Shape 17"/>
-          <p:cNvSpPr/>
-          <p:nvPr/>
-        </p:nvSpPr>
-        <p:spPr>
-          <a:xfrm>
-            <a:off x="7982712" y="3291840"/>
-            <a:ext cx="539496" cy="457200"/>
-          </a:xfrm>
-          <a:prstGeom prst="rightArrow">
-            <a:avLst/>
-          </a:prstGeom>
-          <a:solidFill>
-            <a:srgbClr val="2563EB"/>
-          </a:solidFill>
-          <a:ln/>
-        </p:spPr>
-      </p:sp>
-      <p:sp>
-        <p:nvSpPr>
-          <p:cNvPr id="20" name="Shape 18"/>
-          <p:cNvSpPr/>
-          <p:nvPr/>
-        </p:nvSpPr>
-        <p:spPr>
-          <a:xfrm>
-            <a:off x="8595360" y="3081528"/>
-            <a:ext cx="2468880" cy="868680"/>
-          </a:xfrm>
-          <a:prstGeom prst="roundRect">
-            <a:avLst>
-              <a:gd name="adj" fmla="val 8421"/>
-            </a:avLst>
-          </a:prstGeom>
-          <a:solidFill>
-            <a:srgbClr val="FFFFFF"/>
-          </a:solidFill>
-          <a:ln w="15875">
-            <a:solidFill>
-              <a:srgbClr val="2563EB"/>
-            </a:solidFill>
-            <a:prstDash val="solid"/>
-          </a:ln>
-          <a:effectLst>
-            <a:outerShdw sx="100000" sy="100000" kx="0" ky="0" algn="bl" rotWithShape="0" blurRad="101600" dist="38100" dir="8100000">
-              <a:srgbClr val="1A1145">
-                <a:alpha val="16000"/>
-              </a:srgbClr>
-            </a:outerShdw>
-          </a:effectLst>
-        </p:spPr>
-      </p:sp>
-      <p:sp>
-        <p:nvSpPr>
-          <p:cNvPr id="21" name="Text 19"/>
-          <p:cNvSpPr/>
-          <p:nvPr/>
-        </p:nvSpPr>
-        <p:spPr>
-          <a:xfrm>
-            <a:off x="8686800" y="3081528"/>
-            <a:ext cx="2286000" cy="868680"/>
-          </a:xfrm>
-          <a:prstGeom prst="rect">
-            <a:avLst/>
-          </a:prstGeom>
-          <a:noFill/>
-          <a:ln/>
-        </p:spPr>
-        <p:txBody>
-          <a:bodyPr wrap="square" lIns="0" tIns="0" rIns="0" bIns="0" rtlCol="0" anchor="ctr"/>
-          <a:lstStyle/>
-          <a:p>
-            <a:pPr algn="ctr" indent="0" marL="0">
-              <a:buNone/>
-            </a:pPr>
-            <a:r>
-              <a:rPr lang="en-US" sz="1150" b="1" dirty="0">
-                <a:solidFill>
-                  <a:srgbClr val="241B3A"/>
-                </a:solidFill>
-                <a:latin typeface="Malgun Gothic" pitchFamily="34" charset="0"/>
-                <a:ea typeface="Malgun Gothic" pitchFamily="34" charset="-122"/>
-                <a:cs typeface="Malgun Gothic" pitchFamily="34" charset="-120"/>
-              </a:rPr>
-              <a:t>Prod 적용</a:t>
-            </a:r>
-            <a:endParaRPr lang="en-US" sz="1150" dirty="0"/>
-          </a:p>
-          <a:p>
-            <a:pPr algn="ctr" indent="0" marL="0">
-              <a:buNone/>
-            </a:pPr>
-            <a:r>
-              <a:rPr lang="en-US" sz="1150" b="1" dirty="0">
-                <a:solidFill>
-                  <a:srgbClr val="241B3A"/>
-                </a:solidFill>
-                <a:latin typeface="Malgun Gothic" pitchFamily="34" charset="0"/>
-                <a:ea typeface="Malgun Gothic" pitchFamily="34" charset="-122"/>
-                <a:cs typeface="Malgun Gothic" pitchFamily="34" charset="-120"/>
-              </a:rPr>
-              <a:t>(최종)</a:t>
-            </a:r>
-            <a:endParaRPr lang="en-US" sz="1150" dirty="0"/>
-          </a:p>
-        </p:txBody>
-      </p:sp>
-      <p:sp>
-        <p:nvSpPr>
-          <p:cNvPr id="22" name="Shape 20"/>
-          <p:cNvSpPr/>
-          <p:nvPr/>
-        </p:nvSpPr>
-        <p:spPr>
-          <a:xfrm>
-            <a:off x="548640" y="4526280"/>
-            <a:ext cx="11064240" cy="1417320"/>
-          </a:xfrm>
-          <a:prstGeom prst="roundRect">
-            <a:avLst>
-              <a:gd name="adj" fmla="val 6452"/>
+              <a:gd name="adj" fmla="val 16000"/>
             </a:avLst>
           </a:prstGeom>
           <a:solidFill>
             <a:srgbClr val="2A1A66"/>
           </a:solidFill>
           <a:ln/>
-          <a:effectLst>
-            <a:outerShdw sx="100000" sy="100000" kx="0" ky="0" algn="bl" rotWithShape="0" blurRad="101600" dist="38100" dir="8100000">
-              <a:srgbClr val="1A1145">
-                <a:alpha val="16000"/>
-              </a:srgbClr>
-            </a:outerShdw>
-          </a:effectLst>
         </p:spPr>
       </p:sp>
       <p:sp>
@@ -6371,24 +7092,24 @@
         </p:nvSpPr>
         <p:spPr>
           <a:xfrm>
-            <a:off x="868680" y="4663440"/>
-            <a:ext cx="2743200" cy="365760"/>
-          </a:xfrm>
-          <a:prstGeom prst="rect">
-            <a:avLst/>
-          </a:prstGeom>
-          <a:noFill/>
-          <a:ln/>
-        </p:spPr>
-        <p:txBody>
-          <a:bodyPr wrap="square" lIns="0" tIns="0" rIns="0" bIns="0" rtlCol="0" anchor="ctr"/>
-          <a:lstStyle/>
-          <a:p>
-            <a:pPr indent="0" marL="0">
-              <a:buNone/>
-            </a:pPr>
-            <a:r>
-              <a:rPr lang="en-US" sz="1400" b="1" dirty="0">
+            <a:off x="548640" y="5852160"/>
+            <a:ext cx="11091672" cy="457200"/>
+          </a:xfrm>
+          <a:prstGeom prst="rect">
+            <a:avLst/>
+          </a:prstGeom>
+          <a:noFill/>
+          <a:ln/>
+        </p:spPr>
+        <p:txBody>
+          <a:bodyPr wrap="square" lIns="0" tIns="0" rIns="0" bIns="0" rtlCol="0" anchor="ctr"/>
+          <a:lstStyle/>
+          <a:p>
+            <a:pPr algn="ctr" indent="0" marL="0">
+              <a:buNone/>
+            </a:pPr>
+            <a:r>
+              <a:rPr lang="en-US" sz="1150" b="1" dirty="0">
                 <a:solidFill>
                   <a:srgbClr val="F5B731"/>
                 </a:solidFill>
@@ -6396,97 +7117,15 @@
                 <a:ea typeface="Malgun Gothic" pitchFamily="34" charset="-122"/>
                 <a:cs typeface="Malgun Gothic" pitchFamily="34" charset="-120"/>
               </a:rPr>
-              <a:t>불변 원칙</a:t>
-            </a:r>
-            <a:endParaRPr lang="en-US" sz="1400" dirty="0"/>
-          </a:p>
-        </p:txBody>
-      </p:sp>
-      <p:sp>
-        <p:nvSpPr>
-          <p:cNvPr id="24" name="Text 22"/>
-          <p:cNvSpPr/>
-          <p:nvPr/>
-        </p:nvSpPr>
-        <p:spPr>
-          <a:xfrm>
-            <a:off x="914400" y="5029200"/>
-            <a:ext cx="10424160" cy="914400"/>
-          </a:xfrm>
-          <a:prstGeom prst="rect">
-            <a:avLst/>
-          </a:prstGeom>
-          <a:noFill/>
-          <a:ln/>
-        </p:spPr>
-        <p:txBody>
-          <a:bodyPr wrap="square" lIns="0" tIns="0" rIns="0" bIns="0" rtlCol="0" anchor="ctr"/>
-          <a:lstStyle/>
-          <a:p>
-            <a:pPr marL="342900" indent="-342900">
-              <a:spcAft>
-                <a:spcPts val="600"/>
-              </a:spcAft>
-              <a:buSzPct val="100000"/>
-              <a:buChar char="•"/>
-            </a:pPr>
-            <a:r>
-              <a:rPr lang="en-US" sz="1200" dirty="0">
-                <a:solidFill>
-                  <a:srgbClr val="FFFFFF"/>
-                </a:solidFill>
-                <a:latin typeface="Malgun Gothic" pitchFamily="34" charset="0"/>
-                <a:ea typeface="Malgun Gothic" pitchFamily="34" charset="-122"/>
-                <a:cs typeface="Malgun Gothic" pitchFamily="34" charset="-120"/>
-              </a:rPr>
-              <a:t>운영(Prod)에 먼저 적용 절대 금지 — 항상 Dev→Staging에서 검증 후 승격</a:t>
-            </a:r>
-            <a:endParaRPr lang="en-US" sz="1200" dirty="0"/>
-          </a:p>
-          <a:p>
-            <a:pPr marL="342900" indent="-342900">
-              <a:spcAft>
-                <a:spcPts val="600"/>
-              </a:spcAft>
-              <a:buSzPct val="100000"/>
-              <a:buChar char="•"/>
-            </a:pPr>
-            <a:r>
-              <a:rPr lang="en-US" sz="1200" dirty="0">
-                <a:solidFill>
-                  <a:srgbClr val="FFFFFF"/>
-                </a:solidFill>
-                <a:latin typeface="Malgun Gothic" pitchFamily="34" charset="0"/>
-                <a:ea typeface="Malgun Gothic" pitchFamily="34" charset="-122"/>
-                <a:cs typeface="Malgun Gothic" pitchFamily="34" charset="-120"/>
-              </a:rPr>
-              <a:t>sql/NNN 번호·순서 유지 (DA 표준·da-ddl-guard) — 같은 마이그레이션을 각 환경에 순차 적용</a:t>
-            </a:r>
-            <a:endParaRPr lang="en-US" sz="1200" dirty="0"/>
-          </a:p>
-          <a:p>
-            <a:pPr marL="342900" indent="-342900">
-              <a:buSzPct val="100000"/>
-              <a:buChar char="•"/>
-            </a:pPr>
-            <a:r>
-              <a:rPr lang="en-US" sz="1200" dirty="0">
-                <a:solidFill>
-                  <a:srgbClr val="FFFFFF"/>
-                </a:solidFill>
-                <a:latin typeface="Malgun Gothic" pitchFamily="34" charset="0"/>
-                <a:ea typeface="Malgun Gothic" pitchFamily="34" charset="-122"/>
-                <a:cs typeface="Malgun Gothic" pitchFamily="34" charset="-120"/>
-              </a:rPr>
-              <a:t>롤백 = Vercel revert(코드) + 보상 마이그레이션(DB) · 물리 DELETE 금지(논리삭제)</a:t>
-            </a:r>
-            <a:endParaRPr lang="en-US" sz="1200" dirty="0"/>
-          </a:p>
-        </p:txBody>
-      </p:sp>
-      <p:sp>
-        <p:nvSpPr>
-          <p:cNvPr id="25" name="Text 23"/>
+              <a:t>스키마 = 마이그레이션(↑)   ·   데이터 = 마스킹 스냅샷(↓)   ·   Supabase Branching + CLI면 충분 (Kafka 불필요)</a:t>
+            </a:r>
+            <a:endParaRPr lang="en-US" sz="1150" dirty="0"/>
+          </a:p>
+        </p:txBody>
+      </p:sp>
+      <p:sp>
+        <p:nvSpPr>
+          <p:cNvPr id="25" name="Text 22"/>
           <p:cNvSpPr/>
           <p:nvPr/>
         </p:nvSpPr>
@@ -6525,7 +7164,7 @@
       </p:sp>
       <p:sp>
         <p:nvSpPr>
-          <p:cNvPr id="26" name="Text 24"/>
+          <p:cNvPr id="26" name="Text 23"/>
           <p:cNvSpPr/>
           <p:nvPr/>
         </p:nvSpPr>
@@ -6627,7 +7266,7 @@
                 <a:ea typeface="Malgun Gothic" pitchFamily="34" charset="-122"/>
                 <a:cs typeface="Malgun Gothic" pitchFamily="34" charset="-120"/>
               </a:rPr>
-              <a:t>ISOLATION · 격리</a:t>
+              <a:t>FLOW · 승격 파이프라인</a:t>
             </a:r>
             <a:endParaRPr lang="en-US" sz="1200" dirty="0"/>
           </a:p>
@@ -6666,7 +7305,7 @@
                 <a:ea typeface="Malgun Gothic" pitchFamily="34" charset="-122"/>
                 <a:cs typeface="Malgun Gothic" pitchFamily="34" charset="-120"/>
               </a:rPr>
-              <a:t>데이터와 시크릿은 환경 경계를 넘지 않는다</a:t>
+              <a:t>코드와 DB는 단방향으로만 흐른다</a:t>
             </a:r>
             <a:endParaRPr lang="en-US" sz="2600" dirty="0"/>
           </a:p>
@@ -6674,18 +7313,57 @@
       </p:sp>
       <p:sp>
         <p:nvSpPr>
-          <p:cNvPr id="4" name="Shape 2"/>
-          <p:cNvSpPr/>
-          <p:nvPr/>
-        </p:nvSpPr>
-        <p:spPr>
-          <a:xfrm>
-            <a:off x="548640" y="1691640"/>
-            <a:ext cx="5349240" cy="2057400"/>
+          <p:cNvPr id="4" name="Text 2"/>
+          <p:cNvSpPr/>
+          <p:nvPr/>
+        </p:nvSpPr>
+        <p:spPr>
+          <a:xfrm>
+            <a:off x="548640" y="1783080"/>
+            <a:ext cx="1828800" cy="365760"/>
+          </a:xfrm>
+          <a:prstGeom prst="rect">
+            <a:avLst/>
+          </a:prstGeom>
+          <a:noFill/>
+          <a:ln/>
+        </p:spPr>
+        <p:txBody>
+          <a:bodyPr wrap="square" lIns="0" tIns="0" rIns="0" bIns="0" rtlCol="0" anchor="ctr"/>
+          <a:lstStyle/>
+          <a:p>
+            <a:pPr indent="0" marL="0">
+              <a:buNone/>
+            </a:pPr>
+            <a:r>
+              <a:rPr lang="en-US" sz="1300" b="1" dirty="0">
+                <a:solidFill>
+                  <a:srgbClr val="5B2A9D"/>
+                </a:solidFill>
+                <a:latin typeface="Malgun Gothic" pitchFamily="34" charset="0"/>
+                <a:ea typeface="Malgun Gothic" pitchFamily="34" charset="-122"/>
+                <a:cs typeface="Malgun Gothic" pitchFamily="34" charset="-120"/>
+              </a:rPr>
+              <a:t>코드 (git)</a:t>
+            </a:r>
+            <a:endParaRPr lang="en-US" sz="1300" dirty="0"/>
+          </a:p>
+        </p:txBody>
+      </p:sp>
+      <p:sp>
+        <p:nvSpPr>
+          <p:cNvPr id="5" name="Shape 3"/>
+          <p:cNvSpPr/>
+          <p:nvPr/>
+        </p:nvSpPr>
+        <p:spPr>
+          <a:xfrm>
+            <a:off x="2286000" y="1664208"/>
+            <a:ext cx="2468880" cy="868680"/>
           </a:xfrm>
           <a:prstGeom prst="roundRect">
             <a:avLst>
-              <a:gd name="adj" fmla="val 4444"/>
+              <a:gd name="adj" fmla="val 8421"/>
             </a:avLst>
           </a:prstGeom>
           <a:solidFill>
@@ -6708,73 +7386,30 @@
       </p:sp>
       <p:sp>
         <p:nvSpPr>
-          <p:cNvPr id="5" name="Text 3"/>
-          <p:cNvSpPr/>
-          <p:nvPr/>
-        </p:nvSpPr>
-        <p:spPr>
-          <a:xfrm>
-            <a:off x="822960" y="1892808"/>
-            <a:ext cx="4800600" cy="365760"/>
-          </a:xfrm>
-          <a:prstGeom prst="rect">
-            <a:avLst/>
-          </a:prstGeom>
-          <a:noFill/>
-          <a:ln/>
-        </p:spPr>
-        <p:txBody>
-          <a:bodyPr wrap="square" lIns="0" tIns="0" rIns="0" bIns="0" rtlCol="0" anchor="ctr"/>
-          <a:lstStyle/>
-          <a:p>
-            <a:pPr indent="0" marL="0">
-              <a:buNone/>
-            </a:pPr>
-            <a:r>
-              <a:rPr lang="en-US" sz="1500" b="1" dirty="0">
-                <a:solidFill>
-                  <a:srgbClr val="5B2A9D"/>
-                </a:solidFill>
-                <a:latin typeface="Malgun Gothic" pitchFamily="34" charset="0"/>
-                <a:ea typeface="Malgun Gothic" pitchFamily="34" charset="-122"/>
-                <a:cs typeface="Malgun Gothic" pitchFamily="34" charset="-120"/>
-              </a:rPr>
-              <a:t>🔒  데이터 격리</a:t>
-            </a:r>
-            <a:endParaRPr lang="en-US" sz="1500" dirty="0"/>
-          </a:p>
-        </p:txBody>
-      </p:sp>
-      <p:sp>
-        <p:nvSpPr>
           <p:cNvPr id="6" name="Text 4"/>
           <p:cNvSpPr/>
           <p:nvPr/>
         </p:nvSpPr>
         <p:spPr>
           <a:xfrm>
-            <a:off x="868680" y="2423160"/>
-            <a:ext cx="4709160" cy="1143000"/>
-          </a:xfrm>
-          <a:prstGeom prst="rect">
-            <a:avLst/>
-          </a:prstGeom>
-          <a:noFill/>
-          <a:ln/>
-        </p:spPr>
-        <p:txBody>
-          <a:bodyPr wrap="square" lIns="0" tIns="0" rIns="0" bIns="0" rtlCol="0" anchor="ctr"/>
-          <a:lstStyle/>
-          <a:p>
-            <a:pPr marL="342900" indent="-342900">
-              <a:spcAft>
-                <a:spcPts val="800"/>
-              </a:spcAft>
-              <a:buSzPct val="100000"/>
-              <a:buChar char="•"/>
-            </a:pPr>
-            <a:r>
-              <a:rPr lang="en-US" sz="1250" dirty="0">
+            <a:off x="2377440" y="1664208"/>
+            <a:ext cx="2286000" cy="868680"/>
+          </a:xfrm>
+          <a:prstGeom prst="rect">
+            <a:avLst/>
+          </a:prstGeom>
+          <a:noFill/>
+          <a:ln/>
+        </p:spPr>
+        <p:txBody>
+          <a:bodyPr wrap="square" lIns="0" tIns="0" rIns="0" bIns="0" rtlCol="0" anchor="ctr"/>
+          <a:lstStyle/>
+          <a:p>
+            <a:pPr algn="ctr" indent="0" marL="0">
+              <a:buNone/>
+            </a:pPr>
+            <a:r>
+              <a:rPr lang="en-US" sz="1150" b="1" dirty="0">
                 <a:solidFill>
                   <a:srgbClr val="241B3A"/>
                 </a:solidFill>
@@ -6782,20 +7417,16 @@
                 <a:ea typeface="Malgun Gothic" pitchFamily="34" charset="-122"/>
                 <a:cs typeface="Malgun Gothic" pitchFamily="34" charset="-120"/>
               </a:rPr>
-              <a:t>운영 PII(실명·연락처·위치)는 하위 환경에 원본 복제 금지</a:t>
-            </a:r>
-            <a:endParaRPr lang="en-US" sz="1250" dirty="0"/>
-          </a:p>
-          <a:p>
-            <a:pPr marL="342900" indent="-342900">
-              <a:spcAft>
-                <a:spcPts val="800"/>
-              </a:spcAft>
-              <a:buSzPct val="100000"/>
-              <a:buChar char="•"/>
-            </a:pPr>
-            <a:r>
-              <a:rPr lang="en-US" sz="1250" dirty="0">
+              <a:t>feature/*</a:t>
+            </a:r>
+            <a:endParaRPr lang="en-US" sz="1150" dirty="0"/>
+          </a:p>
+          <a:p>
+            <a:pPr algn="ctr" indent="0" marL="0">
+              <a:buNone/>
+            </a:pPr>
+            <a:r>
+              <a:rPr lang="en-US" sz="1150" b="1" dirty="0">
                 <a:solidFill>
                   <a:srgbClr val="241B3A"/>
                 </a:solidFill>
@@ -6803,30 +7434,9 @@
                 <a:ea typeface="Malgun Gothic" pitchFamily="34" charset="-122"/>
                 <a:cs typeface="Malgun Gothic" pitchFamily="34" charset="-120"/>
               </a:rPr>
-              <a:t>필요 시 마스킹·합성 데이터로 대체</a:t>
-            </a:r>
-            <a:endParaRPr lang="en-US" sz="1250" dirty="0"/>
-          </a:p>
-          <a:p>
-            <a:pPr marL="342900" indent="-342900">
-              <a:spcAft>
-                <a:spcPts val="800"/>
-              </a:spcAft>
-              <a:buSzPct val="100000"/>
-              <a:buChar char="•"/>
-            </a:pPr>
-            <a:r>
-              <a:rPr lang="en-US" sz="1250" dirty="0">
-                <a:solidFill>
-                  <a:srgbClr val="241B3A"/>
-                </a:solidFill>
-                <a:latin typeface="Malgun Gothic" pitchFamily="34" charset="0"/>
-                <a:ea typeface="Malgun Gothic" pitchFamily="34" charset="-122"/>
-                <a:cs typeface="Malgun Gothic" pitchFamily="34" charset="-120"/>
-              </a:rPr>
-              <a:t>논리삭제(del_yn) 원칙 유지</a:t>
-            </a:r>
-            <a:endParaRPr lang="en-US" sz="1250" dirty="0"/>
+              <a:t>(개발)</a:t>
+            </a:r>
+            <a:endParaRPr lang="en-US" sz="1150" dirty="0"/>
           </a:p>
         </p:txBody>
       </p:sp>
@@ -6838,12 +7448,271 @@
         </p:nvSpPr>
         <p:spPr>
           <a:xfrm>
-            <a:off x="6309360" y="1691640"/>
-            <a:ext cx="5349240" cy="2057400"/>
+            <a:off x="4828032" y="1874520"/>
+            <a:ext cx="539496" cy="457200"/>
+          </a:xfrm>
+          <a:prstGeom prst="rightArrow">
+            <a:avLst/>
+          </a:prstGeom>
+          <a:solidFill>
+            <a:srgbClr val="5B2A9D"/>
+          </a:solidFill>
+          <a:ln/>
+        </p:spPr>
+      </p:sp>
+      <p:sp>
+        <p:nvSpPr>
+          <p:cNvPr id="8" name="Shape 6"/>
+          <p:cNvSpPr/>
+          <p:nvPr/>
+        </p:nvSpPr>
+        <p:spPr>
+          <a:xfrm>
+            <a:off x="5440680" y="1664208"/>
+            <a:ext cx="2468880" cy="868680"/>
           </a:xfrm>
           <a:prstGeom prst="roundRect">
             <a:avLst>
-              <a:gd name="adj" fmla="val 4444"/>
+              <a:gd name="adj" fmla="val 8421"/>
+            </a:avLst>
+          </a:prstGeom>
+          <a:solidFill>
+            <a:srgbClr val="FFFFFF"/>
+          </a:solidFill>
+          <a:ln w="15875">
+            <a:solidFill>
+              <a:srgbClr val="5B2A9D"/>
+            </a:solidFill>
+            <a:prstDash val="solid"/>
+          </a:ln>
+          <a:effectLst>
+            <a:outerShdw sx="100000" sy="100000" kx="0" ky="0" algn="bl" rotWithShape="0" blurRad="101600" dist="38100" dir="8100000">
+              <a:srgbClr val="1A1145">
+                <a:alpha val="16000"/>
+              </a:srgbClr>
+            </a:outerShdw>
+          </a:effectLst>
+        </p:spPr>
+      </p:sp>
+      <p:sp>
+        <p:nvSpPr>
+          <p:cNvPr id="9" name="Text 7"/>
+          <p:cNvSpPr/>
+          <p:nvPr/>
+        </p:nvSpPr>
+        <p:spPr>
+          <a:xfrm>
+            <a:off x="5532120" y="1664208"/>
+            <a:ext cx="2286000" cy="868680"/>
+          </a:xfrm>
+          <a:prstGeom prst="rect">
+            <a:avLst/>
+          </a:prstGeom>
+          <a:noFill/>
+          <a:ln/>
+        </p:spPr>
+        <p:txBody>
+          <a:bodyPr wrap="square" lIns="0" tIns="0" rIns="0" bIns="0" rtlCol="0" anchor="ctr"/>
+          <a:lstStyle/>
+          <a:p>
+            <a:pPr algn="ctr" indent="0" marL="0">
+              <a:buNone/>
+            </a:pPr>
+            <a:r>
+              <a:rPr lang="en-US" sz="1150" b="1" dirty="0">
+                <a:solidFill>
+                  <a:srgbClr val="241B3A"/>
+                </a:solidFill>
+                <a:latin typeface="Malgun Gothic" pitchFamily="34" charset="0"/>
+                <a:ea typeface="Malgun Gothic" pitchFamily="34" charset="-122"/>
+                <a:cs typeface="Malgun Gothic" pitchFamily="34" charset="-120"/>
+              </a:rPr>
+              <a:t>staging</a:t>
+            </a:r>
+            <a:endParaRPr lang="en-US" sz="1150" dirty="0"/>
+          </a:p>
+          <a:p>
+            <a:pPr algn="ctr" indent="0" marL="0">
+              <a:buNone/>
+            </a:pPr>
+            <a:r>
+              <a:rPr lang="en-US" sz="1150" b="1" dirty="0">
+                <a:solidFill>
+                  <a:srgbClr val="241B3A"/>
+                </a:solidFill>
+                <a:latin typeface="Malgun Gothic" pitchFamily="34" charset="0"/>
+                <a:ea typeface="Malgun Gothic" pitchFamily="34" charset="-122"/>
+                <a:cs typeface="Malgun Gothic" pitchFamily="34" charset="-120"/>
+              </a:rPr>
+              <a:t>(PR·리뷰·검증)</a:t>
+            </a:r>
+            <a:endParaRPr lang="en-US" sz="1150" dirty="0"/>
+          </a:p>
+        </p:txBody>
+      </p:sp>
+      <p:sp>
+        <p:nvSpPr>
+          <p:cNvPr id="10" name="Shape 8"/>
+          <p:cNvSpPr/>
+          <p:nvPr/>
+        </p:nvSpPr>
+        <p:spPr>
+          <a:xfrm>
+            <a:off x="7982712" y="1874520"/>
+            <a:ext cx="539496" cy="457200"/>
+          </a:xfrm>
+          <a:prstGeom prst="rightArrow">
+            <a:avLst/>
+          </a:prstGeom>
+          <a:solidFill>
+            <a:srgbClr val="5B2A9D"/>
+          </a:solidFill>
+          <a:ln/>
+        </p:spPr>
+      </p:sp>
+      <p:sp>
+        <p:nvSpPr>
+          <p:cNvPr id="11" name="Shape 9"/>
+          <p:cNvSpPr/>
+          <p:nvPr/>
+        </p:nvSpPr>
+        <p:spPr>
+          <a:xfrm>
+            <a:off x="8595360" y="1664208"/>
+            <a:ext cx="2468880" cy="868680"/>
+          </a:xfrm>
+          <a:prstGeom prst="roundRect">
+            <a:avLst>
+              <a:gd name="adj" fmla="val 8421"/>
+            </a:avLst>
+          </a:prstGeom>
+          <a:solidFill>
+            <a:srgbClr val="FFFFFF"/>
+          </a:solidFill>
+          <a:ln w="15875">
+            <a:solidFill>
+              <a:srgbClr val="5B2A9D"/>
+            </a:solidFill>
+            <a:prstDash val="solid"/>
+          </a:ln>
+          <a:effectLst>
+            <a:outerShdw sx="100000" sy="100000" kx="0" ky="0" algn="bl" rotWithShape="0" blurRad="101600" dist="38100" dir="8100000">
+              <a:srgbClr val="1A1145">
+                <a:alpha val="16000"/>
+              </a:srgbClr>
+            </a:outerShdw>
+          </a:effectLst>
+        </p:spPr>
+      </p:sp>
+      <p:sp>
+        <p:nvSpPr>
+          <p:cNvPr id="12" name="Text 10"/>
+          <p:cNvSpPr/>
+          <p:nvPr/>
+        </p:nvSpPr>
+        <p:spPr>
+          <a:xfrm>
+            <a:off x="8686800" y="1664208"/>
+            <a:ext cx="2286000" cy="868680"/>
+          </a:xfrm>
+          <a:prstGeom prst="rect">
+            <a:avLst/>
+          </a:prstGeom>
+          <a:noFill/>
+          <a:ln/>
+        </p:spPr>
+        <p:txBody>
+          <a:bodyPr wrap="square" lIns="0" tIns="0" rIns="0" bIns="0" rtlCol="0" anchor="ctr"/>
+          <a:lstStyle/>
+          <a:p>
+            <a:pPr algn="ctr" indent="0" marL="0">
+              <a:buNone/>
+            </a:pPr>
+            <a:r>
+              <a:rPr lang="en-US" sz="1150" b="1" dirty="0">
+                <a:solidFill>
+                  <a:srgbClr val="241B3A"/>
+                </a:solidFill>
+                <a:latin typeface="Malgun Gothic" pitchFamily="34" charset="0"/>
+                <a:ea typeface="Malgun Gothic" pitchFamily="34" charset="-122"/>
+                <a:cs typeface="Malgun Gothic" pitchFamily="34" charset="-120"/>
+              </a:rPr>
+              <a:t>master</a:t>
+            </a:r>
+            <a:endParaRPr lang="en-US" sz="1150" dirty="0"/>
+          </a:p>
+          <a:p>
+            <a:pPr algn="ctr" indent="0" marL="0">
+              <a:buNone/>
+            </a:pPr>
+            <a:r>
+              <a:rPr lang="en-US" sz="1150" b="1" dirty="0">
+                <a:solidFill>
+                  <a:srgbClr val="241B3A"/>
+                </a:solidFill>
+                <a:latin typeface="Malgun Gothic" pitchFamily="34" charset="0"/>
+                <a:ea typeface="Malgun Gothic" pitchFamily="34" charset="-122"/>
+                <a:cs typeface="Malgun Gothic" pitchFamily="34" charset="-120"/>
+              </a:rPr>
+              <a:t>(운영 배포)</a:t>
+            </a:r>
+            <a:endParaRPr lang="en-US" sz="1150" dirty="0"/>
+          </a:p>
+        </p:txBody>
+      </p:sp>
+      <p:sp>
+        <p:nvSpPr>
+          <p:cNvPr id="13" name="Text 11"/>
+          <p:cNvSpPr/>
+          <p:nvPr/>
+        </p:nvSpPr>
+        <p:spPr>
+          <a:xfrm>
+            <a:off x="548640" y="3200400"/>
+            <a:ext cx="1828800" cy="365760"/>
+          </a:xfrm>
+          <a:prstGeom prst="rect">
+            <a:avLst/>
+          </a:prstGeom>
+          <a:noFill/>
+          <a:ln/>
+        </p:spPr>
+        <p:txBody>
+          <a:bodyPr wrap="square" lIns="0" tIns="0" rIns="0" bIns="0" rtlCol="0" anchor="ctr"/>
+          <a:lstStyle/>
+          <a:p>
+            <a:pPr indent="0" marL="0">
+              <a:buNone/>
+            </a:pPr>
+            <a:r>
+              <a:rPr lang="en-US" sz="1300" b="1" dirty="0">
+                <a:solidFill>
+                  <a:srgbClr val="2563EB"/>
+                </a:solidFill>
+                <a:latin typeface="Malgun Gothic" pitchFamily="34" charset="0"/>
+                <a:ea typeface="Malgun Gothic" pitchFamily="34" charset="-122"/>
+                <a:cs typeface="Malgun Gothic" pitchFamily="34" charset="-120"/>
+              </a:rPr>
+              <a:t>DB (sql/NNN)</a:t>
+            </a:r>
+            <a:endParaRPr lang="en-US" sz="1300" dirty="0"/>
+          </a:p>
+        </p:txBody>
+      </p:sp>
+      <p:sp>
+        <p:nvSpPr>
+          <p:cNvPr id="14" name="Shape 12"/>
+          <p:cNvSpPr/>
+          <p:nvPr/>
+        </p:nvSpPr>
+        <p:spPr>
+          <a:xfrm>
+            <a:off x="2286000" y="3081528"/>
+            <a:ext cx="2468880" cy="868680"/>
+          </a:xfrm>
+          <a:prstGeom prst="roundRect">
+            <a:avLst>
+              <a:gd name="adj" fmla="val 8421"/>
             </a:avLst>
           </a:prstGeom>
           <a:solidFill>
@@ -6866,73 +7735,30 @@
       </p:sp>
       <p:sp>
         <p:nvSpPr>
-          <p:cNvPr id="8" name="Text 6"/>
-          <p:cNvSpPr/>
-          <p:nvPr/>
-        </p:nvSpPr>
-        <p:spPr>
-          <a:xfrm>
-            <a:off x="6583680" y="1892808"/>
-            <a:ext cx="4800600" cy="365760"/>
-          </a:xfrm>
-          <a:prstGeom prst="rect">
-            <a:avLst/>
-          </a:prstGeom>
-          <a:noFill/>
-          <a:ln/>
-        </p:spPr>
-        <p:txBody>
-          <a:bodyPr wrap="square" lIns="0" tIns="0" rIns="0" bIns="0" rtlCol="0" anchor="ctr"/>
-          <a:lstStyle/>
-          <a:p>
-            <a:pPr indent="0" marL="0">
-              <a:buNone/>
-            </a:pPr>
-            <a:r>
-              <a:rPr lang="en-US" sz="1500" b="1" dirty="0">
-                <a:solidFill>
-                  <a:srgbClr val="2563EB"/>
-                </a:solidFill>
-                <a:latin typeface="Malgun Gothic" pitchFamily="34" charset="0"/>
-                <a:ea typeface="Malgun Gothic" pitchFamily="34" charset="-122"/>
-                <a:cs typeface="Malgun Gothic" pitchFamily="34" charset="-120"/>
-              </a:rPr>
-              <a:t>🔑  시크릿 격리</a:t>
-            </a:r>
-            <a:endParaRPr lang="en-US" sz="1500" dirty="0"/>
-          </a:p>
-        </p:txBody>
-      </p:sp>
-      <p:sp>
-        <p:nvSpPr>
-          <p:cNvPr id="9" name="Text 7"/>
-          <p:cNvSpPr/>
-          <p:nvPr/>
-        </p:nvSpPr>
-        <p:spPr>
-          <a:xfrm>
-            <a:off x="6629400" y="2423160"/>
-            <a:ext cx="4709160" cy="1143000"/>
-          </a:xfrm>
-          <a:prstGeom prst="rect">
-            <a:avLst/>
-          </a:prstGeom>
-          <a:noFill/>
-          <a:ln/>
-        </p:spPr>
-        <p:txBody>
-          <a:bodyPr wrap="square" lIns="0" tIns="0" rIns="0" bIns="0" rtlCol="0" anchor="ctr"/>
-          <a:lstStyle/>
-          <a:p>
-            <a:pPr marL="342900" indent="-342900">
-              <a:spcAft>
-                <a:spcPts val="800"/>
-              </a:spcAft>
-              <a:buSzPct val="100000"/>
-              <a:buChar char="•"/>
-            </a:pPr>
-            <a:r>
-              <a:rPr lang="en-US" sz="1250" dirty="0">
+          <p:cNvPr id="15" name="Text 13"/>
+          <p:cNvSpPr/>
+          <p:nvPr/>
+        </p:nvSpPr>
+        <p:spPr>
+          <a:xfrm>
+            <a:off x="2377440" y="3081528"/>
+            <a:ext cx="2286000" cy="868680"/>
+          </a:xfrm>
+          <a:prstGeom prst="rect">
+            <a:avLst/>
+          </a:prstGeom>
+          <a:noFill/>
+          <a:ln/>
+        </p:spPr>
+        <p:txBody>
+          <a:bodyPr wrap="square" lIns="0" tIns="0" rIns="0" bIns="0" rtlCol="0" anchor="ctr"/>
+          <a:lstStyle/>
+          <a:p>
+            <a:pPr algn="ctr" indent="0" marL="0">
+              <a:buNone/>
+            </a:pPr>
+            <a:r>
+              <a:rPr lang="en-US" sz="1150" b="1" dirty="0">
                 <a:solidFill>
                   <a:srgbClr val="241B3A"/>
                 </a:solidFill>
@@ -6940,20 +7766,16 @@
                 <a:ea typeface="Malgun Gothic" pitchFamily="34" charset="-122"/>
                 <a:cs typeface="Malgun Gothic" pitchFamily="34" charset="-120"/>
               </a:rPr>
-              <a:t>환경별 키 완전 분리 (재사용 금지)</a:t>
-            </a:r>
-            <a:endParaRPr lang="en-US" sz="1250" dirty="0"/>
-          </a:p>
-          <a:p>
-            <a:pPr marL="342900" indent="-342900">
-              <a:spcAft>
-                <a:spcPts val="800"/>
-              </a:spcAft>
-              <a:buSzPct val="100000"/>
-              <a:buChar char="•"/>
-            </a:pPr>
-            <a:r>
-              <a:rPr lang="en-US" sz="1250" dirty="0">
+              <a:t>Dev 적용</a:t>
+            </a:r>
+            <a:endParaRPr lang="en-US" sz="1150" dirty="0"/>
+          </a:p>
+          <a:p>
+            <a:pPr algn="ctr" indent="0" marL="0">
+              <a:buNone/>
+            </a:pPr>
+            <a:r>
+              <a:rPr lang="en-US" sz="1150" b="1" dirty="0">
                 <a:solidFill>
                   <a:srgbClr val="241B3A"/>
                 </a:solidFill>
@@ -6961,115 +7783,46 @@
                 <a:ea typeface="Malgun Gothic" pitchFamily="34" charset="-122"/>
                 <a:cs typeface="Malgun Gothic" pitchFamily="34" charset="-120"/>
               </a:rPr>
-              <a:t>SUPABASE_SERVICE_ROLE_KEY · PI_API_KEY(testnet↔mainnet)</a:t>
-            </a:r>
-            <a:endParaRPr lang="en-US" sz="1250" dirty="0"/>
-          </a:p>
-          <a:p>
-            <a:pPr marL="342900" indent="-342900">
-              <a:spcAft>
-                <a:spcPts val="800"/>
-              </a:spcAft>
-              <a:buSzPct val="100000"/>
-              <a:buChar char="•"/>
-            </a:pPr>
-            <a:r>
-              <a:rPr lang="en-US" sz="1250" dirty="0">
-                <a:solidFill>
-                  <a:srgbClr val="241B3A"/>
-                </a:solidFill>
-                <a:latin typeface="Malgun Gothic" pitchFamily="34" charset="0"/>
-                <a:ea typeface="Malgun Gothic" pitchFamily="34" charset="-122"/>
-                <a:cs typeface="Malgun Gothic" pitchFamily="34" charset="-120"/>
-              </a:rPr>
-              <a:t>PI_SESSION_SECRET · AUTH_SECRET · CRON_SECRET</a:t>
-            </a:r>
-            <a:endParaRPr lang="en-US" sz="1250" dirty="0"/>
-          </a:p>
-        </p:txBody>
-      </p:sp>
-      <p:sp>
-        <p:nvSpPr>
-          <p:cNvPr id="10" name="Shape 8"/>
-          <p:cNvSpPr/>
-          <p:nvPr/>
-        </p:nvSpPr>
-        <p:spPr>
-          <a:xfrm>
-            <a:off x="548640" y="3977640"/>
-            <a:ext cx="11064240" cy="1920240"/>
+              <a:t>검증</a:t>
+            </a:r>
+            <a:endParaRPr lang="en-US" sz="1150" dirty="0"/>
+          </a:p>
+        </p:txBody>
+      </p:sp>
+      <p:sp>
+        <p:nvSpPr>
+          <p:cNvPr id="16" name="Shape 14"/>
+          <p:cNvSpPr/>
+          <p:nvPr/>
+        </p:nvSpPr>
+        <p:spPr>
+          <a:xfrm>
+            <a:off x="4828032" y="3291840"/>
+            <a:ext cx="539496" cy="457200"/>
+          </a:xfrm>
+          <a:prstGeom prst="rightArrow">
+            <a:avLst/>
+          </a:prstGeom>
+          <a:solidFill>
+            <a:srgbClr val="2563EB"/>
+          </a:solidFill>
+          <a:ln/>
+        </p:spPr>
+      </p:sp>
+      <p:sp>
+        <p:nvSpPr>
+          <p:cNvPr id="17" name="Shape 15"/>
+          <p:cNvSpPr/>
+          <p:nvPr/>
+        </p:nvSpPr>
+        <p:spPr>
+          <a:xfrm>
+            <a:off x="5440680" y="3081528"/>
+            <a:ext cx="2468880" cy="868680"/>
           </a:xfrm>
           <a:prstGeom prst="roundRect">
             <a:avLst>
-              <a:gd name="adj" fmla="val 4762"/>
-            </a:avLst>
-          </a:prstGeom>
-          <a:solidFill>
-            <a:srgbClr val="EEE9F8"/>
-          </a:solidFill>
-          <a:ln/>
-          <a:effectLst>
-            <a:outerShdw sx="100000" sy="100000" kx="0" ky="0" algn="bl" rotWithShape="0" blurRad="101600" dist="38100" dir="8100000">
-              <a:srgbClr val="1A1145">
-                <a:alpha val="16000"/>
-              </a:srgbClr>
-            </a:outerShdw>
-          </a:effectLst>
-        </p:spPr>
-      </p:sp>
-      <p:sp>
-        <p:nvSpPr>
-          <p:cNvPr id="11" name="Text 9"/>
-          <p:cNvSpPr/>
-          <p:nvPr/>
-        </p:nvSpPr>
-        <p:spPr>
-          <a:xfrm>
-            <a:off x="868680" y="4160520"/>
-            <a:ext cx="10058400" cy="365760"/>
-          </a:xfrm>
-          <a:prstGeom prst="rect">
-            <a:avLst/>
-          </a:prstGeom>
-          <a:noFill/>
-          <a:ln/>
-        </p:spPr>
-        <p:txBody>
-          <a:bodyPr wrap="square" lIns="0" tIns="0" rIns="0" bIns="0" rtlCol="0" anchor="ctr"/>
-          <a:lstStyle/>
-          <a:p>
-            <a:pPr indent="0" marL="0">
-              <a:buNone/>
-            </a:pPr>
-            <a:r>
-              <a:rPr lang="en-US" sz="1500" b="1" dirty="0">
-                <a:solidFill>
-                  <a:srgbClr val="241B3A"/>
-                </a:solidFill>
-                <a:latin typeface="Malgun Gothic" pitchFamily="34" charset="0"/>
-                <a:ea typeface="Malgun Gothic" pitchFamily="34" charset="-122"/>
-                <a:cs typeface="Malgun Gothic" pitchFamily="34" charset="-120"/>
-              </a:rPr>
-              <a:t>🧩  Vercel 환경 스코프 = 3분리</a:t>
-            </a:r>
-            <a:endParaRPr lang="en-US" sz="1500" dirty="0"/>
-          </a:p>
-        </p:txBody>
-      </p:sp>
-      <p:sp>
-        <p:nvSpPr>
-          <p:cNvPr id="12" name="Shape 10"/>
-          <p:cNvSpPr/>
-          <p:nvPr/>
-        </p:nvSpPr>
-        <p:spPr>
-          <a:xfrm>
-            <a:off x="868680" y="4709160"/>
-            <a:ext cx="3429000" cy="960120"/>
-          </a:xfrm>
-          <a:prstGeom prst="roundRect">
-            <a:avLst>
-              <a:gd name="adj" fmla="val 7619"/>
+              <a:gd name="adj" fmla="val 8421"/>
             </a:avLst>
           </a:prstGeom>
           <a:solidFill>
@@ -7081,18 +7834,25 @@
             </a:solidFill>
             <a:prstDash val="solid"/>
           </a:ln>
-        </p:spPr>
-      </p:sp>
-      <p:sp>
-        <p:nvSpPr>
-          <p:cNvPr id="13" name="Text 11"/>
-          <p:cNvSpPr/>
-          <p:nvPr/>
-        </p:nvSpPr>
-        <p:spPr>
-          <a:xfrm>
-            <a:off x="868680" y="4818888"/>
-            <a:ext cx="3429000" cy="365760"/>
+          <a:effectLst>
+            <a:outerShdw sx="100000" sy="100000" kx="0" ky="0" algn="bl" rotWithShape="0" blurRad="101600" dist="38100" dir="8100000">
+              <a:srgbClr val="1A1145">
+                <a:alpha val="16000"/>
+              </a:srgbClr>
+            </a:outerShdw>
+          </a:effectLst>
+        </p:spPr>
+      </p:sp>
+      <p:sp>
+        <p:nvSpPr>
+          <p:cNvPr id="18" name="Text 16"/>
+          <p:cNvSpPr/>
+          <p:nvPr/>
+        </p:nvSpPr>
+        <p:spPr>
+          <a:xfrm>
+            <a:off x="5532120" y="3081528"/>
+            <a:ext cx="2286000" cy="868680"/>
           </a:xfrm>
           <a:prstGeom prst="rect">
             <a:avLst/>
@@ -7108,73 +7868,71 @@
               <a:buNone/>
             </a:pPr>
             <a:r>
-              <a:rPr lang="en-US" sz="1300" b="1" dirty="0">
-                <a:solidFill>
-                  <a:srgbClr val="2563EB"/>
-                </a:solidFill>
-                <a:latin typeface="Malgun Gothic" pitchFamily="34" charset="0"/>
-                <a:ea typeface="Malgun Gothic" pitchFamily="34" charset="-122"/>
-                <a:cs typeface="Malgun Gothic" pitchFamily="34" charset="-120"/>
-              </a:rPr>
-              <a:t>Development</a:t>
-            </a:r>
-            <a:endParaRPr lang="en-US" sz="1300" dirty="0"/>
-          </a:p>
-        </p:txBody>
-      </p:sp>
-      <p:sp>
-        <p:nvSpPr>
-          <p:cNvPr id="14" name="Text 12"/>
-          <p:cNvSpPr/>
-          <p:nvPr/>
-        </p:nvSpPr>
-        <p:spPr>
-          <a:xfrm>
-            <a:off x="1005840" y="5175504"/>
-            <a:ext cx="3154680" cy="411480"/>
-          </a:xfrm>
-          <a:prstGeom prst="rect">
-            <a:avLst/>
-          </a:prstGeom>
-          <a:noFill/>
-          <a:ln/>
-        </p:spPr>
-        <p:txBody>
-          <a:bodyPr wrap="square" lIns="0" tIns="0" rIns="0" bIns="0" rtlCol="0" anchor="ctr"/>
-          <a:lstStyle/>
+              <a:rPr lang="en-US" sz="1150" b="1" dirty="0">
+                <a:solidFill>
+                  <a:srgbClr val="241B3A"/>
+                </a:solidFill>
+                <a:latin typeface="Malgun Gothic" pitchFamily="34" charset="0"/>
+                <a:ea typeface="Malgun Gothic" pitchFamily="34" charset="-122"/>
+                <a:cs typeface="Malgun Gothic" pitchFamily="34" charset="-120"/>
+              </a:rPr>
+              <a:t>Staging 적용</a:t>
+            </a:r>
+            <a:endParaRPr lang="en-US" sz="1150" dirty="0"/>
+          </a:p>
           <a:p>
             <a:pPr algn="ctr" indent="0" marL="0">
               <a:buNone/>
             </a:pPr>
             <a:r>
-              <a:rPr lang="en-US" sz="1050" dirty="0">
-                <a:solidFill>
-                  <a:srgbClr val="6B6485"/>
-                </a:solidFill>
-                <a:latin typeface="Malgun Gothic" pitchFamily="34" charset="0"/>
-                <a:ea typeface="Malgun Gothic" pitchFamily="34" charset="-122"/>
-                <a:cs typeface="Malgun Gothic" pitchFamily="34" charset="-120"/>
-              </a:rPr>
-              <a:t>로컬 Supabase · Testnet</a:t>
-            </a:r>
-            <a:endParaRPr lang="en-US" sz="1050" dirty="0"/>
-          </a:p>
-        </p:txBody>
-      </p:sp>
-      <p:sp>
-        <p:nvSpPr>
-          <p:cNvPr id="15" name="Shape 13"/>
-          <p:cNvSpPr/>
-          <p:nvPr/>
-        </p:nvSpPr>
-        <p:spPr>
-          <a:xfrm>
-            <a:off x="4379976" y="4709160"/>
-            <a:ext cx="3429000" cy="960120"/>
+              <a:rPr lang="en-US" sz="1150" b="1" dirty="0">
+                <a:solidFill>
+                  <a:srgbClr val="241B3A"/>
+                </a:solidFill>
+                <a:latin typeface="Malgun Gothic" pitchFamily="34" charset="0"/>
+                <a:ea typeface="Malgun Gothic" pitchFamily="34" charset="-122"/>
+                <a:cs typeface="Malgun Gothic" pitchFamily="34" charset="-120"/>
+              </a:rPr>
+              <a:t>검증</a:t>
+            </a:r>
+            <a:endParaRPr lang="en-US" sz="1150" dirty="0"/>
+          </a:p>
+        </p:txBody>
+      </p:sp>
+      <p:sp>
+        <p:nvSpPr>
+          <p:cNvPr id="19" name="Shape 17"/>
+          <p:cNvSpPr/>
+          <p:nvPr/>
+        </p:nvSpPr>
+        <p:spPr>
+          <a:xfrm>
+            <a:off x="7982712" y="3291840"/>
+            <a:ext cx="539496" cy="457200"/>
+          </a:xfrm>
+          <a:prstGeom prst="rightArrow">
+            <a:avLst/>
+          </a:prstGeom>
+          <a:solidFill>
+            <a:srgbClr val="2563EB"/>
+          </a:solidFill>
+          <a:ln/>
+        </p:spPr>
+      </p:sp>
+      <p:sp>
+        <p:nvSpPr>
+          <p:cNvPr id="20" name="Shape 18"/>
+          <p:cNvSpPr/>
+          <p:nvPr/>
+        </p:nvSpPr>
+        <p:spPr>
+          <a:xfrm>
+            <a:off x="8595360" y="3081528"/>
+            <a:ext cx="2468880" cy="868680"/>
           </a:xfrm>
           <a:prstGeom prst="roundRect">
             <a:avLst>
-              <a:gd name="adj" fmla="val 7619"/>
+              <a:gd name="adj" fmla="val 8421"/>
             </a:avLst>
           </a:prstGeom>
           <a:solidFill>
@@ -7182,22 +7940,29 @@
           </a:solidFill>
           <a:ln w="15875">
             <a:solidFill>
-              <a:srgbClr val="E8910C"/>
+              <a:srgbClr val="2563EB"/>
             </a:solidFill>
             <a:prstDash val="solid"/>
           </a:ln>
-        </p:spPr>
-      </p:sp>
-      <p:sp>
-        <p:nvSpPr>
-          <p:cNvPr id="16" name="Text 14"/>
-          <p:cNvSpPr/>
-          <p:nvPr/>
-        </p:nvSpPr>
-        <p:spPr>
-          <a:xfrm>
-            <a:off x="4379976" y="4818888"/>
-            <a:ext cx="3429000" cy="365760"/>
+          <a:effectLst>
+            <a:outerShdw sx="100000" sy="100000" kx="0" ky="0" algn="bl" rotWithShape="0" blurRad="101600" dist="38100" dir="8100000">
+              <a:srgbClr val="1A1145">
+                <a:alpha val="16000"/>
+              </a:srgbClr>
+            </a:outerShdw>
+          </a:effectLst>
+        </p:spPr>
+      </p:sp>
+      <p:sp>
+        <p:nvSpPr>
+          <p:cNvPr id="21" name="Text 19"/>
+          <p:cNvSpPr/>
+          <p:nvPr/>
+        </p:nvSpPr>
+        <p:spPr>
+          <a:xfrm>
+            <a:off x="8686800" y="3081528"/>
+            <a:ext cx="2286000" cy="868680"/>
           </a:xfrm>
           <a:prstGeom prst="rect">
             <a:avLst/>
@@ -7213,167 +7978,190 @@
               <a:buNone/>
             </a:pPr>
             <a:r>
-              <a:rPr lang="en-US" sz="1300" b="1" dirty="0">
-                <a:solidFill>
-                  <a:srgbClr val="E8910C"/>
-                </a:solidFill>
-                <a:latin typeface="Malgun Gothic" pitchFamily="34" charset="0"/>
-                <a:ea typeface="Malgun Gothic" pitchFamily="34" charset="-122"/>
-                <a:cs typeface="Malgun Gothic" pitchFamily="34" charset="-120"/>
-              </a:rPr>
-              <a:t>Preview</a:t>
-            </a:r>
-            <a:endParaRPr lang="en-US" sz="1300" dirty="0"/>
-          </a:p>
-        </p:txBody>
-      </p:sp>
-      <p:sp>
-        <p:nvSpPr>
-          <p:cNvPr id="17" name="Text 15"/>
-          <p:cNvSpPr/>
-          <p:nvPr/>
-        </p:nvSpPr>
-        <p:spPr>
-          <a:xfrm>
-            <a:off x="4517136" y="5175504"/>
-            <a:ext cx="3154680" cy="411480"/>
-          </a:xfrm>
-          <a:prstGeom prst="rect">
-            <a:avLst/>
-          </a:prstGeom>
-          <a:noFill/>
-          <a:ln/>
-        </p:spPr>
-        <p:txBody>
-          <a:bodyPr wrap="square" lIns="0" tIns="0" rIns="0" bIns="0" rtlCol="0" anchor="ctr"/>
-          <a:lstStyle/>
+              <a:rPr lang="en-US" sz="1150" b="1" dirty="0">
+                <a:solidFill>
+                  <a:srgbClr val="241B3A"/>
+                </a:solidFill>
+                <a:latin typeface="Malgun Gothic" pitchFamily="34" charset="0"/>
+                <a:ea typeface="Malgun Gothic" pitchFamily="34" charset="-122"/>
+                <a:cs typeface="Malgun Gothic" pitchFamily="34" charset="-120"/>
+              </a:rPr>
+              <a:t>Prod 적용</a:t>
+            </a:r>
+            <a:endParaRPr lang="en-US" sz="1150" dirty="0"/>
+          </a:p>
           <a:p>
             <a:pPr algn="ctr" indent="0" marL="0">
               <a:buNone/>
             </a:pPr>
             <a:r>
-              <a:rPr lang="en-US" sz="1050" dirty="0">
-                <a:solidFill>
-                  <a:srgbClr val="6B6485"/>
-                </a:solidFill>
-                <a:latin typeface="Malgun Gothic" pitchFamily="34" charset="0"/>
-                <a:ea typeface="Malgun Gothic" pitchFamily="34" charset="-122"/>
-                <a:cs typeface="Malgun Gothic" pitchFamily="34" charset="-120"/>
-              </a:rPr>
-              <a:t>Staging DB · Testnet</a:t>
-            </a:r>
-            <a:endParaRPr lang="en-US" sz="1050" dirty="0"/>
-          </a:p>
-        </p:txBody>
-      </p:sp>
-      <p:sp>
-        <p:nvSpPr>
-          <p:cNvPr id="18" name="Shape 16"/>
-          <p:cNvSpPr/>
-          <p:nvPr/>
-        </p:nvSpPr>
-        <p:spPr>
-          <a:xfrm>
-            <a:off x="7891272" y="4709160"/>
-            <a:ext cx="3429000" cy="960120"/>
+              <a:rPr lang="en-US" sz="1150" b="1" dirty="0">
+                <a:solidFill>
+                  <a:srgbClr val="241B3A"/>
+                </a:solidFill>
+                <a:latin typeface="Malgun Gothic" pitchFamily="34" charset="0"/>
+                <a:ea typeface="Malgun Gothic" pitchFamily="34" charset="-122"/>
+                <a:cs typeface="Malgun Gothic" pitchFamily="34" charset="-120"/>
+              </a:rPr>
+              <a:t>(최종)</a:t>
+            </a:r>
+            <a:endParaRPr lang="en-US" sz="1150" dirty="0"/>
+          </a:p>
+        </p:txBody>
+      </p:sp>
+      <p:sp>
+        <p:nvSpPr>
+          <p:cNvPr id="22" name="Shape 20"/>
+          <p:cNvSpPr/>
+          <p:nvPr/>
+        </p:nvSpPr>
+        <p:spPr>
+          <a:xfrm>
+            <a:off x="548640" y="4526280"/>
+            <a:ext cx="11064240" cy="1417320"/>
           </a:xfrm>
           <a:prstGeom prst="roundRect">
             <a:avLst>
-              <a:gd name="adj" fmla="val 7619"/>
+              <a:gd name="adj" fmla="val 6452"/>
             </a:avLst>
           </a:prstGeom>
           <a:solidFill>
-            <a:srgbClr val="FFFFFF"/>
+            <a:srgbClr val="2A1A66"/>
           </a:solidFill>
-          <a:ln w="15875">
-            <a:solidFill>
-              <a:srgbClr val="5B2A9D"/>
-            </a:solidFill>
-            <a:prstDash val="solid"/>
-          </a:ln>
-        </p:spPr>
-      </p:sp>
-      <p:sp>
-        <p:nvSpPr>
-          <p:cNvPr id="19" name="Text 17"/>
-          <p:cNvSpPr/>
-          <p:nvPr/>
-        </p:nvSpPr>
-        <p:spPr>
-          <a:xfrm>
-            <a:off x="7891272" y="4818888"/>
-            <a:ext cx="3429000" cy="365760"/>
-          </a:xfrm>
-          <a:prstGeom prst="rect">
-            <a:avLst/>
-          </a:prstGeom>
-          <a:noFill/>
-          <a:ln/>
-        </p:spPr>
-        <p:txBody>
-          <a:bodyPr wrap="square" lIns="0" tIns="0" rIns="0" bIns="0" rtlCol="0" anchor="ctr"/>
-          <a:lstStyle/>
-          <a:p>
-            <a:pPr algn="ctr" indent="0" marL="0">
-              <a:buNone/>
-            </a:pPr>
-            <a:r>
-              <a:rPr lang="en-US" sz="1300" b="1" dirty="0">
-                <a:solidFill>
-                  <a:srgbClr val="5B2A9D"/>
-                </a:solidFill>
-                <a:latin typeface="Malgun Gothic" pitchFamily="34" charset="0"/>
-                <a:ea typeface="Malgun Gothic" pitchFamily="34" charset="-122"/>
-                <a:cs typeface="Malgun Gothic" pitchFamily="34" charset="-120"/>
-              </a:rPr>
-              <a:t>Production</a:t>
-            </a:r>
-            <a:endParaRPr lang="en-US" sz="1300" dirty="0"/>
-          </a:p>
-        </p:txBody>
-      </p:sp>
-      <p:sp>
-        <p:nvSpPr>
-          <p:cNvPr id="20" name="Text 18"/>
-          <p:cNvSpPr/>
-          <p:nvPr/>
-        </p:nvSpPr>
-        <p:spPr>
-          <a:xfrm>
-            <a:off x="8028432" y="5175504"/>
-            <a:ext cx="3154680" cy="411480"/>
-          </a:xfrm>
-          <a:prstGeom prst="rect">
-            <a:avLst/>
-          </a:prstGeom>
-          <a:noFill/>
-          <a:ln/>
-        </p:spPr>
-        <p:txBody>
-          <a:bodyPr wrap="square" lIns="0" tIns="0" rIns="0" bIns="0" rtlCol="0" anchor="ctr"/>
-          <a:lstStyle/>
-          <a:p>
-            <a:pPr algn="ctr" indent="0" marL="0">
-              <a:buNone/>
-            </a:pPr>
-            <a:r>
-              <a:rPr lang="en-US" sz="1050" dirty="0">
-                <a:solidFill>
-                  <a:srgbClr val="6B6485"/>
-                </a:solidFill>
-                <a:latin typeface="Malgun Gothic" pitchFamily="34" charset="0"/>
-                <a:ea typeface="Malgun Gothic" pitchFamily="34" charset="-122"/>
-                <a:cs typeface="Malgun Gothic" pitchFamily="34" charset="-120"/>
-              </a:rPr>
-              <a:t>Prod DB · Mainnet</a:t>
-            </a:r>
-            <a:endParaRPr lang="en-US" sz="1050" dirty="0"/>
-          </a:p>
-        </p:txBody>
-      </p:sp>
-      <p:sp>
-        <p:nvSpPr>
-          <p:cNvPr id="21" name="Text 19"/>
+          <a:ln/>
+          <a:effectLst>
+            <a:outerShdw sx="100000" sy="100000" kx="0" ky="0" algn="bl" rotWithShape="0" blurRad="101600" dist="38100" dir="8100000">
+              <a:srgbClr val="1A1145">
+                <a:alpha val="16000"/>
+              </a:srgbClr>
+            </a:outerShdw>
+          </a:effectLst>
+        </p:spPr>
+      </p:sp>
+      <p:sp>
+        <p:nvSpPr>
+          <p:cNvPr id="23" name="Text 21"/>
+          <p:cNvSpPr/>
+          <p:nvPr/>
+        </p:nvSpPr>
+        <p:spPr>
+          <a:xfrm>
+            <a:off x="868680" y="4663440"/>
+            <a:ext cx="2743200" cy="365760"/>
+          </a:xfrm>
+          <a:prstGeom prst="rect">
+            <a:avLst/>
+          </a:prstGeom>
+          <a:noFill/>
+          <a:ln/>
+        </p:spPr>
+        <p:txBody>
+          <a:bodyPr wrap="square" lIns="0" tIns="0" rIns="0" bIns="0" rtlCol="0" anchor="ctr"/>
+          <a:lstStyle/>
+          <a:p>
+            <a:pPr indent="0" marL="0">
+              <a:buNone/>
+            </a:pPr>
+            <a:r>
+              <a:rPr lang="en-US" sz="1400" b="1" dirty="0">
+                <a:solidFill>
+                  <a:srgbClr val="F5B731"/>
+                </a:solidFill>
+                <a:latin typeface="Malgun Gothic" pitchFamily="34" charset="0"/>
+                <a:ea typeface="Malgun Gothic" pitchFamily="34" charset="-122"/>
+                <a:cs typeface="Malgun Gothic" pitchFamily="34" charset="-120"/>
+              </a:rPr>
+              <a:t>불변 원칙</a:t>
+            </a:r>
+            <a:endParaRPr lang="en-US" sz="1400" dirty="0"/>
+          </a:p>
+        </p:txBody>
+      </p:sp>
+      <p:sp>
+        <p:nvSpPr>
+          <p:cNvPr id="24" name="Text 22"/>
+          <p:cNvSpPr/>
+          <p:nvPr/>
+        </p:nvSpPr>
+        <p:spPr>
+          <a:xfrm>
+            <a:off x="914400" y="5029200"/>
+            <a:ext cx="10424160" cy="914400"/>
+          </a:xfrm>
+          <a:prstGeom prst="rect">
+            <a:avLst/>
+          </a:prstGeom>
+          <a:noFill/>
+          <a:ln/>
+        </p:spPr>
+        <p:txBody>
+          <a:bodyPr wrap="square" lIns="0" tIns="0" rIns="0" bIns="0" rtlCol="0" anchor="ctr"/>
+          <a:lstStyle/>
+          <a:p>
+            <a:pPr marL="342900" indent="-342900">
+              <a:spcAft>
+                <a:spcPts val="600"/>
+              </a:spcAft>
+              <a:buSzPct val="100000"/>
+              <a:buChar char="•"/>
+            </a:pPr>
+            <a:r>
+              <a:rPr lang="en-US" sz="1200" dirty="0">
+                <a:solidFill>
+                  <a:srgbClr val="FFFFFF"/>
+                </a:solidFill>
+                <a:latin typeface="Malgun Gothic" pitchFamily="34" charset="0"/>
+                <a:ea typeface="Malgun Gothic" pitchFamily="34" charset="-122"/>
+                <a:cs typeface="Malgun Gothic" pitchFamily="34" charset="-120"/>
+              </a:rPr>
+              <a:t>운영(Prod)에 먼저 적용 절대 금지 — 항상 Dev→Staging에서 검증 후 승격</a:t>
+            </a:r>
+            <a:endParaRPr lang="en-US" sz="1200" dirty="0"/>
+          </a:p>
+          <a:p>
+            <a:pPr marL="342900" indent="-342900">
+              <a:spcAft>
+                <a:spcPts val="600"/>
+              </a:spcAft>
+              <a:buSzPct val="100000"/>
+              <a:buChar char="•"/>
+            </a:pPr>
+            <a:r>
+              <a:rPr lang="en-US" sz="1200" dirty="0">
+                <a:solidFill>
+                  <a:srgbClr val="FFFFFF"/>
+                </a:solidFill>
+                <a:latin typeface="Malgun Gothic" pitchFamily="34" charset="0"/>
+                <a:ea typeface="Malgun Gothic" pitchFamily="34" charset="-122"/>
+                <a:cs typeface="Malgun Gothic" pitchFamily="34" charset="-120"/>
+              </a:rPr>
+              <a:t>sql/NNN 번호·순서 유지 (DA 표준·da-ddl-guard) — 같은 마이그레이션을 각 환경에 순차 적용</a:t>
+            </a:r>
+            <a:endParaRPr lang="en-US" sz="1200" dirty="0"/>
+          </a:p>
+          <a:p>
+            <a:pPr marL="342900" indent="-342900">
+              <a:buSzPct val="100000"/>
+              <a:buChar char="•"/>
+            </a:pPr>
+            <a:r>
+              <a:rPr lang="en-US" sz="1200" dirty="0">
+                <a:solidFill>
+                  <a:srgbClr val="FFFFFF"/>
+                </a:solidFill>
+                <a:latin typeface="Malgun Gothic" pitchFamily="34" charset="0"/>
+                <a:ea typeface="Malgun Gothic" pitchFamily="34" charset="-122"/>
+                <a:cs typeface="Malgun Gothic" pitchFamily="34" charset="-120"/>
+              </a:rPr>
+              <a:t>롤백 = Vercel revert(코드) + 보상 마이그레이션(DB) · 물리 DELETE 금지(논리삭제)</a:t>
+            </a:r>
+            <a:endParaRPr lang="en-US" sz="1200" dirty="0"/>
+          </a:p>
+        </p:txBody>
+      </p:sp>
+      <p:sp>
+        <p:nvSpPr>
+          <p:cNvPr id="25" name="Text 23"/>
           <p:cNvSpPr/>
           <p:nvPr/>
         </p:nvSpPr>
@@ -7412,7 +8200,7 @@
       </p:sp>
       <p:sp>
         <p:nvSpPr>
-          <p:cNvPr id="22" name="Text 20"/>
+          <p:cNvPr id="26" name="Text 24"/>
           <p:cNvSpPr/>
           <p:nvPr/>
         </p:nvSpPr>
@@ -7514,7 +8302,7 @@
                 <a:ea typeface="Malgun Gothic" pitchFamily="34" charset="-122"/>
                 <a:cs typeface="Malgun Gothic" pitchFamily="34" charset="-120"/>
               </a:rPr>
-              <a:t>COST · 현실적 도구</a:t>
+              <a:t>ISOLATION · 격리</a:t>
             </a:r>
             <a:endParaRPr lang="en-US" sz="1200" dirty="0"/>
           </a:p>
@@ -7553,7 +8341,7 @@
                 <a:ea typeface="Malgun Gothic" pitchFamily="34" charset="-122"/>
                 <a:cs typeface="Malgun Gothic" pitchFamily="34" charset="-120"/>
               </a:rPr>
-              <a:t>무료 범위로 3환경 만들기</a:t>
+              <a:t>데이터와 시크릿은 환경 경계를 넘지 않는다</a:t>
             </a:r>
             <a:endParaRPr lang="en-US" sz="2600" dirty="0"/>
           </a:p>
@@ -7568,11 +8356,11 @@
         <p:spPr>
           <a:xfrm>
             <a:off x="548640" y="1691640"/>
-            <a:ext cx="11064240" cy="2103120"/>
+            <a:ext cx="5349240" cy="2057400"/>
           </a:xfrm>
           <a:prstGeom prst="roundRect">
             <a:avLst>
-              <a:gd name="adj" fmla="val 4348"/>
+              <a:gd name="adj" fmla="val 4444"/>
             </a:avLst>
           </a:prstGeom>
           <a:solidFill>
@@ -7580,7 +8368,7 @@
           </a:solidFill>
           <a:ln w="15875">
             <a:solidFill>
-              <a:srgbClr val="16A34A"/>
+              <a:srgbClr val="5B2A9D"/>
             </a:solidFill>
             <a:prstDash val="solid"/>
           </a:ln>
@@ -7601,8 +8389,8 @@
         </p:nvSpPr>
         <p:spPr>
           <a:xfrm>
-            <a:off x="868680" y="1874520"/>
-            <a:ext cx="10424160" cy="365760"/>
+            <a:off x="822960" y="1892808"/>
+            <a:ext cx="4800600" cy="365760"/>
           </a:xfrm>
           <a:prstGeom prst="rect">
             <a:avLst/>
@@ -7618,7 +8406,50 @@
               <a:buNone/>
             </a:pPr>
             <a:r>
-              <a:rPr lang="en-US" sz="1450" b="1" dirty="0">
+              <a:rPr lang="en-US" sz="1500" b="1" dirty="0">
+                <a:solidFill>
+                  <a:srgbClr val="5B2A9D"/>
+                </a:solidFill>
+                <a:latin typeface="Malgun Gothic" pitchFamily="34" charset="0"/>
+                <a:ea typeface="Malgun Gothic" pitchFamily="34" charset="-122"/>
+                <a:cs typeface="Malgun Gothic" pitchFamily="34" charset="-120"/>
+              </a:rPr>
+              <a:t>🔒  데이터 격리</a:t>
+            </a:r>
+            <a:endParaRPr lang="en-US" sz="1500" dirty="0"/>
+          </a:p>
+        </p:txBody>
+      </p:sp>
+      <p:sp>
+        <p:nvSpPr>
+          <p:cNvPr id="6" name="Text 4"/>
+          <p:cNvSpPr/>
+          <p:nvPr/>
+        </p:nvSpPr>
+        <p:spPr>
+          <a:xfrm>
+            <a:off x="868680" y="2423160"/>
+            <a:ext cx="4709160" cy="1143000"/>
+          </a:xfrm>
+          <a:prstGeom prst="rect">
+            <a:avLst/>
+          </a:prstGeom>
+          <a:noFill/>
+          <a:ln/>
+        </p:spPr>
+        <p:txBody>
+          <a:bodyPr wrap="square" lIns="0" tIns="0" rIns="0" bIns="0" rtlCol="0" anchor="ctr"/>
+          <a:lstStyle/>
+          <a:p>
+            <a:pPr marL="342900" indent="-342900">
+              <a:spcAft>
+                <a:spcPts val="800"/>
+              </a:spcAft>
+              <a:buSzPct val="100000"/>
+              <a:buChar char="•"/>
+            </a:pPr>
+            <a:r>
+              <a:rPr lang="en-US" sz="1250" dirty="0">
                 <a:solidFill>
                   <a:srgbClr val="241B3A"/>
                 </a:solidFill>
@@ -7626,30 +8457,72 @@
                 <a:ea typeface="Malgun Gothic" pitchFamily="34" charset="-122"/>
                 <a:cs typeface="Malgun Gothic" pitchFamily="34" charset="-120"/>
               </a:rPr>
-              <a:t>💡  Supabase 무료 플랜 = 활성 프로젝트 보통 2개 → 이렇게 배치하면 무료로 3환경</a:t>
-            </a:r>
-            <a:endParaRPr lang="en-US" sz="1450" dirty="0"/>
-          </a:p>
-        </p:txBody>
-      </p:sp>
-      <p:sp>
-        <p:nvSpPr>
-          <p:cNvPr id="6" name="Shape 4"/>
-          <p:cNvSpPr/>
-          <p:nvPr/>
-        </p:nvSpPr>
-        <p:spPr>
-          <a:xfrm>
-            <a:off x="868680" y="2377440"/>
-            <a:ext cx="3429000" cy="1234440"/>
+              <a:t>운영 PII(실명·연락처·위치)는 하위 환경에 원본 복제 금지</a:t>
+            </a:r>
+            <a:endParaRPr lang="en-US" sz="1250" dirty="0"/>
+          </a:p>
+          <a:p>
+            <a:pPr marL="342900" indent="-342900">
+              <a:spcAft>
+                <a:spcPts val="800"/>
+              </a:spcAft>
+              <a:buSzPct val="100000"/>
+              <a:buChar char="•"/>
+            </a:pPr>
+            <a:r>
+              <a:rPr lang="en-US" sz="1250" dirty="0">
+                <a:solidFill>
+                  <a:srgbClr val="241B3A"/>
+                </a:solidFill>
+                <a:latin typeface="Malgun Gothic" pitchFamily="34" charset="0"/>
+                <a:ea typeface="Malgun Gothic" pitchFamily="34" charset="-122"/>
+                <a:cs typeface="Malgun Gothic" pitchFamily="34" charset="-120"/>
+              </a:rPr>
+              <a:t>필요 시 마스킹·합성 데이터로 대체</a:t>
+            </a:r>
+            <a:endParaRPr lang="en-US" sz="1250" dirty="0"/>
+          </a:p>
+          <a:p>
+            <a:pPr marL="342900" indent="-342900">
+              <a:spcAft>
+                <a:spcPts val="800"/>
+              </a:spcAft>
+              <a:buSzPct val="100000"/>
+              <a:buChar char="•"/>
+            </a:pPr>
+            <a:r>
+              <a:rPr lang="en-US" sz="1250" dirty="0">
+                <a:solidFill>
+                  <a:srgbClr val="241B3A"/>
+                </a:solidFill>
+                <a:latin typeface="Malgun Gothic" pitchFamily="34" charset="0"/>
+                <a:ea typeface="Malgun Gothic" pitchFamily="34" charset="-122"/>
+                <a:cs typeface="Malgun Gothic" pitchFamily="34" charset="-120"/>
+              </a:rPr>
+              <a:t>논리삭제(del_yn) 원칙 유지</a:t>
+            </a:r>
+            <a:endParaRPr lang="en-US" sz="1250" dirty="0"/>
+          </a:p>
+        </p:txBody>
+      </p:sp>
+      <p:sp>
+        <p:nvSpPr>
+          <p:cNvPr id="7" name="Shape 5"/>
+          <p:cNvSpPr/>
+          <p:nvPr/>
+        </p:nvSpPr>
+        <p:spPr>
+          <a:xfrm>
+            <a:off x="6309360" y="1691640"/>
+            <a:ext cx="5349240" cy="2057400"/>
           </a:xfrm>
           <a:prstGeom prst="roundRect">
             <a:avLst>
-              <a:gd name="adj" fmla="val 5926"/>
+              <a:gd name="adj" fmla="val 4444"/>
             </a:avLst>
           </a:prstGeom>
           <a:solidFill>
-            <a:srgbClr val="F7F5FB"/>
+            <a:srgbClr val="FFFFFF"/>
           </a:solidFill>
           <a:ln w="15875">
             <a:solidFill>
@@ -7657,34 +8530,41 @@
             </a:solidFill>
             <a:prstDash val="solid"/>
           </a:ln>
-        </p:spPr>
-      </p:sp>
-      <p:sp>
-        <p:nvSpPr>
-          <p:cNvPr id="7" name="Text 5"/>
-          <p:cNvSpPr/>
-          <p:nvPr/>
-        </p:nvSpPr>
-        <p:spPr>
-          <a:xfrm>
-            <a:off x="868680" y="2514600"/>
-            <a:ext cx="3429000" cy="365760"/>
-          </a:xfrm>
-          <a:prstGeom prst="rect">
-            <a:avLst/>
-          </a:prstGeom>
-          <a:noFill/>
-          <a:ln/>
-        </p:spPr>
-        <p:txBody>
-          <a:bodyPr wrap="square" lIns="0" tIns="0" rIns="0" bIns="0" rtlCol="0" anchor="ctr"/>
-          <a:lstStyle/>
-          <a:p>
-            <a:pPr algn="ctr" indent="0" marL="0">
-              <a:buNone/>
-            </a:pPr>
-            <a:r>
-              <a:rPr lang="en-US" sz="1400" b="1" dirty="0">
+          <a:effectLst>
+            <a:outerShdw sx="100000" sy="100000" kx="0" ky="0" algn="bl" rotWithShape="0" blurRad="101600" dist="38100" dir="8100000">
+              <a:srgbClr val="1A1145">
+                <a:alpha val="16000"/>
+              </a:srgbClr>
+            </a:outerShdw>
+          </a:effectLst>
+        </p:spPr>
+      </p:sp>
+      <p:sp>
+        <p:nvSpPr>
+          <p:cNvPr id="8" name="Text 6"/>
+          <p:cNvSpPr/>
+          <p:nvPr/>
+        </p:nvSpPr>
+        <p:spPr>
+          <a:xfrm>
+            <a:off x="6583680" y="1892808"/>
+            <a:ext cx="4800600" cy="365760"/>
+          </a:xfrm>
+          <a:prstGeom prst="rect">
+            <a:avLst/>
+          </a:prstGeom>
+          <a:noFill/>
+          <a:ln/>
+        </p:spPr>
+        <p:txBody>
+          <a:bodyPr wrap="square" lIns="0" tIns="0" rIns="0" bIns="0" rtlCol="0" anchor="ctr"/>
+          <a:lstStyle/>
+          <a:p>
+            <a:pPr indent="0" marL="0">
+              <a:buNone/>
+            </a:pPr>
+            <a:r>
+              <a:rPr lang="en-US" sz="1500" b="1" dirty="0">
                 <a:solidFill>
                   <a:srgbClr val="2563EB"/>
                 </a:solidFill>
@@ -7692,38 +8572,42 @@
                 <a:ea typeface="Malgun Gothic" pitchFamily="34" charset="-122"/>
                 <a:cs typeface="Malgun Gothic" pitchFamily="34" charset="-120"/>
               </a:rPr>
-              <a:t>🛠️ Dev</a:t>
-            </a:r>
-            <a:endParaRPr lang="en-US" sz="1400" dirty="0"/>
-          </a:p>
-        </p:txBody>
-      </p:sp>
-      <p:sp>
-        <p:nvSpPr>
-          <p:cNvPr id="8" name="Text 6"/>
-          <p:cNvSpPr/>
-          <p:nvPr/>
-        </p:nvSpPr>
-        <p:spPr>
-          <a:xfrm>
-            <a:off x="1051560" y="2907792"/>
-            <a:ext cx="3063240" cy="640080"/>
-          </a:xfrm>
-          <a:prstGeom prst="rect">
-            <a:avLst/>
-          </a:prstGeom>
-          <a:noFill/>
-          <a:ln/>
-        </p:spPr>
-        <p:txBody>
-          <a:bodyPr wrap="square" lIns="0" tIns="0" rIns="0" bIns="0" rtlCol="0" anchor="ctr"/>
-          <a:lstStyle/>
-          <a:p>
-            <a:pPr algn="ctr" indent="0" marL="0">
-              <a:buNone/>
-            </a:pPr>
-            <a:r>
-              <a:rPr lang="en-US" sz="1100" dirty="0">
+              <a:t>🔑  시크릿 격리</a:t>
+            </a:r>
+            <a:endParaRPr lang="en-US" sz="1500" dirty="0"/>
+          </a:p>
+        </p:txBody>
+      </p:sp>
+      <p:sp>
+        <p:nvSpPr>
+          <p:cNvPr id="9" name="Text 7"/>
+          <p:cNvSpPr/>
+          <p:nvPr/>
+        </p:nvSpPr>
+        <p:spPr>
+          <a:xfrm>
+            <a:off x="6629400" y="2423160"/>
+            <a:ext cx="4709160" cy="1143000"/>
+          </a:xfrm>
+          <a:prstGeom prst="rect">
+            <a:avLst/>
+          </a:prstGeom>
+          <a:noFill/>
+          <a:ln/>
+        </p:spPr>
+        <p:txBody>
+          <a:bodyPr wrap="square" lIns="0" tIns="0" rIns="0" bIns="0" rtlCol="0" anchor="ctr"/>
+          <a:lstStyle/>
+          <a:p>
+            <a:pPr marL="342900" indent="-342900">
+              <a:spcAft>
+                <a:spcPts val="800"/>
+              </a:spcAft>
+              <a:buSzPct val="100000"/>
+              <a:buChar char="•"/>
+            </a:pPr>
+            <a:r>
+              <a:rPr lang="en-US" sz="1250" dirty="0">
                 <a:solidFill>
                   <a:srgbClr val="241B3A"/>
                 </a:solidFill>
@@ -7731,16 +8615,20 @@
                 <a:ea typeface="Malgun Gothic" pitchFamily="34" charset="-122"/>
                 <a:cs typeface="Malgun Gothic" pitchFamily="34" charset="-120"/>
               </a:rPr>
-              <a:t>로컬 Supabase (CLI)</a:t>
-            </a:r>
-            <a:endParaRPr lang="en-US" sz="1100" dirty="0"/>
-          </a:p>
-          <a:p>
-            <a:pPr algn="ctr" indent="0" marL="0">
-              <a:buNone/>
-            </a:pPr>
-            <a:r>
-              <a:rPr lang="en-US" sz="1100" dirty="0">
+              <a:t>환경별 키 완전 분리 (재사용 금지)</a:t>
+            </a:r>
+            <a:endParaRPr lang="en-US" sz="1250" dirty="0"/>
+          </a:p>
+          <a:p>
+            <a:pPr marL="342900" indent="-342900">
+              <a:spcAft>
+                <a:spcPts val="800"/>
+              </a:spcAft>
+              <a:buSzPct val="100000"/>
+              <a:buChar char="•"/>
+            </a:pPr>
+            <a:r>
+              <a:rPr lang="en-US" sz="1250" dirty="0">
                 <a:solidFill>
                   <a:srgbClr val="241B3A"/>
                 </a:solidFill>
@@ -7748,30 +8636,224 @@
                 <a:ea typeface="Malgun Gothic" pitchFamily="34" charset="-122"/>
                 <a:cs typeface="Malgun Gothic" pitchFamily="34" charset="-120"/>
               </a:rPr>
-              <a:t>무료 · 무제한</a:t>
-            </a:r>
-            <a:endParaRPr lang="en-US" sz="1100" dirty="0"/>
-          </a:p>
-        </p:txBody>
-      </p:sp>
-      <p:sp>
-        <p:nvSpPr>
-          <p:cNvPr id="9" name="Shape 7"/>
-          <p:cNvSpPr/>
-          <p:nvPr/>
-        </p:nvSpPr>
-        <p:spPr>
-          <a:xfrm>
-            <a:off x="4379976" y="2377440"/>
-            <a:ext cx="3429000" cy="1234440"/>
+              <a:t>SUPABASE_SERVICE_ROLE_KEY · PI_API_KEY(testnet↔mainnet)</a:t>
+            </a:r>
+            <a:endParaRPr lang="en-US" sz="1250" dirty="0"/>
+          </a:p>
+          <a:p>
+            <a:pPr marL="342900" indent="-342900">
+              <a:spcAft>
+                <a:spcPts val="800"/>
+              </a:spcAft>
+              <a:buSzPct val="100000"/>
+              <a:buChar char="•"/>
+            </a:pPr>
+            <a:r>
+              <a:rPr lang="en-US" sz="1250" dirty="0">
+                <a:solidFill>
+                  <a:srgbClr val="241B3A"/>
+                </a:solidFill>
+                <a:latin typeface="Malgun Gothic" pitchFamily="34" charset="0"/>
+                <a:ea typeface="Malgun Gothic" pitchFamily="34" charset="-122"/>
+                <a:cs typeface="Malgun Gothic" pitchFamily="34" charset="-120"/>
+              </a:rPr>
+              <a:t>PI_SESSION_SECRET · AUTH_SECRET · CRON_SECRET</a:t>
+            </a:r>
+            <a:endParaRPr lang="en-US" sz="1250" dirty="0"/>
+          </a:p>
+        </p:txBody>
+      </p:sp>
+      <p:sp>
+        <p:nvSpPr>
+          <p:cNvPr id="10" name="Shape 8"/>
+          <p:cNvSpPr/>
+          <p:nvPr/>
+        </p:nvSpPr>
+        <p:spPr>
+          <a:xfrm>
+            <a:off x="548640" y="3977640"/>
+            <a:ext cx="11064240" cy="1920240"/>
           </a:xfrm>
           <a:prstGeom prst="roundRect">
             <a:avLst>
-              <a:gd name="adj" fmla="val 5926"/>
+              <a:gd name="adj" fmla="val 4762"/>
             </a:avLst>
           </a:prstGeom>
           <a:solidFill>
-            <a:srgbClr val="F7F5FB"/>
+            <a:srgbClr val="EEE9F8"/>
+          </a:solidFill>
+          <a:ln/>
+          <a:effectLst>
+            <a:outerShdw sx="100000" sy="100000" kx="0" ky="0" algn="bl" rotWithShape="0" blurRad="101600" dist="38100" dir="8100000">
+              <a:srgbClr val="1A1145">
+                <a:alpha val="16000"/>
+              </a:srgbClr>
+            </a:outerShdw>
+          </a:effectLst>
+        </p:spPr>
+      </p:sp>
+      <p:sp>
+        <p:nvSpPr>
+          <p:cNvPr id="11" name="Text 9"/>
+          <p:cNvSpPr/>
+          <p:nvPr/>
+        </p:nvSpPr>
+        <p:spPr>
+          <a:xfrm>
+            <a:off x="868680" y="4160520"/>
+            <a:ext cx="10058400" cy="365760"/>
+          </a:xfrm>
+          <a:prstGeom prst="rect">
+            <a:avLst/>
+          </a:prstGeom>
+          <a:noFill/>
+          <a:ln/>
+        </p:spPr>
+        <p:txBody>
+          <a:bodyPr wrap="square" lIns="0" tIns="0" rIns="0" bIns="0" rtlCol="0" anchor="ctr"/>
+          <a:lstStyle/>
+          <a:p>
+            <a:pPr indent="0" marL="0">
+              <a:buNone/>
+            </a:pPr>
+            <a:r>
+              <a:rPr lang="en-US" sz="1500" b="1" dirty="0">
+                <a:solidFill>
+                  <a:srgbClr val="241B3A"/>
+                </a:solidFill>
+                <a:latin typeface="Malgun Gothic" pitchFamily="34" charset="0"/>
+                <a:ea typeface="Malgun Gothic" pitchFamily="34" charset="-122"/>
+                <a:cs typeface="Malgun Gothic" pitchFamily="34" charset="-120"/>
+              </a:rPr>
+              <a:t>🧩  Vercel 환경 스코프 = 3분리</a:t>
+            </a:r>
+            <a:endParaRPr lang="en-US" sz="1500" dirty="0"/>
+          </a:p>
+        </p:txBody>
+      </p:sp>
+      <p:sp>
+        <p:nvSpPr>
+          <p:cNvPr id="12" name="Shape 10"/>
+          <p:cNvSpPr/>
+          <p:nvPr/>
+        </p:nvSpPr>
+        <p:spPr>
+          <a:xfrm>
+            <a:off x="868680" y="4709160"/>
+            <a:ext cx="3429000" cy="960120"/>
+          </a:xfrm>
+          <a:prstGeom prst="roundRect">
+            <a:avLst>
+              <a:gd name="adj" fmla="val 7619"/>
+            </a:avLst>
+          </a:prstGeom>
+          <a:solidFill>
+            <a:srgbClr val="FFFFFF"/>
+          </a:solidFill>
+          <a:ln w="15875">
+            <a:solidFill>
+              <a:srgbClr val="2563EB"/>
+            </a:solidFill>
+            <a:prstDash val="solid"/>
+          </a:ln>
+        </p:spPr>
+      </p:sp>
+      <p:sp>
+        <p:nvSpPr>
+          <p:cNvPr id="13" name="Text 11"/>
+          <p:cNvSpPr/>
+          <p:nvPr/>
+        </p:nvSpPr>
+        <p:spPr>
+          <a:xfrm>
+            <a:off x="868680" y="4818888"/>
+            <a:ext cx="3429000" cy="365760"/>
+          </a:xfrm>
+          <a:prstGeom prst="rect">
+            <a:avLst/>
+          </a:prstGeom>
+          <a:noFill/>
+          <a:ln/>
+        </p:spPr>
+        <p:txBody>
+          <a:bodyPr wrap="square" lIns="0" tIns="0" rIns="0" bIns="0" rtlCol="0" anchor="ctr"/>
+          <a:lstStyle/>
+          <a:p>
+            <a:pPr algn="ctr" indent="0" marL="0">
+              <a:buNone/>
+            </a:pPr>
+            <a:r>
+              <a:rPr lang="en-US" sz="1300" b="1" dirty="0">
+                <a:solidFill>
+                  <a:srgbClr val="2563EB"/>
+                </a:solidFill>
+                <a:latin typeface="Malgun Gothic" pitchFamily="34" charset="0"/>
+                <a:ea typeface="Malgun Gothic" pitchFamily="34" charset="-122"/>
+                <a:cs typeface="Malgun Gothic" pitchFamily="34" charset="-120"/>
+              </a:rPr>
+              <a:t>Development</a:t>
+            </a:r>
+            <a:endParaRPr lang="en-US" sz="1300" dirty="0"/>
+          </a:p>
+        </p:txBody>
+      </p:sp>
+      <p:sp>
+        <p:nvSpPr>
+          <p:cNvPr id="14" name="Text 12"/>
+          <p:cNvSpPr/>
+          <p:nvPr/>
+        </p:nvSpPr>
+        <p:spPr>
+          <a:xfrm>
+            <a:off x="1005840" y="5175504"/>
+            <a:ext cx="3154680" cy="411480"/>
+          </a:xfrm>
+          <a:prstGeom prst="rect">
+            <a:avLst/>
+          </a:prstGeom>
+          <a:noFill/>
+          <a:ln/>
+        </p:spPr>
+        <p:txBody>
+          <a:bodyPr wrap="square" lIns="0" tIns="0" rIns="0" bIns="0" rtlCol="0" anchor="ctr"/>
+          <a:lstStyle/>
+          <a:p>
+            <a:pPr algn="ctr" indent="0" marL="0">
+              <a:buNone/>
+            </a:pPr>
+            <a:r>
+              <a:rPr lang="en-US" sz="1050" dirty="0">
+                <a:solidFill>
+                  <a:srgbClr val="6B6485"/>
+                </a:solidFill>
+                <a:latin typeface="Malgun Gothic" pitchFamily="34" charset="0"/>
+                <a:ea typeface="Malgun Gothic" pitchFamily="34" charset="-122"/>
+                <a:cs typeface="Malgun Gothic" pitchFamily="34" charset="-120"/>
+              </a:rPr>
+              <a:t>로컬 Supabase · Testnet</a:t>
+            </a:r>
+            <a:endParaRPr lang="en-US" sz="1050" dirty="0"/>
+          </a:p>
+        </p:txBody>
+      </p:sp>
+      <p:sp>
+        <p:nvSpPr>
+          <p:cNvPr id="15" name="Shape 13"/>
+          <p:cNvSpPr/>
+          <p:nvPr/>
+        </p:nvSpPr>
+        <p:spPr>
+          <a:xfrm>
+            <a:off x="4379976" y="4709160"/>
+            <a:ext cx="3429000" cy="960120"/>
+          </a:xfrm>
+          <a:prstGeom prst="roundRect">
+            <a:avLst>
+              <a:gd name="adj" fmla="val 7619"/>
+            </a:avLst>
+          </a:prstGeom>
+          <a:solidFill>
+            <a:srgbClr val="FFFFFF"/>
           </a:solidFill>
           <a:ln w="15875">
             <a:solidFill>
@@ -7783,13 +8865,13 @@
       </p:sp>
       <p:sp>
         <p:nvSpPr>
-          <p:cNvPr id="10" name="Text 8"/>
-          <p:cNvSpPr/>
-          <p:nvPr/>
-        </p:nvSpPr>
-        <p:spPr>
-          <a:xfrm>
-            <a:off x="4379976" y="2514600"/>
+          <p:cNvPr id="16" name="Text 14"/>
+          <p:cNvSpPr/>
+          <p:nvPr/>
+        </p:nvSpPr>
+        <p:spPr>
+          <a:xfrm>
+            <a:off x="4379976" y="4818888"/>
             <a:ext cx="3429000" cy="365760"/>
           </a:xfrm>
           <a:prstGeom prst="rect">
@@ -7806,7 +8888,7 @@
               <a:buNone/>
             </a:pPr>
             <a:r>
-              <a:rPr lang="en-US" sz="1400" b="1" dirty="0">
+              <a:rPr lang="en-US" sz="1300" b="1" dirty="0">
                 <a:solidFill>
                   <a:srgbClr val="E8910C"/>
                 </a:solidFill>
@@ -7814,22 +8896,22 @@
                 <a:ea typeface="Malgun Gothic" pitchFamily="34" charset="-122"/>
                 <a:cs typeface="Malgun Gothic" pitchFamily="34" charset="-120"/>
               </a:rPr>
-              <a:t>🧪 Staging</a:t>
-            </a:r>
-            <a:endParaRPr lang="en-US" sz="1400" dirty="0"/>
-          </a:p>
-        </p:txBody>
-      </p:sp>
-      <p:sp>
-        <p:nvSpPr>
-          <p:cNvPr id="11" name="Text 9"/>
-          <p:cNvSpPr/>
-          <p:nvPr/>
-        </p:nvSpPr>
-        <p:spPr>
-          <a:xfrm>
-            <a:off x="4562856" y="2907792"/>
-            <a:ext cx="3063240" cy="640080"/>
+              <a:t>Preview</a:t>
+            </a:r>
+            <a:endParaRPr lang="en-US" sz="1300" dirty="0"/>
+          </a:p>
+        </p:txBody>
+      </p:sp>
+      <p:sp>
+        <p:nvSpPr>
+          <p:cNvPr id="17" name="Text 15"/>
+          <p:cNvSpPr/>
+          <p:nvPr/>
+        </p:nvSpPr>
+        <p:spPr>
+          <a:xfrm>
+            <a:off x="4517136" y="5175504"/>
+            <a:ext cx="3154680" cy="411480"/>
           </a:xfrm>
           <a:prstGeom prst="rect">
             <a:avLst/>
@@ -7845,55 +8927,38 @@
               <a:buNone/>
             </a:pPr>
             <a:r>
-              <a:rPr lang="en-US" sz="1100" dirty="0">
-                <a:solidFill>
-                  <a:srgbClr val="241B3A"/>
-                </a:solidFill>
-                <a:latin typeface="Malgun Gothic" pitchFamily="34" charset="0"/>
-                <a:ea typeface="Malgun Gothic" pitchFamily="34" charset="-122"/>
-                <a:cs typeface="Malgun Gothic" pitchFamily="34" charset="-120"/>
-              </a:rPr>
-              <a:t>클라우드 프로젝트 #1</a:t>
-            </a:r>
-            <a:endParaRPr lang="en-US" sz="1100" dirty="0"/>
-          </a:p>
-          <a:p>
-            <a:pPr algn="ctr" indent="0" marL="0">
-              <a:buNone/>
-            </a:pPr>
-            <a:r>
-              <a:rPr lang="en-US" sz="1100" dirty="0">
-                <a:solidFill>
-                  <a:srgbClr val="241B3A"/>
-                </a:solidFill>
-                <a:latin typeface="Malgun Gothic" pitchFamily="34" charset="0"/>
-                <a:ea typeface="Malgun Gothic" pitchFamily="34" charset="-122"/>
-                <a:cs typeface="Malgun Gothic" pitchFamily="34" charset="-120"/>
-              </a:rPr>
-              <a:t>무료 티어</a:t>
-            </a:r>
-            <a:endParaRPr lang="en-US" sz="1100" dirty="0"/>
-          </a:p>
-        </p:txBody>
-      </p:sp>
-      <p:sp>
-        <p:nvSpPr>
-          <p:cNvPr id="12" name="Shape 10"/>
-          <p:cNvSpPr/>
-          <p:nvPr/>
-        </p:nvSpPr>
-        <p:spPr>
-          <a:xfrm>
-            <a:off x="7891272" y="2377440"/>
-            <a:ext cx="3429000" cy="1234440"/>
+              <a:rPr lang="en-US" sz="1050" dirty="0">
+                <a:solidFill>
+                  <a:srgbClr val="6B6485"/>
+                </a:solidFill>
+                <a:latin typeface="Malgun Gothic" pitchFamily="34" charset="0"/>
+                <a:ea typeface="Malgun Gothic" pitchFamily="34" charset="-122"/>
+                <a:cs typeface="Malgun Gothic" pitchFamily="34" charset="-120"/>
+              </a:rPr>
+              <a:t>Staging DB · Testnet</a:t>
+            </a:r>
+            <a:endParaRPr lang="en-US" sz="1050" dirty="0"/>
+          </a:p>
+        </p:txBody>
+      </p:sp>
+      <p:sp>
+        <p:nvSpPr>
+          <p:cNvPr id="18" name="Shape 16"/>
+          <p:cNvSpPr/>
+          <p:nvPr/>
+        </p:nvSpPr>
+        <p:spPr>
+          <a:xfrm>
+            <a:off x="7891272" y="4709160"/>
+            <a:ext cx="3429000" cy="960120"/>
           </a:xfrm>
           <a:prstGeom prst="roundRect">
             <a:avLst>
-              <a:gd name="adj" fmla="val 5926"/>
+              <a:gd name="adj" fmla="val 7619"/>
             </a:avLst>
           </a:prstGeom>
           <a:solidFill>
-            <a:srgbClr val="F7F5FB"/>
+            <a:srgbClr val="FFFFFF"/>
           </a:solidFill>
           <a:ln w="15875">
             <a:solidFill>
@@ -7905,13 +8970,13 @@
       </p:sp>
       <p:sp>
         <p:nvSpPr>
-          <p:cNvPr id="13" name="Text 11"/>
-          <p:cNvSpPr/>
-          <p:nvPr/>
-        </p:nvSpPr>
-        <p:spPr>
-          <a:xfrm>
-            <a:off x="7891272" y="2514600"/>
+          <p:cNvPr id="19" name="Text 17"/>
+          <p:cNvSpPr/>
+          <p:nvPr/>
+        </p:nvSpPr>
+        <p:spPr>
+          <a:xfrm>
+            <a:off x="7891272" y="4818888"/>
             <a:ext cx="3429000" cy="365760"/>
           </a:xfrm>
           <a:prstGeom prst="rect">
@@ -7928,7 +8993,7 @@
               <a:buNone/>
             </a:pPr>
             <a:r>
-              <a:rPr lang="en-US" sz="1400" b="1" dirty="0">
+              <a:rPr lang="en-US" sz="1300" b="1" dirty="0">
                 <a:solidFill>
                   <a:srgbClr val="5B2A9D"/>
                 </a:solidFill>
@@ -7936,22 +9001,22 @@
                 <a:ea typeface="Malgun Gothic" pitchFamily="34" charset="-122"/>
                 <a:cs typeface="Malgun Gothic" pitchFamily="34" charset="-120"/>
               </a:rPr>
-              <a:t>🚀 Prod</a:t>
-            </a:r>
-            <a:endParaRPr lang="en-US" sz="1400" dirty="0"/>
-          </a:p>
-        </p:txBody>
-      </p:sp>
-      <p:sp>
-        <p:nvSpPr>
-          <p:cNvPr id="14" name="Text 12"/>
-          <p:cNvSpPr/>
-          <p:nvPr/>
-        </p:nvSpPr>
-        <p:spPr>
-          <a:xfrm>
-            <a:off x="8074152" y="2907792"/>
-            <a:ext cx="3063240" cy="640080"/>
+              <a:t>Production</a:t>
+            </a:r>
+            <a:endParaRPr lang="en-US" sz="1300" dirty="0"/>
+          </a:p>
+        </p:txBody>
+      </p:sp>
+      <p:sp>
+        <p:nvSpPr>
+          <p:cNvPr id="20" name="Text 18"/>
+          <p:cNvSpPr/>
+          <p:nvPr/>
+        </p:nvSpPr>
+        <p:spPr>
+          <a:xfrm>
+            <a:off x="8028432" y="5175504"/>
+            <a:ext cx="3154680" cy="411480"/>
           </a:xfrm>
           <a:prstGeom prst="rect">
             <a:avLst/>
@@ -7967,122 +9032,23 @@
               <a:buNone/>
             </a:pPr>
             <a:r>
-              <a:rPr lang="en-US" sz="1100" dirty="0">
-                <a:solidFill>
-                  <a:srgbClr val="241B3A"/>
-                </a:solidFill>
-                <a:latin typeface="Malgun Gothic" pitchFamily="34" charset="0"/>
-                <a:ea typeface="Malgun Gothic" pitchFamily="34" charset="-122"/>
-                <a:cs typeface="Malgun Gothic" pitchFamily="34" charset="-120"/>
-              </a:rPr>
-              <a:t>클라우드 프로젝트 #2</a:t>
-            </a:r>
-            <a:endParaRPr lang="en-US" sz="1100" dirty="0"/>
-          </a:p>
-          <a:p>
-            <a:pPr algn="ctr" indent="0" marL="0">
-              <a:buNone/>
-            </a:pPr>
-            <a:r>
-              <a:rPr lang="en-US" sz="1100" dirty="0">
-                <a:solidFill>
-                  <a:srgbClr val="241B3A"/>
-                </a:solidFill>
-                <a:latin typeface="Malgun Gothic" pitchFamily="34" charset="0"/>
-                <a:ea typeface="Malgun Gothic" pitchFamily="34" charset="-122"/>
-                <a:cs typeface="Malgun Gothic" pitchFamily="34" charset="-120"/>
-              </a:rPr>
-              <a:t>(현재 DB) 무료 티어</a:t>
-            </a:r>
-            <a:endParaRPr lang="en-US" sz="1100" dirty="0"/>
-          </a:p>
-        </p:txBody>
-      </p:sp>
-      <p:sp>
-        <p:nvSpPr>
-          <p:cNvPr id="15" name="Text 13"/>
-          <p:cNvSpPr/>
-          <p:nvPr/>
-        </p:nvSpPr>
-        <p:spPr>
-          <a:xfrm>
-            <a:off x="914400" y="4069080"/>
-            <a:ext cx="10607040" cy="1828800"/>
-          </a:xfrm>
-          <a:prstGeom prst="rect">
-            <a:avLst/>
-          </a:prstGeom>
-          <a:noFill/>
-          <a:ln/>
-        </p:spPr>
-        <p:txBody>
-          <a:bodyPr wrap="square" lIns="0" tIns="0" rIns="0" bIns="0" rtlCol="0" anchor="ctr"/>
-          <a:lstStyle/>
-          <a:p>
-            <a:pPr marL="342900" indent="-342900">
-              <a:spcAft>
-                <a:spcPts val="900"/>
-              </a:spcAft>
-              <a:buSzPct val="100000"/>
-              <a:buChar char="•"/>
-            </a:pPr>
-            <a:r>
-              <a:rPr lang="en-US" sz="1250" dirty="0">
-                <a:solidFill>
-                  <a:srgbClr val="241B3A"/>
-                </a:solidFill>
-                <a:latin typeface="Malgun Gothic" pitchFamily="34" charset="0"/>
-                <a:ea typeface="Malgun Gothic" pitchFamily="34" charset="-122"/>
-                <a:cs typeface="Malgun Gothic" pitchFamily="34" charset="-120"/>
-              </a:rPr>
-              <a:t>확장 옵션 (트래픽·팀 성장 시):  Supabase Pro($25/월) + Branching(Git연동 preview DB)로 스테이징 자동화</a:t>
-            </a:r>
-            <a:endParaRPr lang="en-US" sz="1250" dirty="0"/>
-          </a:p>
-          <a:p>
-            <a:pPr marL="342900" indent="-342900">
-              <a:spcAft>
-                <a:spcPts val="900"/>
-              </a:spcAft>
-              <a:buSzPct val="100000"/>
-              <a:buChar char="•"/>
-            </a:pPr>
-            <a:r>
-              <a:rPr lang="en-US" sz="1250" dirty="0">
-                <a:solidFill>
-                  <a:srgbClr val="241B3A"/>
-                </a:solidFill>
-                <a:latin typeface="Malgun Gothic" pitchFamily="34" charset="0"/>
-                <a:ea typeface="Malgun Gothic" pitchFamily="34" charset="-122"/>
-                <a:cs typeface="Malgun Gothic" pitchFamily="34" charset="-120"/>
-              </a:rPr>
-              <a:t>Vercel:  환경 스코프(Development/Preview/Production)는 이미 쓰는 Pro에 포함 — 추가 비용 0</a:t>
-            </a:r>
-            <a:endParaRPr lang="en-US" sz="1250" dirty="0"/>
-          </a:p>
-          <a:p>
-            <a:pPr marL="342900" indent="-342900">
-              <a:buSzPct val="100000"/>
-              <a:buChar char="•"/>
-            </a:pPr>
-            <a:r>
-              <a:rPr lang="en-US" sz="1250" dirty="0">
-                <a:solidFill>
-                  <a:srgbClr val="241B3A"/>
-                </a:solidFill>
-                <a:latin typeface="Malgun Gothic" pitchFamily="34" charset="0"/>
-                <a:ea typeface="Malgun Gothic" pitchFamily="34" charset="-122"/>
-                <a:cs typeface="Malgun Gothic" pitchFamily="34" charset="-120"/>
-              </a:rPr>
-              <a:t>주의:  무료 티어는 프로젝트 수·용량 제한이 바뀔 수 있으니 도입 직전 현행 한도 확인</a:t>
-            </a:r>
-            <a:endParaRPr lang="en-US" sz="1250" dirty="0"/>
-          </a:p>
-        </p:txBody>
-      </p:sp>
-      <p:sp>
-        <p:nvSpPr>
-          <p:cNvPr id="16" name="Text 14"/>
+              <a:rPr lang="en-US" sz="1050" dirty="0">
+                <a:solidFill>
+                  <a:srgbClr val="6B6485"/>
+                </a:solidFill>
+                <a:latin typeface="Malgun Gothic" pitchFamily="34" charset="0"/>
+                <a:ea typeface="Malgun Gothic" pitchFamily="34" charset="-122"/>
+                <a:cs typeface="Malgun Gothic" pitchFamily="34" charset="-120"/>
+              </a:rPr>
+              <a:t>Prod DB · Mainnet</a:t>
+            </a:r>
+            <a:endParaRPr lang="en-US" sz="1050" dirty="0"/>
+          </a:p>
+        </p:txBody>
+      </p:sp>
+      <p:sp>
+        <p:nvSpPr>
+          <p:cNvPr id="21" name="Text 19"/>
           <p:cNvSpPr/>
           <p:nvPr/>
         </p:nvSpPr>
@@ -8121,7 +9087,7 @@
       </p:sp>
       <p:sp>
         <p:nvSpPr>
-          <p:cNvPr id="17" name="Text 15"/>
+          <p:cNvPr id="22" name="Text 20"/>
           <p:cNvSpPr/>
           <p:nvPr/>
         </p:nvSpPr>
@@ -8223,7 +9189,7 @@
                 <a:ea typeface="Malgun Gothic" pitchFamily="34" charset="-122"/>
                 <a:cs typeface="Malgun Gothic" pitchFamily="34" charset="-120"/>
               </a:rPr>
-              <a:t>ROADMAP · 단계적 도입</a:t>
+              <a:t>COST · 현실적 도구</a:t>
             </a:r>
             <a:endParaRPr lang="en-US" sz="1200" dirty="0"/>
           </a:p>
@@ -8262,7 +9228,7 @@
                 <a:ea typeface="Malgun Gothic" pitchFamily="34" charset="-122"/>
                 <a:cs typeface="Malgun Gothic" pitchFamily="34" charset="-120"/>
               </a:rPr>
-              <a:t>단일 DB에서 3환경으로 — 점진 전환</a:t>
+              <a:t>무료 범위로 3환경 만들기</a:t>
             </a:r>
             <a:endParaRPr lang="en-US" sz="2600" dirty="0"/>
           </a:p>
@@ -8276,590 +9242,18 @@
         </p:nvSpPr>
         <p:spPr>
           <a:xfrm>
-            <a:off x="640080" y="1691640"/>
-            <a:ext cx="566928" cy="566928"/>
-          </a:xfrm>
-          <a:prstGeom prst="ellipse">
-            <a:avLst/>
-          </a:prstGeom>
-          <a:solidFill>
-            <a:srgbClr val="5B2A9D"/>
-          </a:solidFill>
-          <a:ln/>
-        </p:spPr>
-      </p:sp>
-      <p:sp>
-        <p:nvSpPr>
-          <p:cNvPr id="5" name="Text 3"/>
-          <p:cNvSpPr/>
-          <p:nvPr/>
-        </p:nvSpPr>
-        <p:spPr>
-          <a:xfrm>
-            <a:off x="640080" y="1673352"/>
-            <a:ext cx="566928" cy="566928"/>
-          </a:xfrm>
-          <a:prstGeom prst="rect">
-            <a:avLst/>
-          </a:prstGeom>
-          <a:noFill/>
-          <a:ln/>
-        </p:spPr>
-        <p:txBody>
-          <a:bodyPr wrap="square" lIns="0" tIns="0" rIns="0" bIns="0" rtlCol="0" anchor="ctr"/>
-          <a:lstStyle/>
-          <a:p>
-            <a:pPr algn="ctr" indent="0" marL="0">
-              <a:buNone/>
-            </a:pPr>
-            <a:r>
-              <a:rPr lang="en-US" sz="1800" b="1" dirty="0">
-                <a:solidFill>
-                  <a:srgbClr val="FFFFFF"/>
-                </a:solidFill>
-                <a:latin typeface="Malgun Gothic" pitchFamily="34" charset="0"/>
-                <a:ea typeface="Malgun Gothic" pitchFamily="34" charset="-122"/>
-                <a:cs typeface="Malgun Gothic" pitchFamily="34" charset="-120"/>
-              </a:rPr>
-              <a:t>1</a:t>
-            </a:r>
-            <a:endParaRPr lang="en-US" sz="1800" dirty="0"/>
-          </a:p>
-        </p:txBody>
-      </p:sp>
-      <p:sp>
-        <p:nvSpPr>
-          <p:cNvPr id="6" name="Shape 4"/>
-          <p:cNvSpPr/>
-          <p:nvPr/>
-        </p:nvSpPr>
-        <p:spPr>
-          <a:xfrm>
-            <a:off x="1417320" y="1645920"/>
-            <a:ext cx="10195560" cy="658368"/>
+            <a:off x="548640" y="1691640"/>
+            <a:ext cx="11064240" cy="2103120"/>
           </a:xfrm>
           <a:prstGeom prst="roundRect">
             <a:avLst>
-              <a:gd name="adj" fmla="val 9722"/>
+              <a:gd name="adj" fmla="val 4348"/>
             </a:avLst>
           </a:prstGeom>
           <a:solidFill>
             <a:srgbClr val="FFFFFF"/>
           </a:solidFill>
-          <a:ln w="12700">
-            <a:solidFill>
-              <a:srgbClr val="5B2A9D"/>
-            </a:solidFill>
-            <a:prstDash val="solid"/>
-          </a:ln>
-          <a:effectLst>
-            <a:outerShdw sx="100000" sy="100000" kx="0" ky="0" algn="bl" rotWithShape="0" blurRad="101600" dist="38100" dir="8100000">
-              <a:srgbClr val="1A1145">
-                <a:alpha val="16000"/>
-              </a:srgbClr>
-            </a:outerShdw>
-          </a:effectLst>
-        </p:spPr>
-      </p:sp>
-      <p:sp>
-        <p:nvSpPr>
-          <p:cNvPr id="7" name="Text 5"/>
-          <p:cNvSpPr/>
-          <p:nvPr/>
-        </p:nvSpPr>
-        <p:spPr>
-          <a:xfrm>
-            <a:off x="1645920" y="1645920"/>
-            <a:ext cx="2286000" cy="658368"/>
-          </a:xfrm>
-          <a:prstGeom prst="rect">
-            <a:avLst/>
-          </a:prstGeom>
-          <a:noFill/>
-          <a:ln/>
-        </p:spPr>
-        <p:txBody>
-          <a:bodyPr wrap="square" lIns="0" tIns="0" rIns="0" bIns="0" rtlCol="0" anchor="ctr"/>
-          <a:lstStyle/>
-          <a:p>
-            <a:pPr indent="0" marL="0">
-              <a:buNone/>
-            </a:pPr>
-            <a:r>
-              <a:rPr lang="en-US" sz="1400" b="1" dirty="0">
-                <a:solidFill>
-                  <a:srgbClr val="5B2A9D"/>
-                </a:solidFill>
-                <a:latin typeface="Malgun Gothic" pitchFamily="34" charset="0"/>
-                <a:ea typeface="Malgun Gothic" pitchFamily="34" charset="-122"/>
-                <a:cs typeface="Malgun Gothic" pitchFamily="34" charset="-120"/>
-              </a:rPr>
-              <a:t>운영 동결</a:t>
-            </a:r>
-            <a:endParaRPr lang="en-US" sz="1400" dirty="0"/>
-          </a:p>
-        </p:txBody>
-      </p:sp>
-      <p:sp>
-        <p:nvSpPr>
-          <p:cNvPr id="8" name="Text 6"/>
-          <p:cNvSpPr/>
-          <p:nvPr/>
-        </p:nvSpPr>
-        <p:spPr>
-          <a:xfrm>
-            <a:off x="3931920" y="1645920"/>
-            <a:ext cx="7498080" cy="658368"/>
-          </a:xfrm>
-          <a:prstGeom prst="rect">
-            <a:avLst/>
-          </a:prstGeom>
-          <a:noFill/>
-          <a:ln/>
-        </p:spPr>
-        <p:txBody>
-          <a:bodyPr wrap="square" lIns="0" tIns="0" rIns="0" bIns="0" rtlCol="0" anchor="ctr"/>
-          <a:lstStyle/>
-          <a:p>
-            <a:pPr indent="0" marL="0">
-              <a:buNone/>
-            </a:pPr>
-            <a:r>
-              <a:rPr lang="en-US" sz="1150" dirty="0">
-                <a:solidFill>
-                  <a:srgbClr val="241B3A"/>
-                </a:solidFill>
-                <a:latin typeface="Malgun Gothic" pitchFamily="34" charset="0"/>
-                <a:ea typeface="Malgun Gothic" pitchFamily="34" charset="-122"/>
-                <a:cs typeface="Malgun Gothic" pitchFamily="34" charset="-120"/>
-              </a:rPr>
-              <a:t>현재 단일 DB를 ‘운영(Prod)’으로 확정 · 직접 실험 금지</a:t>
-            </a:r>
-            <a:endParaRPr lang="en-US" sz="1150" dirty="0"/>
-          </a:p>
-        </p:txBody>
-      </p:sp>
-      <p:sp>
-        <p:nvSpPr>
-          <p:cNvPr id="9" name="Shape 7"/>
-          <p:cNvSpPr/>
-          <p:nvPr/>
-        </p:nvSpPr>
-        <p:spPr>
-          <a:xfrm>
-            <a:off x="640080" y="2441448"/>
-            <a:ext cx="566928" cy="566928"/>
-          </a:xfrm>
-          <a:prstGeom prst="ellipse">
-            <a:avLst/>
-          </a:prstGeom>
-          <a:solidFill>
-            <a:srgbClr val="E8910C"/>
-          </a:solidFill>
-          <a:ln/>
-        </p:spPr>
-      </p:sp>
-      <p:sp>
-        <p:nvSpPr>
-          <p:cNvPr id="10" name="Text 8"/>
-          <p:cNvSpPr/>
-          <p:nvPr/>
-        </p:nvSpPr>
-        <p:spPr>
-          <a:xfrm>
-            <a:off x="640080" y="2423160"/>
-            <a:ext cx="566928" cy="566928"/>
-          </a:xfrm>
-          <a:prstGeom prst="rect">
-            <a:avLst/>
-          </a:prstGeom>
-          <a:noFill/>
-          <a:ln/>
-        </p:spPr>
-        <p:txBody>
-          <a:bodyPr wrap="square" lIns="0" tIns="0" rIns="0" bIns="0" rtlCol="0" anchor="ctr"/>
-          <a:lstStyle/>
-          <a:p>
-            <a:pPr algn="ctr" indent="0" marL="0">
-              <a:buNone/>
-            </a:pPr>
-            <a:r>
-              <a:rPr lang="en-US" sz="1800" b="1" dirty="0">
-                <a:solidFill>
-                  <a:srgbClr val="FFFFFF"/>
-                </a:solidFill>
-                <a:latin typeface="Malgun Gothic" pitchFamily="34" charset="0"/>
-                <a:ea typeface="Malgun Gothic" pitchFamily="34" charset="-122"/>
-                <a:cs typeface="Malgun Gothic" pitchFamily="34" charset="-120"/>
-              </a:rPr>
-              <a:t>2</a:t>
-            </a:r>
-            <a:endParaRPr lang="en-US" sz="1800" dirty="0"/>
-          </a:p>
-        </p:txBody>
-      </p:sp>
-      <p:sp>
-        <p:nvSpPr>
-          <p:cNvPr id="11" name="Shape 9"/>
-          <p:cNvSpPr/>
-          <p:nvPr/>
-        </p:nvSpPr>
-        <p:spPr>
-          <a:xfrm>
-            <a:off x="1417320" y="2395728"/>
-            <a:ext cx="10195560" cy="658368"/>
-          </a:xfrm>
-          <a:prstGeom prst="roundRect">
-            <a:avLst>
-              <a:gd name="adj" fmla="val 9722"/>
-            </a:avLst>
-          </a:prstGeom>
-          <a:solidFill>
-            <a:srgbClr val="FFFFFF"/>
-          </a:solidFill>
-          <a:ln w="12700">
-            <a:solidFill>
-              <a:srgbClr val="E8910C"/>
-            </a:solidFill>
-            <a:prstDash val="solid"/>
-          </a:ln>
-          <a:effectLst>
-            <a:outerShdw sx="100000" sy="100000" kx="0" ky="0" algn="bl" rotWithShape="0" blurRad="101600" dist="38100" dir="8100000">
-              <a:srgbClr val="1A1145">
-                <a:alpha val="16000"/>
-              </a:srgbClr>
-            </a:outerShdw>
-          </a:effectLst>
-        </p:spPr>
-      </p:sp>
-      <p:sp>
-        <p:nvSpPr>
-          <p:cNvPr id="12" name="Text 10"/>
-          <p:cNvSpPr/>
-          <p:nvPr/>
-        </p:nvSpPr>
-        <p:spPr>
-          <a:xfrm>
-            <a:off x="1645920" y="2395728"/>
-            <a:ext cx="2286000" cy="658368"/>
-          </a:xfrm>
-          <a:prstGeom prst="rect">
-            <a:avLst/>
-          </a:prstGeom>
-          <a:noFill/>
-          <a:ln/>
-        </p:spPr>
-        <p:txBody>
-          <a:bodyPr wrap="square" lIns="0" tIns="0" rIns="0" bIns="0" rtlCol="0" anchor="ctr"/>
-          <a:lstStyle/>
-          <a:p>
-            <a:pPr indent="0" marL="0">
-              <a:buNone/>
-            </a:pPr>
-            <a:r>
-              <a:rPr lang="en-US" sz="1400" b="1" dirty="0">
-                <a:solidFill>
-                  <a:srgbClr val="E8910C"/>
-                </a:solidFill>
-                <a:latin typeface="Malgun Gothic" pitchFamily="34" charset="0"/>
-                <a:ea typeface="Malgun Gothic" pitchFamily="34" charset="-122"/>
-                <a:cs typeface="Malgun Gothic" pitchFamily="34" charset="-120"/>
-              </a:rPr>
-              <a:t>Staging 신설</a:t>
-            </a:r>
-            <a:endParaRPr lang="en-US" sz="1400" dirty="0"/>
-          </a:p>
-        </p:txBody>
-      </p:sp>
-      <p:sp>
-        <p:nvSpPr>
-          <p:cNvPr id="13" name="Text 11"/>
-          <p:cNvSpPr/>
-          <p:nvPr/>
-        </p:nvSpPr>
-        <p:spPr>
-          <a:xfrm>
-            <a:off x="3931920" y="2395728"/>
-            <a:ext cx="7498080" cy="658368"/>
-          </a:xfrm>
-          <a:prstGeom prst="rect">
-            <a:avLst/>
-          </a:prstGeom>
-          <a:noFill/>
-          <a:ln/>
-        </p:spPr>
-        <p:txBody>
-          <a:bodyPr wrap="square" lIns="0" tIns="0" rIns="0" bIns="0" rtlCol="0" anchor="ctr"/>
-          <a:lstStyle/>
-          <a:p>
-            <a:pPr indent="0" marL="0">
-              <a:buNone/>
-            </a:pPr>
-            <a:r>
-              <a:rPr lang="en-US" sz="1150" dirty="0">
-                <a:solidFill>
-                  <a:srgbClr val="241B3A"/>
-                </a:solidFill>
-                <a:latin typeface="Malgun Gothic" pitchFamily="34" charset="0"/>
-                <a:ea typeface="Malgun Gothic" pitchFamily="34" charset="-122"/>
-                <a:cs typeface="Malgun Gothic" pitchFamily="34" charset="-120"/>
-              </a:rPr>
-              <a:t>Supabase Staging 프로젝트 + sql/NNN 재생으로 스키마 복제 + 합성 데이터</a:t>
-            </a:r>
-            <a:endParaRPr lang="en-US" sz="1150" dirty="0"/>
-          </a:p>
-        </p:txBody>
-      </p:sp>
-      <p:sp>
-        <p:nvSpPr>
-          <p:cNvPr id="14" name="Shape 12"/>
-          <p:cNvSpPr/>
-          <p:nvPr/>
-        </p:nvSpPr>
-        <p:spPr>
-          <a:xfrm>
-            <a:off x="640080" y="3191256"/>
-            <a:ext cx="566928" cy="566928"/>
-          </a:xfrm>
-          <a:prstGeom prst="ellipse">
-            <a:avLst/>
-          </a:prstGeom>
-          <a:solidFill>
-            <a:srgbClr val="2563EB"/>
-          </a:solidFill>
-          <a:ln/>
-        </p:spPr>
-      </p:sp>
-      <p:sp>
-        <p:nvSpPr>
-          <p:cNvPr id="15" name="Text 13"/>
-          <p:cNvSpPr/>
-          <p:nvPr/>
-        </p:nvSpPr>
-        <p:spPr>
-          <a:xfrm>
-            <a:off x="640080" y="3172968"/>
-            <a:ext cx="566928" cy="566928"/>
-          </a:xfrm>
-          <a:prstGeom prst="rect">
-            <a:avLst/>
-          </a:prstGeom>
-          <a:noFill/>
-          <a:ln/>
-        </p:spPr>
-        <p:txBody>
-          <a:bodyPr wrap="square" lIns="0" tIns="0" rIns="0" bIns="0" rtlCol="0" anchor="ctr"/>
-          <a:lstStyle/>
-          <a:p>
-            <a:pPr algn="ctr" indent="0" marL="0">
-              <a:buNone/>
-            </a:pPr>
-            <a:r>
-              <a:rPr lang="en-US" sz="1800" b="1" dirty="0">
-                <a:solidFill>
-                  <a:srgbClr val="FFFFFF"/>
-                </a:solidFill>
-                <a:latin typeface="Malgun Gothic" pitchFamily="34" charset="0"/>
-                <a:ea typeface="Malgun Gothic" pitchFamily="34" charset="-122"/>
-                <a:cs typeface="Malgun Gothic" pitchFamily="34" charset="-120"/>
-              </a:rPr>
-              <a:t>3</a:t>
-            </a:r>
-            <a:endParaRPr lang="en-US" sz="1800" dirty="0"/>
-          </a:p>
-        </p:txBody>
-      </p:sp>
-      <p:sp>
-        <p:nvSpPr>
-          <p:cNvPr id="16" name="Shape 14"/>
-          <p:cNvSpPr/>
-          <p:nvPr/>
-        </p:nvSpPr>
-        <p:spPr>
-          <a:xfrm>
-            <a:off x="1417320" y="3145536"/>
-            <a:ext cx="10195560" cy="658368"/>
-          </a:xfrm>
-          <a:prstGeom prst="roundRect">
-            <a:avLst>
-              <a:gd name="adj" fmla="val 9722"/>
-            </a:avLst>
-          </a:prstGeom>
-          <a:solidFill>
-            <a:srgbClr val="FFFFFF"/>
-          </a:solidFill>
-          <a:ln w="12700">
-            <a:solidFill>
-              <a:srgbClr val="2563EB"/>
-            </a:solidFill>
-            <a:prstDash val="solid"/>
-          </a:ln>
-          <a:effectLst>
-            <a:outerShdw sx="100000" sy="100000" kx="0" ky="0" algn="bl" rotWithShape="0" blurRad="101600" dist="38100" dir="8100000">
-              <a:srgbClr val="1A1145">
-                <a:alpha val="16000"/>
-              </a:srgbClr>
-            </a:outerShdw>
-          </a:effectLst>
-        </p:spPr>
-      </p:sp>
-      <p:sp>
-        <p:nvSpPr>
-          <p:cNvPr id="17" name="Text 15"/>
-          <p:cNvSpPr/>
-          <p:nvPr/>
-        </p:nvSpPr>
-        <p:spPr>
-          <a:xfrm>
-            <a:off x="1645920" y="3145536"/>
-            <a:ext cx="2286000" cy="658368"/>
-          </a:xfrm>
-          <a:prstGeom prst="rect">
-            <a:avLst/>
-          </a:prstGeom>
-          <a:noFill/>
-          <a:ln/>
-        </p:spPr>
-        <p:txBody>
-          <a:bodyPr wrap="square" lIns="0" tIns="0" rIns="0" bIns="0" rtlCol="0" anchor="ctr"/>
-          <a:lstStyle/>
-          <a:p>
-            <a:pPr indent="0" marL="0">
-              <a:buNone/>
-            </a:pPr>
-            <a:r>
-              <a:rPr lang="en-US" sz="1400" b="1" dirty="0">
-                <a:solidFill>
-                  <a:srgbClr val="2563EB"/>
-                </a:solidFill>
-                <a:latin typeface="Malgun Gothic" pitchFamily="34" charset="0"/>
-                <a:ea typeface="Malgun Gothic" pitchFamily="34" charset="-122"/>
-                <a:cs typeface="Malgun Gothic" pitchFamily="34" charset="-120"/>
-              </a:rPr>
-              <a:t>Dev 구성</a:t>
-            </a:r>
-            <a:endParaRPr lang="en-US" sz="1400" dirty="0"/>
-          </a:p>
-        </p:txBody>
-      </p:sp>
-      <p:sp>
-        <p:nvSpPr>
-          <p:cNvPr id="18" name="Text 16"/>
-          <p:cNvSpPr/>
-          <p:nvPr/>
-        </p:nvSpPr>
-        <p:spPr>
-          <a:xfrm>
-            <a:off x="3931920" y="3145536"/>
-            <a:ext cx="7498080" cy="658368"/>
-          </a:xfrm>
-          <a:prstGeom prst="rect">
-            <a:avLst/>
-          </a:prstGeom>
-          <a:noFill/>
-          <a:ln/>
-        </p:spPr>
-        <p:txBody>
-          <a:bodyPr wrap="square" lIns="0" tIns="0" rIns="0" bIns="0" rtlCol="0" anchor="ctr"/>
-          <a:lstStyle/>
-          <a:p>
-            <a:pPr indent="0" marL="0">
-              <a:buNone/>
-            </a:pPr>
-            <a:r>
-              <a:rPr lang="en-US" sz="1150" dirty="0">
-                <a:solidFill>
-                  <a:srgbClr val="241B3A"/>
-                </a:solidFill>
-                <a:latin typeface="Malgun Gothic" pitchFamily="34" charset="0"/>
-                <a:ea typeface="Malgun Gothic" pitchFamily="34" charset="-122"/>
-                <a:cs typeface="Malgun Gothic" pitchFamily="34" charset="-120"/>
-              </a:rPr>
-              <a:t>로컬 Supabase(CLI)로 개발 DB 분리</a:t>
-            </a:r>
-            <a:endParaRPr lang="en-US" sz="1150" dirty="0"/>
-          </a:p>
-        </p:txBody>
-      </p:sp>
-      <p:sp>
-        <p:nvSpPr>
-          <p:cNvPr id="19" name="Shape 17"/>
-          <p:cNvSpPr/>
-          <p:nvPr/>
-        </p:nvSpPr>
-        <p:spPr>
-          <a:xfrm>
-            <a:off x="640080" y="3941064"/>
-            <a:ext cx="566928" cy="566928"/>
-          </a:xfrm>
-          <a:prstGeom prst="ellipse">
-            <a:avLst/>
-          </a:prstGeom>
-          <a:solidFill>
-            <a:srgbClr val="16A34A"/>
-          </a:solidFill>
-          <a:ln/>
-        </p:spPr>
-      </p:sp>
-      <p:sp>
-        <p:nvSpPr>
-          <p:cNvPr id="20" name="Text 18"/>
-          <p:cNvSpPr/>
-          <p:nvPr/>
-        </p:nvSpPr>
-        <p:spPr>
-          <a:xfrm>
-            <a:off x="640080" y="3922776"/>
-            <a:ext cx="566928" cy="566928"/>
-          </a:xfrm>
-          <a:prstGeom prst="rect">
-            <a:avLst/>
-          </a:prstGeom>
-          <a:noFill/>
-          <a:ln/>
-        </p:spPr>
-        <p:txBody>
-          <a:bodyPr wrap="square" lIns="0" tIns="0" rIns="0" bIns="0" rtlCol="0" anchor="ctr"/>
-          <a:lstStyle/>
-          <a:p>
-            <a:pPr algn="ctr" indent="0" marL="0">
-              <a:buNone/>
-            </a:pPr>
-            <a:r>
-              <a:rPr lang="en-US" sz="1800" b="1" dirty="0">
-                <a:solidFill>
-                  <a:srgbClr val="FFFFFF"/>
-                </a:solidFill>
-                <a:latin typeface="Malgun Gothic" pitchFamily="34" charset="0"/>
-                <a:ea typeface="Malgun Gothic" pitchFamily="34" charset="-122"/>
-                <a:cs typeface="Malgun Gothic" pitchFamily="34" charset="-120"/>
-              </a:rPr>
-              <a:t>4</a:t>
-            </a:r>
-            <a:endParaRPr lang="en-US" sz="1800" dirty="0"/>
-          </a:p>
-        </p:txBody>
-      </p:sp>
-      <p:sp>
-        <p:nvSpPr>
-          <p:cNvPr id="21" name="Shape 19"/>
-          <p:cNvSpPr/>
-          <p:nvPr/>
-        </p:nvSpPr>
-        <p:spPr>
-          <a:xfrm>
-            <a:off x="1417320" y="3895344"/>
-            <a:ext cx="10195560" cy="658368"/>
-          </a:xfrm>
-          <a:prstGeom prst="roundRect">
-            <a:avLst>
-              <a:gd name="adj" fmla="val 9722"/>
-            </a:avLst>
-          </a:prstGeom>
-          <a:solidFill>
-            <a:srgbClr val="FFFFFF"/>
-          </a:solidFill>
-          <a:ln w="12700">
+          <a:ln w="15875">
             <a:solidFill>
               <a:srgbClr val="16A34A"/>
             </a:solidFill>
@@ -8876,14 +9270,14 @@
       </p:sp>
       <p:sp>
         <p:nvSpPr>
-          <p:cNvPr id="22" name="Text 20"/>
-          <p:cNvSpPr/>
-          <p:nvPr/>
-        </p:nvSpPr>
-        <p:spPr>
-          <a:xfrm>
-            <a:off x="1645920" y="3895344"/>
-            <a:ext cx="2286000" cy="658368"/>
+          <p:cNvPr id="5" name="Text 3"/>
+          <p:cNvSpPr/>
+          <p:nvPr/>
+        </p:nvSpPr>
+        <p:spPr>
+          <a:xfrm>
+            <a:off x="868680" y="1874520"/>
+            <a:ext cx="10424160" cy="365760"/>
           </a:xfrm>
           <a:prstGeom prst="rect">
             <a:avLst/>
@@ -8899,46 +9293,7 @@
               <a:buNone/>
             </a:pPr>
             <a:r>
-              <a:rPr lang="en-US" sz="1400" b="1" dirty="0">
-                <a:solidFill>
-                  <a:srgbClr val="16A34A"/>
-                </a:solidFill>
-                <a:latin typeface="Malgun Gothic" pitchFamily="34" charset="0"/>
-                <a:ea typeface="Malgun Gothic" pitchFamily="34" charset="-122"/>
-                <a:cs typeface="Malgun Gothic" pitchFamily="34" charset="-120"/>
-              </a:rPr>
-              <a:t>스코프 분리</a:t>
-            </a:r>
-            <a:endParaRPr lang="en-US" sz="1400" dirty="0"/>
-          </a:p>
-        </p:txBody>
-      </p:sp>
-      <p:sp>
-        <p:nvSpPr>
-          <p:cNvPr id="23" name="Text 21"/>
-          <p:cNvSpPr/>
-          <p:nvPr/>
-        </p:nvSpPr>
-        <p:spPr>
-          <a:xfrm>
-            <a:off x="3931920" y="3895344"/>
-            <a:ext cx="7498080" cy="658368"/>
-          </a:xfrm>
-          <a:prstGeom prst="rect">
-            <a:avLst/>
-          </a:prstGeom>
-          <a:noFill/>
-          <a:ln/>
-        </p:spPr>
-        <p:txBody>
-          <a:bodyPr wrap="square" lIns="0" tIns="0" rIns="0" bIns="0" rtlCol="0" anchor="ctr"/>
-          <a:lstStyle/>
-          <a:p>
-            <a:pPr indent="0" marL="0">
-              <a:buNone/>
-            </a:pPr>
-            <a:r>
-              <a:rPr lang="en-US" sz="1150" dirty="0">
+              <a:rPr lang="en-US" sz="1450" b="1" dirty="0">
                 <a:solidFill>
                   <a:srgbClr val="241B3A"/>
                 </a:solidFill>
@@ -8946,139 +9301,73 @@
                 <a:ea typeface="Malgun Gothic" pitchFamily="34" charset="-122"/>
                 <a:cs typeface="Malgun Gothic" pitchFamily="34" charset="-120"/>
               </a:rPr>
-              <a:t>Vercel env 3분리 — 각자 자기 DB·Pi 설정 가리키게</a:t>
-            </a:r>
-            <a:endParaRPr lang="en-US" sz="1150" dirty="0"/>
-          </a:p>
-        </p:txBody>
-      </p:sp>
-      <p:sp>
-        <p:nvSpPr>
-          <p:cNvPr id="24" name="Shape 22"/>
-          <p:cNvSpPr/>
-          <p:nvPr/>
-        </p:nvSpPr>
-        <p:spPr>
-          <a:xfrm>
-            <a:off x="640080" y="4690872"/>
-            <a:ext cx="566928" cy="566928"/>
-          </a:xfrm>
-          <a:prstGeom prst="ellipse">
-            <a:avLst/>
-          </a:prstGeom>
-          <a:solidFill>
-            <a:srgbClr val="2A1A66"/>
-          </a:solidFill>
-          <a:ln/>
-        </p:spPr>
-      </p:sp>
-      <p:sp>
-        <p:nvSpPr>
-          <p:cNvPr id="25" name="Text 23"/>
-          <p:cNvSpPr/>
-          <p:nvPr/>
-        </p:nvSpPr>
-        <p:spPr>
-          <a:xfrm>
-            <a:off x="640080" y="4672584"/>
-            <a:ext cx="566928" cy="566928"/>
-          </a:xfrm>
-          <a:prstGeom prst="rect">
-            <a:avLst/>
-          </a:prstGeom>
-          <a:noFill/>
-          <a:ln/>
-        </p:spPr>
-        <p:txBody>
-          <a:bodyPr wrap="square" lIns="0" tIns="0" rIns="0" bIns="0" rtlCol="0" anchor="ctr"/>
-          <a:lstStyle/>
-          <a:p>
-            <a:pPr algn="ctr" indent="0" marL="0">
-              <a:buNone/>
-            </a:pPr>
-            <a:r>
-              <a:rPr lang="en-US" sz="1800" b="1" dirty="0">
-                <a:solidFill>
-                  <a:srgbClr val="FFFFFF"/>
-                </a:solidFill>
-                <a:latin typeface="Malgun Gothic" pitchFamily="34" charset="0"/>
-                <a:ea typeface="Malgun Gothic" pitchFamily="34" charset="-122"/>
-                <a:cs typeface="Malgun Gothic" pitchFamily="34" charset="-120"/>
-              </a:rPr>
-              <a:t>5</a:t>
-            </a:r>
-            <a:endParaRPr lang="en-US" sz="1800" dirty="0"/>
-          </a:p>
-        </p:txBody>
-      </p:sp>
-      <p:sp>
-        <p:nvSpPr>
-          <p:cNvPr id="26" name="Shape 24"/>
-          <p:cNvSpPr/>
-          <p:nvPr/>
-        </p:nvSpPr>
-        <p:spPr>
-          <a:xfrm>
-            <a:off x="1417320" y="4645152"/>
-            <a:ext cx="10195560" cy="658368"/>
+              <a:t>💡  Supabase 무료 플랜 = 활성 프로젝트 보통 2개 → 이렇게 배치하면 무료로 3환경</a:t>
+            </a:r>
+            <a:endParaRPr lang="en-US" sz="1450" dirty="0"/>
+          </a:p>
+        </p:txBody>
+      </p:sp>
+      <p:sp>
+        <p:nvSpPr>
+          <p:cNvPr id="6" name="Shape 4"/>
+          <p:cNvSpPr/>
+          <p:nvPr/>
+        </p:nvSpPr>
+        <p:spPr>
+          <a:xfrm>
+            <a:off x="868680" y="2377440"/>
+            <a:ext cx="3429000" cy="1234440"/>
           </a:xfrm>
           <a:prstGeom prst="roundRect">
             <a:avLst>
-              <a:gd name="adj" fmla="val 9722"/>
+              <a:gd name="adj" fmla="val 5926"/>
             </a:avLst>
           </a:prstGeom>
           <a:solidFill>
-            <a:srgbClr val="FFFFFF"/>
+            <a:srgbClr val="F7F5FB"/>
           </a:solidFill>
-          <a:ln w="12700">
+          <a:ln w="15875">
             <a:solidFill>
-              <a:srgbClr val="2A1A66"/>
+              <a:srgbClr val="2563EB"/>
             </a:solidFill>
             <a:prstDash val="solid"/>
           </a:ln>
-          <a:effectLst>
-            <a:outerShdw sx="100000" sy="100000" kx="0" ky="0" algn="bl" rotWithShape="0" blurRad="101600" dist="38100" dir="8100000">
-              <a:srgbClr val="1A1145">
-                <a:alpha val="16000"/>
-              </a:srgbClr>
-            </a:outerShdw>
-          </a:effectLst>
-        </p:spPr>
-      </p:sp>
-      <p:sp>
-        <p:nvSpPr>
-          <p:cNvPr id="27" name="Text 25"/>
-          <p:cNvSpPr/>
-          <p:nvPr/>
-        </p:nvSpPr>
-        <p:spPr>
-          <a:xfrm>
-            <a:off x="1645920" y="4645152"/>
-            <a:ext cx="2286000" cy="658368"/>
-          </a:xfrm>
-          <a:prstGeom prst="rect">
-            <a:avLst/>
-          </a:prstGeom>
-          <a:noFill/>
-          <a:ln/>
-        </p:spPr>
-        <p:txBody>
-          <a:bodyPr wrap="square" lIns="0" tIns="0" rIns="0" bIns="0" rtlCol="0" anchor="ctr"/>
-          <a:lstStyle/>
-          <a:p>
-            <a:pPr indent="0" marL="0">
+        </p:spPr>
+      </p:sp>
+      <p:sp>
+        <p:nvSpPr>
+          <p:cNvPr id="7" name="Text 5"/>
+          <p:cNvSpPr/>
+          <p:nvPr/>
+        </p:nvSpPr>
+        <p:spPr>
+          <a:xfrm>
+            <a:off x="868680" y="2514600"/>
+            <a:ext cx="3429000" cy="365760"/>
+          </a:xfrm>
+          <a:prstGeom prst="rect">
+            <a:avLst/>
+          </a:prstGeom>
+          <a:noFill/>
+          <a:ln/>
+        </p:spPr>
+        <p:txBody>
+          <a:bodyPr wrap="square" lIns="0" tIns="0" rIns="0" bIns="0" rtlCol="0" anchor="ctr"/>
+          <a:lstStyle/>
+          <a:p>
+            <a:pPr algn="ctr" indent="0" marL="0">
               <a:buNone/>
             </a:pPr>
             <a:r>
               <a:rPr lang="en-US" sz="1400" b="1" dirty="0">
                 <a:solidFill>
-                  <a:srgbClr val="2A1A66"/>
-                </a:solidFill>
-                <a:latin typeface="Malgun Gothic" pitchFamily="34" charset="0"/>
-                <a:ea typeface="Malgun Gothic" pitchFamily="34" charset="-122"/>
-                <a:cs typeface="Malgun Gothic" pitchFamily="34" charset="-120"/>
-              </a:rPr>
-              <a:t>파이프라인</a:t>
+                  <a:srgbClr val="2563EB"/>
+                </a:solidFill>
+                <a:latin typeface="Malgun Gothic" pitchFamily="34" charset="0"/>
+                <a:ea typeface="Malgun Gothic" pitchFamily="34" charset="-122"/>
+                <a:cs typeface="Malgun Gothic" pitchFamily="34" charset="-120"/>
+              </a:rPr>
+              <a:t>🛠️ Dev</a:t>
             </a:r>
             <a:endParaRPr lang="en-US" sz="1400" dirty="0"/>
           </a:p>
@@ -9086,30 +9375,30 @@
       </p:sp>
       <p:sp>
         <p:nvSpPr>
-          <p:cNvPr id="28" name="Text 26"/>
-          <p:cNvSpPr/>
-          <p:nvPr/>
-        </p:nvSpPr>
-        <p:spPr>
-          <a:xfrm>
-            <a:off x="3931920" y="4645152"/>
-            <a:ext cx="7498080" cy="658368"/>
-          </a:xfrm>
-          <a:prstGeom prst="rect">
-            <a:avLst/>
-          </a:prstGeom>
-          <a:noFill/>
-          <a:ln/>
-        </p:spPr>
-        <p:txBody>
-          <a:bodyPr wrap="square" lIns="0" tIns="0" rIns="0" bIns="0" rtlCol="0" anchor="ctr"/>
-          <a:lstStyle/>
-          <a:p>
-            <a:pPr indent="0" marL="0">
-              <a:buNone/>
-            </a:pPr>
-            <a:r>
-              <a:rPr lang="en-US" sz="1150" dirty="0">
+          <p:cNvPr id="8" name="Text 6"/>
+          <p:cNvSpPr/>
+          <p:nvPr/>
+        </p:nvSpPr>
+        <p:spPr>
+          <a:xfrm>
+            <a:off x="1051560" y="2907792"/>
+            <a:ext cx="3063240" cy="640080"/>
+          </a:xfrm>
+          <a:prstGeom prst="rect">
+            <a:avLst/>
+          </a:prstGeom>
+          <a:noFill/>
+          <a:ln/>
+        </p:spPr>
+        <p:txBody>
+          <a:bodyPr wrap="square" lIns="0" tIns="0" rIns="0" bIns="0" rtlCol="0" anchor="ctr"/>
+          <a:lstStyle/>
+          <a:p>
+            <a:pPr algn="ctr" indent="0" marL="0">
+              <a:buNone/>
+            </a:pPr>
+            <a:r>
+              <a:rPr lang="en-US" sz="1100" dirty="0">
                 <a:solidFill>
                   <a:srgbClr val="241B3A"/>
                 </a:solidFill>
@@ -9117,139 +9406,90 @@
                 <a:ea typeface="Malgun Gothic" pitchFamily="34" charset="-122"/>
                 <a:cs typeface="Malgun Gothic" pitchFamily="34" charset="-120"/>
               </a:rPr>
-              <a:t>마이그레이션 규율 확립: Dev→Staging→Prod 순차 적용</a:t>
-            </a:r>
-            <a:endParaRPr lang="en-US" sz="1150" dirty="0"/>
-          </a:p>
-        </p:txBody>
-      </p:sp>
-      <p:sp>
-        <p:nvSpPr>
-          <p:cNvPr id="29" name="Shape 27"/>
-          <p:cNvSpPr/>
-          <p:nvPr/>
-        </p:nvSpPr>
-        <p:spPr>
-          <a:xfrm>
-            <a:off x="640080" y="5440680"/>
-            <a:ext cx="566928" cy="566928"/>
-          </a:xfrm>
-          <a:prstGeom prst="ellipse">
-            <a:avLst/>
-          </a:prstGeom>
-          <a:solidFill>
-            <a:srgbClr val="C98A12"/>
-          </a:solidFill>
-          <a:ln/>
-        </p:spPr>
-      </p:sp>
-      <p:sp>
-        <p:nvSpPr>
-          <p:cNvPr id="30" name="Text 28"/>
-          <p:cNvSpPr/>
-          <p:nvPr/>
-        </p:nvSpPr>
-        <p:spPr>
-          <a:xfrm>
-            <a:off x="640080" y="5422392"/>
-            <a:ext cx="566928" cy="566928"/>
-          </a:xfrm>
-          <a:prstGeom prst="rect">
-            <a:avLst/>
-          </a:prstGeom>
-          <a:noFill/>
-          <a:ln/>
-        </p:spPr>
-        <p:txBody>
-          <a:bodyPr wrap="square" lIns="0" tIns="0" rIns="0" bIns="0" rtlCol="0" anchor="ctr"/>
-          <a:lstStyle/>
+              <a:t>로컬 Supabase (CLI)</a:t>
+            </a:r>
+            <a:endParaRPr lang="en-US" sz="1100" dirty="0"/>
+          </a:p>
           <a:p>
             <a:pPr algn="ctr" indent="0" marL="0">
               <a:buNone/>
             </a:pPr>
             <a:r>
-              <a:rPr lang="en-US" sz="1800" b="1" dirty="0">
-                <a:solidFill>
-                  <a:srgbClr val="FFFFFF"/>
-                </a:solidFill>
-                <a:latin typeface="Malgun Gothic" pitchFamily="34" charset="0"/>
-                <a:ea typeface="Malgun Gothic" pitchFamily="34" charset="-122"/>
-                <a:cs typeface="Malgun Gothic" pitchFamily="34" charset="-120"/>
-              </a:rPr>
-              <a:t>6</a:t>
-            </a:r>
-            <a:endParaRPr lang="en-US" sz="1800" dirty="0"/>
-          </a:p>
-        </p:txBody>
-      </p:sp>
-      <p:sp>
-        <p:nvSpPr>
-          <p:cNvPr id="31" name="Shape 29"/>
-          <p:cNvSpPr/>
-          <p:nvPr/>
-        </p:nvSpPr>
-        <p:spPr>
-          <a:xfrm>
-            <a:off x="1417320" y="5394960"/>
-            <a:ext cx="10195560" cy="658368"/>
+              <a:rPr lang="en-US" sz="1100" dirty="0">
+                <a:solidFill>
+                  <a:srgbClr val="241B3A"/>
+                </a:solidFill>
+                <a:latin typeface="Malgun Gothic" pitchFamily="34" charset="0"/>
+                <a:ea typeface="Malgun Gothic" pitchFamily="34" charset="-122"/>
+                <a:cs typeface="Malgun Gothic" pitchFamily="34" charset="-120"/>
+              </a:rPr>
+              <a:t>무료 · 무제한</a:t>
+            </a:r>
+            <a:endParaRPr lang="en-US" sz="1100" dirty="0"/>
+          </a:p>
+        </p:txBody>
+      </p:sp>
+      <p:sp>
+        <p:nvSpPr>
+          <p:cNvPr id="9" name="Shape 7"/>
+          <p:cNvSpPr/>
+          <p:nvPr/>
+        </p:nvSpPr>
+        <p:spPr>
+          <a:xfrm>
+            <a:off x="4379976" y="2377440"/>
+            <a:ext cx="3429000" cy="1234440"/>
           </a:xfrm>
           <a:prstGeom prst="roundRect">
             <a:avLst>
-              <a:gd name="adj" fmla="val 9722"/>
+              <a:gd name="adj" fmla="val 5926"/>
             </a:avLst>
           </a:prstGeom>
           <a:solidFill>
-            <a:srgbClr val="FFFFFF"/>
+            <a:srgbClr val="F7F5FB"/>
           </a:solidFill>
-          <a:ln w="12700">
+          <a:ln w="15875">
             <a:solidFill>
-              <a:srgbClr val="C98A12"/>
+              <a:srgbClr val="E8910C"/>
             </a:solidFill>
             <a:prstDash val="solid"/>
           </a:ln>
-          <a:effectLst>
-            <a:outerShdw sx="100000" sy="100000" kx="0" ky="0" algn="bl" rotWithShape="0" blurRad="101600" dist="38100" dir="8100000">
-              <a:srgbClr val="1A1145">
-                <a:alpha val="16000"/>
-              </a:srgbClr>
-            </a:outerShdw>
-          </a:effectLst>
-        </p:spPr>
-      </p:sp>
-      <p:sp>
-        <p:nvSpPr>
-          <p:cNvPr id="32" name="Text 30"/>
-          <p:cNvSpPr/>
-          <p:nvPr/>
-        </p:nvSpPr>
-        <p:spPr>
-          <a:xfrm>
-            <a:off x="1645920" y="5394960"/>
-            <a:ext cx="2286000" cy="658368"/>
-          </a:xfrm>
-          <a:prstGeom prst="rect">
-            <a:avLst/>
-          </a:prstGeom>
-          <a:noFill/>
-          <a:ln/>
-        </p:spPr>
-        <p:txBody>
-          <a:bodyPr wrap="square" lIns="0" tIns="0" rIns="0" bIns="0" rtlCol="0" anchor="ctr"/>
-          <a:lstStyle/>
-          <a:p>
-            <a:pPr indent="0" marL="0">
+        </p:spPr>
+      </p:sp>
+      <p:sp>
+        <p:nvSpPr>
+          <p:cNvPr id="10" name="Text 8"/>
+          <p:cNvSpPr/>
+          <p:nvPr/>
+        </p:nvSpPr>
+        <p:spPr>
+          <a:xfrm>
+            <a:off x="4379976" y="2514600"/>
+            <a:ext cx="3429000" cy="365760"/>
+          </a:xfrm>
+          <a:prstGeom prst="rect">
+            <a:avLst/>
+          </a:prstGeom>
+          <a:noFill/>
+          <a:ln/>
+        </p:spPr>
+        <p:txBody>
+          <a:bodyPr wrap="square" lIns="0" tIns="0" rIns="0" bIns="0" rtlCol="0" anchor="ctr"/>
+          <a:lstStyle/>
+          <a:p>
+            <a:pPr algn="ctr" indent="0" marL="0">
               <a:buNone/>
             </a:pPr>
             <a:r>
               <a:rPr lang="en-US" sz="1400" b="1" dirty="0">
                 <a:solidFill>
-                  <a:srgbClr val="C98A12"/>
-                </a:solidFill>
-                <a:latin typeface="Malgun Gothic" pitchFamily="34" charset="0"/>
-                <a:ea typeface="Malgun Gothic" pitchFamily="34" charset="-122"/>
-                <a:cs typeface="Malgun Gothic" pitchFamily="34" charset="-120"/>
-              </a:rPr>
-              <a:t>메인넷 컷오버</a:t>
+                  <a:srgbClr val="E8910C"/>
+                </a:solidFill>
+                <a:latin typeface="Malgun Gothic" pitchFamily="34" charset="0"/>
+                <a:ea typeface="Malgun Gothic" pitchFamily="34" charset="-122"/>
+                <a:cs typeface="Malgun Gothic" pitchFamily="34" charset="-120"/>
+              </a:rPr>
+              <a:t>🧪 Staging</a:t>
             </a:r>
             <a:endParaRPr lang="en-US" sz="1400" dirty="0"/>
           </a:p>
@@ -9257,30 +9497,30 @@
       </p:sp>
       <p:sp>
         <p:nvSpPr>
-          <p:cNvPr id="33" name="Text 31"/>
-          <p:cNvSpPr/>
-          <p:nvPr/>
-        </p:nvSpPr>
-        <p:spPr>
-          <a:xfrm>
-            <a:off x="3931920" y="5394960"/>
-            <a:ext cx="7498080" cy="658368"/>
-          </a:xfrm>
-          <a:prstGeom prst="rect">
-            <a:avLst/>
-          </a:prstGeom>
-          <a:noFill/>
-          <a:ln/>
-        </p:spPr>
-        <p:txBody>
-          <a:bodyPr wrap="square" lIns="0" tIns="0" rIns="0" bIns="0" rtlCol="0" anchor="ctr"/>
-          <a:lstStyle/>
-          <a:p>
-            <a:pPr indent="0" marL="0">
-              <a:buNone/>
-            </a:pPr>
-            <a:r>
-              <a:rPr lang="en-US" sz="1150" dirty="0">
+          <p:cNvPr id="11" name="Text 9"/>
+          <p:cNvSpPr/>
+          <p:nvPr/>
+        </p:nvSpPr>
+        <p:spPr>
+          <a:xfrm>
+            <a:off x="4562856" y="2907792"/>
+            <a:ext cx="3063240" cy="640080"/>
+          </a:xfrm>
+          <a:prstGeom prst="rect">
+            <a:avLst/>
+          </a:prstGeom>
+          <a:noFill/>
+          <a:ln/>
+        </p:spPr>
+        <p:txBody>
+          <a:bodyPr wrap="square" lIns="0" tIns="0" rIns="0" bIns="0" rtlCol="0" anchor="ctr"/>
+          <a:lstStyle/>
+          <a:p>
+            <a:pPr algn="ctr" indent="0" marL="0">
+              <a:buNone/>
+            </a:pPr>
+            <a:r>
+              <a:rPr lang="en-US" sz="1100" dirty="0">
                 <a:solidFill>
                   <a:srgbClr val="241B3A"/>
                 </a:solidFill>
@@ -9288,15 +9528,236 @@
                 <a:ea typeface="Malgun Gothic" pitchFamily="34" charset="-122"/>
                 <a:cs typeface="Malgun Gothic" pitchFamily="34" charset="-120"/>
               </a:rPr>
-              <a:t>(출시 시점) Prod = Mainnet 전환 — 새 도메인·API Key·지갑</a:t>
-            </a:r>
-            <a:endParaRPr lang="en-US" sz="1150" dirty="0"/>
-          </a:p>
-        </p:txBody>
-      </p:sp>
-      <p:sp>
-        <p:nvSpPr>
-          <p:cNvPr id="34" name="Text 32"/>
+              <a:t>클라우드 프로젝트 #1</a:t>
+            </a:r>
+            <a:endParaRPr lang="en-US" sz="1100" dirty="0"/>
+          </a:p>
+          <a:p>
+            <a:pPr algn="ctr" indent="0" marL="0">
+              <a:buNone/>
+            </a:pPr>
+            <a:r>
+              <a:rPr lang="en-US" sz="1100" dirty="0">
+                <a:solidFill>
+                  <a:srgbClr val="241B3A"/>
+                </a:solidFill>
+                <a:latin typeface="Malgun Gothic" pitchFamily="34" charset="0"/>
+                <a:ea typeface="Malgun Gothic" pitchFamily="34" charset="-122"/>
+                <a:cs typeface="Malgun Gothic" pitchFamily="34" charset="-120"/>
+              </a:rPr>
+              <a:t>무료 티어</a:t>
+            </a:r>
+            <a:endParaRPr lang="en-US" sz="1100" dirty="0"/>
+          </a:p>
+        </p:txBody>
+      </p:sp>
+      <p:sp>
+        <p:nvSpPr>
+          <p:cNvPr id="12" name="Shape 10"/>
+          <p:cNvSpPr/>
+          <p:nvPr/>
+        </p:nvSpPr>
+        <p:spPr>
+          <a:xfrm>
+            <a:off x="7891272" y="2377440"/>
+            <a:ext cx="3429000" cy="1234440"/>
+          </a:xfrm>
+          <a:prstGeom prst="roundRect">
+            <a:avLst>
+              <a:gd name="adj" fmla="val 5926"/>
+            </a:avLst>
+          </a:prstGeom>
+          <a:solidFill>
+            <a:srgbClr val="F7F5FB"/>
+          </a:solidFill>
+          <a:ln w="15875">
+            <a:solidFill>
+              <a:srgbClr val="5B2A9D"/>
+            </a:solidFill>
+            <a:prstDash val="solid"/>
+          </a:ln>
+        </p:spPr>
+      </p:sp>
+      <p:sp>
+        <p:nvSpPr>
+          <p:cNvPr id="13" name="Text 11"/>
+          <p:cNvSpPr/>
+          <p:nvPr/>
+        </p:nvSpPr>
+        <p:spPr>
+          <a:xfrm>
+            <a:off x="7891272" y="2514600"/>
+            <a:ext cx="3429000" cy="365760"/>
+          </a:xfrm>
+          <a:prstGeom prst="rect">
+            <a:avLst/>
+          </a:prstGeom>
+          <a:noFill/>
+          <a:ln/>
+        </p:spPr>
+        <p:txBody>
+          <a:bodyPr wrap="square" lIns="0" tIns="0" rIns="0" bIns="0" rtlCol="0" anchor="ctr"/>
+          <a:lstStyle/>
+          <a:p>
+            <a:pPr algn="ctr" indent="0" marL="0">
+              <a:buNone/>
+            </a:pPr>
+            <a:r>
+              <a:rPr lang="en-US" sz="1400" b="1" dirty="0">
+                <a:solidFill>
+                  <a:srgbClr val="5B2A9D"/>
+                </a:solidFill>
+                <a:latin typeface="Malgun Gothic" pitchFamily="34" charset="0"/>
+                <a:ea typeface="Malgun Gothic" pitchFamily="34" charset="-122"/>
+                <a:cs typeface="Malgun Gothic" pitchFamily="34" charset="-120"/>
+              </a:rPr>
+              <a:t>🚀 Prod</a:t>
+            </a:r>
+            <a:endParaRPr lang="en-US" sz="1400" dirty="0"/>
+          </a:p>
+        </p:txBody>
+      </p:sp>
+      <p:sp>
+        <p:nvSpPr>
+          <p:cNvPr id="14" name="Text 12"/>
+          <p:cNvSpPr/>
+          <p:nvPr/>
+        </p:nvSpPr>
+        <p:spPr>
+          <a:xfrm>
+            <a:off x="8074152" y="2907792"/>
+            <a:ext cx="3063240" cy="640080"/>
+          </a:xfrm>
+          <a:prstGeom prst="rect">
+            <a:avLst/>
+          </a:prstGeom>
+          <a:noFill/>
+          <a:ln/>
+        </p:spPr>
+        <p:txBody>
+          <a:bodyPr wrap="square" lIns="0" tIns="0" rIns="0" bIns="0" rtlCol="0" anchor="ctr"/>
+          <a:lstStyle/>
+          <a:p>
+            <a:pPr algn="ctr" indent="0" marL="0">
+              <a:buNone/>
+            </a:pPr>
+            <a:r>
+              <a:rPr lang="en-US" sz="1100" dirty="0">
+                <a:solidFill>
+                  <a:srgbClr val="241B3A"/>
+                </a:solidFill>
+                <a:latin typeface="Malgun Gothic" pitchFamily="34" charset="0"/>
+                <a:ea typeface="Malgun Gothic" pitchFamily="34" charset="-122"/>
+                <a:cs typeface="Malgun Gothic" pitchFamily="34" charset="-120"/>
+              </a:rPr>
+              <a:t>클라우드 프로젝트 #2</a:t>
+            </a:r>
+            <a:endParaRPr lang="en-US" sz="1100" dirty="0"/>
+          </a:p>
+          <a:p>
+            <a:pPr algn="ctr" indent="0" marL="0">
+              <a:buNone/>
+            </a:pPr>
+            <a:r>
+              <a:rPr lang="en-US" sz="1100" dirty="0">
+                <a:solidFill>
+                  <a:srgbClr val="241B3A"/>
+                </a:solidFill>
+                <a:latin typeface="Malgun Gothic" pitchFamily="34" charset="0"/>
+                <a:ea typeface="Malgun Gothic" pitchFamily="34" charset="-122"/>
+                <a:cs typeface="Malgun Gothic" pitchFamily="34" charset="-120"/>
+              </a:rPr>
+              <a:t>(현재 DB) 무료 티어</a:t>
+            </a:r>
+            <a:endParaRPr lang="en-US" sz="1100" dirty="0"/>
+          </a:p>
+        </p:txBody>
+      </p:sp>
+      <p:sp>
+        <p:nvSpPr>
+          <p:cNvPr id="15" name="Text 13"/>
+          <p:cNvSpPr/>
+          <p:nvPr/>
+        </p:nvSpPr>
+        <p:spPr>
+          <a:xfrm>
+            <a:off x="914400" y="4069080"/>
+            <a:ext cx="10607040" cy="1828800"/>
+          </a:xfrm>
+          <a:prstGeom prst="rect">
+            <a:avLst/>
+          </a:prstGeom>
+          <a:noFill/>
+          <a:ln/>
+        </p:spPr>
+        <p:txBody>
+          <a:bodyPr wrap="square" lIns="0" tIns="0" rIns="0" bIns="0" rtlCol="0" anchor="ctr"/>
+          <a:lstStyle/>
+          <a:p>
+            <a:pPr marL="342900" indent="-342900">
+              <a:spcAft>
+                <a:spcPts val="900"/>
+              </a:spcAft>
+              <a:buSzPct val="100000"/>
+              <a:buChar char="•"/>
+            </a:pPr>
+            <a:r>
+              <a:rPr lang="en-US" sz="1250" dirty="0">
+                <a:solidFill>
+                  <a:srgbClr val="241B3A"/>
+                </a:solidFill>
+                <a:latin typeface="Malgun Gothic" pitchFamily="34" charset="0"/>
+                <a:ea typeface="Malgun Gothic" pitchFamily="34" charset="-122"/>
+                <a:cs typeface="Malgun Gothic" pitchFamily="34" charset="-120"/>
+              </a:rPr>
+              <a:t>확장 옵션 (트래픽·팀 성장 시):  Supabase Pro($25/월) + Branching(Git연동 preview DB)로 스테이징 자동화</a:t>
+            </a:r>
+            <a:endParaRPr lang="en-US" sz="1250" dirty="0"/>
+          </a:p>
+          <a:p>
+            <a:pPr marL="342900" indent="-342900">
+              <a:spcAft>
+                <a:spcPts val="900"/>
+              </a:spcAft>
+              <a:buSzPct val="100000"/>
+              <a:buChar char="•"/>
+            </a:pPr>
+            <a:r>
+              <a:rPr lang="en-US" sz="1250" dirty="0">
+                <a:solidFill>
+                  <a:srgbClr val="241B3A"/>
+                </a:solidFill>
+                <a:latin typeface="Malgun Gothic" pitchFamily="34" charset="0"/>
+                <a:ea typeface="Malgun Gothic" pitchFamily="34" charset="-122"/>
+                <a:cs typeface="Malgun Gothic" pitchFamily="34" charset="-120"/>
+              </a:rPr>
+              <a:t>Vercel:  환경 스코프(Development/Preview/Production)는 이미 쓰는 Pro에 포함 — 추가 비용 0</a:t>
+            </a:r>
+            <a:endParaRPr lang="en-US" sz="1250" dirty="0"/>
+          </a:p>
+          <a:p>
+            <a:pPr marL="342900" indent="-342900">
+              <a:buSzPct val="100000"/>
+              <a:buChar char="•"/>
+            </a:pPr>
+            <a:r>
+              <a:rPr lang="en-US" sz="1250" dirty="0">
+                <a:solidFill>
+                  <a:srgbClr val="241B3A"/>
+                </a:solidFill>
+                <a:latin typeface="Malgun Gothic" pitchFamily="34" charset="0"/>
+                <a:ea typeface="Malgun Gothic" pitchFamily="34" charset="-122"/>
+                <a:cs typeface="Malgun Gothic" pitchFamily="34" charset="-120"/>
+              </a:rPr>
+              <a:t>주의:  무료 티어는 프로젝트 수·용량 제한이 바뀔 수 있으니 도입 직전 현행 한도 확인</a:t>
+            </a:r>
+            <a:endParaRPr lang="en-US" sz="1250" dirty="0"/>
+          </a:p>
+        </p:txBody>
+      </p:sp>
+      <p:sp>
+        <p:nvSpPr>
+          <p:cNvPr id="16" name="Text 14"/>
           <p:cNvSpPr/>
           <p:nvPr/>
         </p:nvSpPr>
@@ -9335,7 +9796,7 @@
       </p:sp>
       <p:sp>
         <p:nvSpPr>
-          <p:cNvPr id="35" name="Text 33"/>
+          <p:cNvPr id="17" name="Text 15"/>
           <p:cNvSpPr/>
           <p:nvPr/>
         </p:nvSpPr>
@@ -9386,7 +9847,7 @@
     <p:bg>
       <p:bgPr>
         <a:solidFill>
-          <a:srgbClr val="1A1145"/>
+          <a:srgbClr val="F7F5FB"/>
         </a:solidFill>
       </p:bgPr>
     </p:bg>
@@ -9406,113 +9867,128 @@
       </p:grpSpPr>
       <p:sp>
         <p:nvSpPr>
-          <p:cNvPr id="2" name="Shape 0"/>
-          <p:cNvSpPr/>
-          <p:nvPr/>
-        </p:nvSpPr>
-        <p:spPr>
-          <a:xfrm>
-            <a:off x="-1371600" y="-1371600"/>
-            <a:ext cx="4572000" cy="4572000"/>
+          <p:cNvPr id="2" name="Text 0"/>
+          <p:cNvSpPr/>
+          <p:nvPr/>
+        </p:nvSpPr>
+        <p:spPr>
+          <a:xfrm>
+            <a:off x="548640" y="384048"/>
+            <a:ext cx="10972800" cy="274320"/>
+          </a:xfrm>
+          <a:prstGeom prst="rect">
+            <a:avLst/>
+          </a:prstGeom>
+          <a:noFill/>
+          <a:ln/>
+        </p:spPr>
+        <p:txBody>
+          <a:bodyPr wrap="square" lIns="0" tIns="0" rIns="0" bIns="0" rtlCol="0" anchor="ctr"/>
+          <a:lstStyle/>
+          <a:p>
+            <a:pPr indent="0" marL="0">
+              <a:buNone/>
+            </a:pPr>
+            <a:r>
+              <a:rPr lang="en-US" sz="1200" b="1" spc="300" kern="0" dirty="0">
+                <a:solidFill>
+                  <a:srgbClr val="5B2A9D"/>
+                </a:solidFill>
+                <a:latin typeface="Malgun Gothic" pitchFamily="34" charset="0"/>
+                <a:ea typeface="Malgun Gothic" pitchFamily="34" charset="-122"/>
+                <a:cs typeface="Malgun Gothic" pitchFamily="34" charset="-120"/>
+              </a:rPr>
+              <a:t>ROADMAP · 단계적 도입</a:t>
+            </a:r>
+            <a:endParaRPr lang="en-US" sz="1200" dirty="0"/>
+          </a:p>
+        </p:txBody>
+      </p:sp>
+      <p:sp>
+        <p:nvSpPr>
+          <p:cNvPr id="3" name="Text 1"/>
+          <p:cNvSpPr/>
+          <p:nvPr/>
+        </p:nvSpPr>
+        <p:spPr>
+          <a:xfrm>
+            <a:off x="548640" y="658368"/>
+            <a:ext cx="11064240" cy="640080"/>
+          </a:xfrm>
+          <a:prstGeom prst="rect">
+            <a:avLst/>
+          </a:prstGeom>
+          <a:noFill/>
+          <a:ln/>
+        </p:spPr>
+        <p:txBody>
+          <a:bodyPr wrap="square" lIns="0" tIns="0" rIns="0" bIns="0" rtlCol="0" anchor="ctr"/>
+          <a:lstStyle/>
+          <a:p>
+            <a:pPr indent="0" marL="0">
+              <a:buNone/>
+            </a:pPr>
+            <a:r>
+              <a:rPr lang="en-US" sz="2600" b="1" dirty="0">
+                <a:solidFill>
+                  <a:srgbClr val="241B3A"/>
+                </a:solidFill>
+                <a:latin typeface="Malgun Gothic" pitchFamily="34" charset="0"/>
+                <a:ea typeface="Malgun Gothic" pitchFamily="34" charset="-122"/>
+                <a:cs typeface="Malgun Gothic" pitchFamily="34" charset="-120"/>
+              </a:rPr>
+              <a:t>단일 DB에서 3환경으로 — 점진 전환</a:t>
+            </a:r>
+            <a:endParaRPr lang="en-US" sz="2600" dirty="0"/>
+          </a:p>
+        </p:txBody>
+      </p:sp>
+      <p:sp>
+        <p:nvSpPr>
+          <p:cNvPr id="4" name="Shape 2"/>
+          <p:cNvSpPr/>
+          <p:nvPr/>
+        </p:nvSpPr>
+        <p:spPr>
+          <a:xfrm>
+            <a:off x="640080" y="1691640"/>
+            <a:ext cx="566928" cy="566928"/>
           </a:xfrm>
           <a:prstGeom prst="ellipse">
             <a:avLst/>
           </a:prstGeom>
           <a:solidFill>
-            <a:srgbClr val="5B2A9D">
-              <a:alpha val="35000"/>
-            </a:srgbClr>
+            <a:srgbClr val="5B2A9D"/>
           </a:solidFill>
           <a:ln/>
         </p:spPr>
       </p:sp>
       <p:sp>
         <p:nvSpPr>
-          <p:cNvPr id="3" name="Shape 1"/>
-          <p:cNvSpPr/>
-          <p:nvPr/>
-        </p:nvSpPr>
-        <p:spPr>
-          <a:xfrm>
-            <a:off x="9601200" y="3840480"/>
-            <a:ext cx="4114800" cy="4114800"/>
-          </a:xfrm>
-          <a:prstGeom prst="ellipse">
-            <a:avLst/>
-          </a:prstGeom>
-          <a:solidFill>
-            <a:srgbClr val="F5B731">
-              <a:alpha val="20000"/>
-            </a:srgbClr>
-          </a:solidFill>
-          <a:ln/>
-        </p:spPr>
-      </p:sp>
-      <p:sp>
-        <p:nvSpPr>
-          <p:cNvPr id="4" name="Text 2"/>
-          <p:cNvSpPr/>
-          <p:nvPr/>
-        </p:nvSpPr>
-        <p:spPr>
-          <a:xfrm>
-            <a:off x="731520" y="731520"/>
-            <a:ext cx="10058400" cy="365760"/>
-          </a:xfrm>
-          <a:prstGeom prst="rect">
-            <a:avLst/>
-          </a:prstGeom>
-          <a:noFill/>
-          <a:ln/>
-        </p:spPr>
-        <p:txBody>
-          <a:bodyPr wrap="square" lIns="0" tIns="0" rIns="0" bIns="0" rtlCol="0" anchor="ctr"/>
-          <a:lstStyle/>
-          <a:p>
-            <a:pPr indent="0" marL="0">
-              <a:buNone/>
-            </a:pPr>
-            <a:r>
-              <a:rPr lang="en-US" sz="1400" b="1" spc="300" kern="0" dirty="0">
-                <a:solidFill>
-                  <a:srgbClr val="F5B731"/>
-                </a:solidFill>
-                <a:latin typeface="Malgun Gothic" pitchFamily="34" charset="0"/>
-                <a:ea typeface="Malgun Gothic" pitchFamily="34" charset="-122"/>
-                <a:cs typeface="Malgun Gothic" pitchFamily="34" charset="-120"/>
-              </a:rPr>
-              <a:t>GOVERNANCE · 5대 원칙</a:t>
-            </a:r>
-            <a:endParaRPr lang="en-US" sz="1400" dirty="0"/>
-          </a:p>
-        </p:txBody>
-      </p:sp>
-      <p:sp>
-        <p:nvSpPr>
           <p:cNvPr id="5" name="Text 3"/>
           <p:cNvSpPr/>
           <p:nvPr/>
         </p:nvSpPr>
         <p:spPr>
           <a:xfrm>
-            <a:off x="731520" y="1097280"/>
-            <a:ext cx="10058400" cy="640080"/>
-          </a:xfrm>
-          <a:prstGeom prst="rect">
-            <a:avLst/>
-          </a:prstGeom>
-          <a:noFill/>
-          <a:ln/>
-        </p:spPr>
-        <p:txBody>
-          <a:bodyPr wrap="square" lIns="0" tIns="0" rIns="0" bIns="0" rtlCol="0" anchor="ctr"/>
-          <a:lstStyle/>
-          <a:p>
-            <a:pPr indent="0" marL="0">
-              <a:buNone/>
-            </a:pPr>
-            <a:r>
-              <a:rPr lang="en-US" sz="3000" b="1" dirty="0">
+            <a:off x="640080" y="1673352"/>
+            <a:ext cx="566928" cy="566928"/>
+          </a:xfrm>
+          <a:prstGeom prst="rect">
+            <a:avLst/>
+          </a:prstGeom>
+          <a:noFill/>
+          <a:ln/>
+        </p:spPr>
+        <p:txBody>
+          <a:bodyPr wrap="square" lIns="0" tIns="0" rIns="0" bIns="0" rtlCol="0" anchor="ctr"/>
+          <a:lstStyle/>
+          <a:p>
+            <a:pPr algn="ctr" indent="0" marL="0">
+              <a:buNone/>
+            </a:pPr>
+            <a:r>
+              <a:rPr lang="en-US" sz="1800" b="1" dirty="0">
                 <a:solidFill>
                   <a:srgbClr val="FFFFFF"/>
                 </a:solidFill>
@@ -9520,9 +9996,9 @@
                 <a:ea typeface="Malgun Gothic" pitchFamily="34" charset="-122"/>
                 <a:cs typeface="Malgun Gothic" pitchFamily="34" charset="-120"/>
               </a:rPr>
-              <a:t>환경 거버넌스 원칙</a:t>
-            </a:r>
-            <a:endParaRPr lang="en-US" sz="3000" dirty="0"/>
+              <a:t>1</a:t>
+            </a:r>
+            <a:endParaRPr lang="en-US" sz="1800" dirty="0"/>
           </a:p>
         </p:txBody>
       </p:sp>
@@ -9534,13 +10010,636 @@
         </p:nvSpPr>
         <p:spPr>
           <a:xfrm>
-            <a:off x="731520" y="2057400"/>
-            <a:ext cx="10698480" cy="676656"/>
+            <a:off x="1417320" y="1645920"/>
+            <a:ext cx="10195560" cy="658368"/>
           </a:xfrm>
           <a:prstGeom prst="roundRect">
             <a:avLst>
-              <a:gd name="adj" fmla="val 9459"/>
+              <a:gd name="adj" fmla="val 9722"/>
             </a:avLst>
+          </a:prstGeom>
+          <a:solidFill>
+            <a:srgbClr val="FFFFFF"/>
+          </a:solidFill>
+          <a:ln w="12700">
+            <a:solidFill>
+              <a:srgbClr val="5B2A9D"/>
+            </a:solidFill>
+            <a:prstDash val="solid"/>
+          </a:ln>
+          <a:effectLst>
+            <a:outerShdw sx="100000" sy="100000" kx="0" ky="0" algn="bl" rotWithShape="0" blurRad="101600" dist="38100" dir="8100000">
+              <a:srgbClr val="1A1145">
+                <a:alpha val="16000"/>
+              </a:srgbClr>
+            </a:outerShdw>
+          </a:effectLst>
+        </p:spPr>
+      </p:sp>
+      <p:sp>
+        <p:nvSpPr>
+          <p:cNvPr id="7" name="Text 5"/>
+          <p:cNvSpPr/>
+          <p:nvPr/>
+        </p:nvSpPr>
+        <p:spPr>
+          <a:xfrm>
+            <a:off x="1645920" y="1645920"/>
+            <a:ext cx="2286000" cy="658368"/>
+          </a:xfrm>
+          <a:prstGeom prst="rect">
+            <a:avLst/>
+          </a:prstGeom>
+          <a:noFill/>
+          <a:ln/>
+        </p:spPr>
+        <p:txBody>
+          <a:bodyPr wrap="square" lIns="0" tIns="0" rIns="0" bIns="0" rtlCol="0" anchor="ctr"/>
+          <a:lstStyle/>
+          <a:p>
+            <a:pPr indent="0" marL="0">
+              <a:buNone/>
+            </a:pPr>
+            <a:r>
+              <a:rPr lang="en-US" sz="1400" b="1" dirty="0">
+                <a:solidFill>
+                  <a:srgbClr val="5B2A9D"/>
+                </a:solidFill>
+                <a:latin typeface="Malgun Gothic" pitchFamily="34" charset="0"/>
+                <a:ea typeface="Malgun Gothic" pitchFamily="34" charset="-122"/>
+                <a:cs typeface="Malgun Gothic" pitchFamily="34" charset="-120"/>
+              </a:rPr>
+              <a:t>운영 동결</a:t>
+            </a:r>
+            <a:endParaRPr lang="en-US" sz="1400" dirty="0"/>
+          </a:p>
+        </p:txBody>
+      </p:sp>
+      <p:sp>
+        <p:nvSpPr>
+          <p:cNvPr id="8" name="Text 6"/>
+          <p:cNvSpPr/>
+          <p:nvPr/>
+        </p:nvSpPr>
+        <p:spPr>
+          <a:xfrm>
+            <a:off x="3931920" y="1645920"/>
+            <a:ext cx="7498080" cy="658368"/>
+          </a:xfrm>
+          <a:prstGeom prst="rect">
+            <a:avLst/>
+          </a:prstGeom>
+          <a:noFill/>
+          <a:ln/>
+        </p:spPr>
+        <p:txBody>
+          <a:bodyPr wrap="square" lIns="0" tIns="0" rIns="0" bIns="0" rtlCol="0" anchor="ctr"/>
+          <a:lstStyle/>
+          <a:p>
+            <a:pPr indent="0" marL="0">
+              <a:buNone/>
+            </a:pPr>
+            <a:r>
+              <a:rPr lang="en-US" sz="1150" dirty="0">
+                <a:solidFill>
+                  <a:srgbClr val="241B3A"/>
+                </a:solidFill>
+                <a:latin typeface="Malgun Gothic" pitchFamily="34" charset="0"/>
+                <a:ea typeface="Malgun Gothic" pitchFamily="34" charset="-122"/>
+                <a:cs typeface="Malgun Gothic" pitchFamily="34" charset="-120"/>
+              </a:rPr>
+              <a:t>현재 단일 DB를 ‘운영(Prod)’으로 확정 · 직접 실험 금지</a:t>
+            </a:r>
+            <a:endParaRPr lang="en-US" sz="1150" dirty="0"/>
+          </a:p>
+        </p:txBody>
+      </p:sp>
+      <p:sp>
+        <p:nvSpPr>
+          <p:cNvPr id="9" name="Shape 7"/>
+          <p:cNvSpPr/>
+          <p:nvPr/>
+        </p:nvSpPr>
+        <p:spPr>
+          <a:xfrm>
+            <a:off x="640080" y="2441448"/>
+            <a:ext cx="566928" cy="566928"/>
+          </a:xfrm>
+          <a:prstGeom prst="ellipse">
+            <a:avLst/>
+          </a:prstGeom>
+          <a:solidFill>
+            <a:srgbClr val="E8910C"/>
+          </a:solidFill>
+          <a:ln/>
+        </p:spPr>
+      </p:sp>
+      <p:sp>
+        <p:nvSpPr>
+          <p:cNvPr id="10" name="Text 8"/>
+          <p:cNvSpPr/>
+          <p:nvPr/>
+        </p:nvSpPr>
+        <p:spPr>
+          <a:xfrm>
+            <a:off x="640080" y="2423160"/>
+            <a:ext cx="566928" cy="566928"/>
+          </a:xfrm>
+          <a:prstGeom prst="rect">
+            <a:avLst/>
+          </a:prstGeom>
+          <a:noFill/>
+          <a:ln/>
+        </p:spPr>
+        <p:txBody>
+          <a:bodyPr wrap="square" lIns="0" tIns="0" rIns="0" bIns="0" rtlCol="0" anchor="ctr"/>
+          <a:lstStyle/>
+          <a:p>
+            <a:pPr algn="ctr" indent="0" marL="0">
+              <a:buNone/>
+            </a:pPr>
+            <a:r>
+              <a:rPr lang="en-US" sz="1800" b="1" dirty="0">
+                <a:solidFill>
+                  <a:srgbClr val="FFFFFF"/>
+                </a:solidFill>
+                <a:latin typeface="Malgun Gothic" pitchFamily="34" charset="0"/>
+                <a:ea typeface="Malgun Gothic" pitchFamily="34" charset="-122"/>
+                <a:cs typeface="Malgun Gothic" pitchFamily="34" charset="-120"/>
+              </a:rPr>
+              <a:t>2</a:t>
+            </a:r>
+            <a:endParaRPr lang="en-US" sz="1800" dirty="0"/>
+          </a:p>
+        </p:txBody>
+      </p:sp>
+      <p:sp>
+        <p:nvSpPr>
+          <p:cNvPr id="11" name="Shape 9"/>
+          <p:cNvSpPr/>
+          <p:nvPr/>
+        </p:nvSpPr>
+        <p:spPr>
+          <a:xfrm>
+            <a:off x="1417320" y="2395728"/>
+            <a:ext cx="10195560" cy="658368"/>
+          </a:xfrm>
+          <a:prstGeom prst="roundRect">
+            <a:avLst>
+              <a:gd name="adj" fmla="val 9722"/>
+            </a:avLst>
+          </a:prstGeom>
+          <a:solidFill>
+            <a:srgbClr val="FFFFFF"/>
+          </a:solidFill>
+          <a:ln w="12700">
+            <a:solidFill>
+              <a:srgbClr val="E8910C"/>
+            </a:solidFill>
+            <a:prstDash val="solid"/>
+          </a:ln>
+          <a:effectLst>
+            <a:outerShdw sx="100000" sy="100000" kx="0" ky="0" algn="bl" rotWithShape="0" blurRad="101600" dist="38100" dir="8100000">
+              <a:srgbClr val="1A1145">
+                <a:alpha val="16000"/>
+              </a:srgbClr>
+            </a:outerShdw>
+          </a:effectLst>
+        </p:spPr>
+      </p:sp>
+      <p:sp>
+        <p:nvSpPr>
+          <p:cNvPr id="12" name="Text 10"/>
+          <p:cNvSpPr/>
+          <p:nvPr/>
+        </p:nvSpPr>
+        <p:spPr>
+          <a:xfrm>
+            <a:off x="1645920" y="2395728"/>
+            <a:ext cx="2286000" cy="658368"/>
+          </a:xfrm>
+          <a:prstGeom prst="rect">
+            <a:avLst/>
+          </a:prstGeom>
+          <a:noFill/>
+          <a:ln/>
+        </p:spPr>
+        <p:txBody>
+          <a:bodyPr wrap="square" lIns="0" tIns="0" rIns="0" bIns="0" rtlCol="0" anchor="ctr"/>
+          <a:lstStyle/>
+          <a:p>
+            <a:pPr indent="0" marL="0">
+              <a:buNone/>
+            </a:pPr>
+            <a:r>
+              <a:rPr lang="en-US" sz="1400" b="1" dirty="0">
+                <a:solidFill>
+                  <a:srgbClr val="E8910C"/>
+                </a:solidFill>
+                <a:latin typeface="Malgun Gothic" pitchFamily="34" charset="0"/>
+                <a:ea typeface="Malgun Gothic" pitchFamily="34" charset="-122"/>
+                <a:cs typeface="Malgun Gothic" pitchFamily="34" charset="-120"/>
+              </a:rPr>
+              <a:t>Staging 신설</a:t>
+            </a:r>
+            <a:endParaRPr lang="en-US" sz="1400" dirty="0"/>
+          </a:p>
+        </p:txBody>
+      </p:sp>
+      <p:sp>
+        <p:nvSpPr>
+          <p:cNvPr id="13" name="Text 11"/>
+          <p:cNvSpPr/>
+          <p:nvPr/>
+        </p:nvSpPr>
+        <p:spPr>
+          <a:xfrm>
+            <a:off x="3931920" y="2395728"/>
+            <a:ext cx="7498080" cy="658368"/>
+          </a:xfrm>
+          <a:prstGeom prst="rect">
+            <a:avLst/>
+          </a:prstGeom>
+          <a:noFill/>
+          <a:ln/>
+        </p:spPr>
+        <p:txBody>
+          <a:bodyPr wrap="square" lIns="0" tIns="0" rIns="0" bIns="0" rtlCol="0" anchor="ctr"/>
+          <a:lstStyle/>
+          <a:p>
+            <a:pPr indent="0" marL="0">
+              <a:buNone/>
+            </a:pPr>
+            <a:r>
+              <a:rPr lang="en-US" sz="1150" dirty="0">
+                <a:solidFill>
+                  <a:srgbClr val="241B3A"/>
+                </a:solidFill>
+                <a:latin typeface="Malgun Gothic" pitchFamily="34" charset="0"/>
+                <a:ea typeface="Malgun Gothic" pitchFamily="34" charset="-122"/>
+                <a:cs typeface="Malgun Gothic" pitchFamily="34" charset="-120"/>
+              </a:rPr>
+              <a:t>Supabase Staging 프로젝트 + sql/NNN 재생으로 스키마 복제 + 합성 데이터</a:t>
+            </a:r>
+            <a:endParaRPr lang="en-US" sz="1150" dirty="0"/>
+          </a:p>
+        </p:txBody>
+      </p:sp>
+      <p:sp>
+        <p:nvSpPr>
+          <p:cNvPr id="14" name="Shape 12"/>
+          <p:cNvSpPr/>
+          <p:nvPr/>
+        </p:nvSpPr>
+        <p:spPr>
+          <a:xfrm>
+            <a:off x="640080" y="3191256"/>
+            <a:ext cx="566928" cy="566928"/>
+          </a:xfrm>
+          <a:prstGeom prst="ellipse">
+            <a:avLst/>
+          </a:prstGeom>
+          <a:solidFill>
+            <a:srgbClr val="2563EB"/>
+          </a:solidFill>
+          <a:ln/>
+        </p:spPr>
+      </p:sp>
+      <p:sp>
+        <p:nvSpPr>
+          <p:cNvPr id="15" name="Text 13"/>
+          <p:cNvSpPr/>
+          <p:nvPr/>
+        </p:nvSpPr>
+        <p:spPr>
+          <a:xfrm>
+            <a:off x="640080" y="3172968"/>
+            <a:ext cx="566928" cy="566928"/>
+          </a:xfrm>
+          <a:prstGeom prst="rect">
+            <a:avLst/>
+          </a:prstGeom>
+          <a:noFill/>
+          <a:ln/>
+        </p:spPr>
+        <p:txBody>
+          <a:bodyPr wrap="square" lIns="0" tIns="0" rIns="0" bIns="0" rtlCol="0" anchor="ctr"/>
+          <a:lstStyle/>
+          <a:p>
+            <a:pPr algn="ctr" indent="0" marL="0">
+              <a:buNone/>
+            </a:pPr>
+            <a:r>
+              <a:rPr lang="en-US" sz="1800" b="1" dirty="0">
+                <a:solidFill>
+                  <a:srgbClr val="FFFFFF"/>
+                </a:solidFill>
+                <a:latin typeface="Malgun Gothic" pitchFamily="34" charset="0"/>
+                <a:ea typeface="Malgun Gothic" pitchFamily="34" charset="-122"/>
+                <a:cs typeface="Malgun Gothic" pitchFamily="34" charset="-120"/>
+              </a:rPr>
+              <a:t>3</a:t>
+            </a:r>
+            <a:endParaRPr lang="en-US" sz="1800" dirty="0"/>
+          </a:p>
+        </p:txBody>
+      </p:sp>
+      <p:sp>
+        <p:nvSpPr>
+          <p:cNvPr id="16" name="Shape 14"/>
+          <p:cNvSpPr/>
+          <p:nvPr/>
+        </p:nvSpPr>
+        <p:spPr>
+          <a:xfrm>
+            <a:off x="1417320" y="3145536"/>
+            <a:ext cx="10195560" cy="658368"/>
+          </a:xfrm>
+          <a:prstGeom prst="roundRect">
+            <a:avLst>
+              <a:gd name="adj" fmla="val 9722"/>
+            </a:avLst>
+          </a:prstGeom>
+          <a:solidFill>
+            <a:srgbClr val="FFFFFF"/>
+          </a:solidFill>
+          <a:ln w="12700">
+            <a:solidFill>
+              <a:srgbClr val="2563EB"/>
+            </a:solidFill>
+            <a:prstDash val="solid"/>
+          </a:ln>
+          <a:effectLst>
+            <a:outerShdw sx="100000" sy="100000" kx="0" ky="0" algn="bl" rotWithShape="0" blurRad="101600" dist="38100" dir="8100000">
+              <a:srgbClr val="1A1145">
+                <a:alpha val="16000"/>
+              </a:srgbClr>
+            </a:outerShdw>
+          </a:effectLst>
+        </p:spPr>
+      </p:sp>
+      <p:sp>
+        <p:nvSpPr>
+          <p:cNvPr id="17" name="Text 15"/>
+          <p:cNvSpPr/>
+          <p:nvPr/>
+        </p:nvSpPr>
+        <p:spPr>
+          <a:xfrm>
+            <a:off x="1645920" y="3145536"/>
+            <a:ext cx="2286000" cy="658368"/>
+          </a:xfrm>
+          <a:prstGeom prst="rect">
+            <a:avLst/>
+          </a:prstGeom>
+          <a:noFill/>
+          <a:ln/>
+        </p:spPr>
+        <p:txBody>
+          <a:bodyPr wrap="square" lIns="0" tIns="0" rIns="0" bIns="0" rtlCol="0" anchor="ctr"/>
+          <a:lstStyle/>
+          <a:p>
+            <a:pPr indent="0" marL="0">
+              <a:buNone/>
+            </a:pPr>
+            <a:r>
+              <a:rPr lang="en-US" sz="1400" b="1" dirty="0">
+                <a:solidFill>
+                  <a:srgbClr val="2563EB"/>
+                </a:solidFill>
+                <a:latin typeface="Malgun Gothic" pitchFamily="34" charset="0"/>
+                <a:ea typeface="Malgun Gothic" pitchFamily="34" charset="-122"/>
+                <a:cs typeface="Malgun Gothic" pitchFamily="34" charset="-120"/>
+              </a:rPr>
+              <a:t>Dev 구성</a:t>
+            </a:r>
+            <a:endParaRPr lang="en-US" sz="1400" dirty="0"/>
+          </a:p>
+        </p:txBody>
+      </p:sp>
+      <p:sp>
+        <p:nvSpPr>
+          <p:cNvPr id="18" name="Text 16"/>
+          <p:cNvSpPr/>
+          <p:nvPr/>
+        </p:nvSpPr>
+        <p:spPr>
+          <a:xfrm>
+            <a:off x="3931920" y="3145536"/>
+            <a:ext cx="7498080" cy="658368"/>
+          </a:xfrm>
+          <a:prstGeom prst="rect">
+            <a:avLst/>
+          </a:prstGeom>
+          <a:noFill/>
+          <a:ln/>
+        </p:spPr>
+        <p:txBody>
+          <a:bodyPr wrap="square" lIns="0" tIns="0" rIns="0" bIns="0" rtlCol="0" anchor="ctr"/>
+          <a:lstStyle/>
+          <a:p>
+            <a:pPr indent="0" marL="0">
+              <a:buNone/>
+            </a:pPr>
+            <a:r>
+              <a:rPr lang="en-US" sz="1150" dirty="0">
+                <a:solidFill>
+                  <a:srgbClr val="241B3A"/>
+                </a:solidFill>
+                <a:latin typeface="Malgun Gothic" pitchFamily="34" charset="0"/>
+                <a:ea typeface="Malgun Gothic" pitchFamily="34" charset="-122"/>
+                <a:cs typeface="Malgun Gothic" pitchFamily="34" charset="-120"/>
+              </a:rPr>
+              <a:t>로컬 Supabase(CLI)로 개발 DB 분리</a:t>
+            </a:r>
+            <a:endParaRPr lang="en-US" sz="1150" dirty="0"/>
+          </a:p>
+        </p:txBody>
+      </p:sp>
+      <p:sp>
+        <p:nvSpPr>
+          <p:cNvPr id="19" name="Shape 17"/>
+          <p:cNvSpPr/>
+          <p:nvPr/>
+        </p:nvSpPr>
+        <p:spPr>
+          <a:xfrm>
+            <a:off x="640080" y="3941064"/>
+            <a:ext cx="566928" cy="566928"/>
+          </a:xfrm>
+          <a:prstGeom prst="ellipse">
+            <a:avLst/>
+          </a:prstGeom>
+          <a:solidFill>
+            <a:srgbClr val="16A34A"/>
+          </a:solidFill>
+          <a:ln/>
+        </p:spPr>
+      </p:sp>
+      <p:sp>
+        <p:nvSpPr>
+          <p:cNvPr id="20" name="Text 18"/>
+          <p:cNvSpPr/>
+          <p:nvPr/>
+        </p:nvSpPr>
+        <p:spPr>
+          <a:xfrm>
+            <a:off x="640080" y="3922776"/>
+            <a:ext cx="566928" cy="566928"/>
+          </a:xfrm>
+          <a:prstGeom prst="rect">
+            <a:avLst/>
+          </a:prstGeom>
+          <a:noFill/>
+          <a:ln/>
+        </p:spPr>
+        <p:txBody>
+          <a:bodyPr wrap="square" lIns="0" tIns="0" rIns="0" bIns="0" rtlCol="0" anchor="ctr"/>
+          <a:lstStyle/>
+          <a:p>
+            <a:pPr algn="ctr" indent="0" marL="0">
+              <a:buNone/>
+            </a:pPr>
+            <a:r>
+              <a:rPr lang="en-US" sz="1800" b="1" dirty="0">
+                <a:solidFill>
+                  <a:srgbClr val="FFFFFF"/>
+                </a:solidFill>
+                <a:latin typeface="Malgun Gothic" pitchFamily="34" charset="0"/>
+                <a:ea typeface="Malgun Gothic" pitchFamily="34" charset="-122"/>
+                <a:cs typeface="Malgun Gothic" pitchFamily="34" charset="-120"/>
+              </a:rPr>
+              <a:t>4</a:t>
+            </a:r>
+            <a:endParaRPr lang="en-US" sz="1800" dirty="0"/>
+          </a:p>
+        </p:txBody>
+      </p:sp>
+      <p:sp>
+        <p:nvSpPr>
+          <p:cNvPr id="21" name="Shape 19"/>
+          <p:cNvSpPr/>
+          <p:nvPr/>
+        </p:nvSpPr>
+        <p:spPr>
+          <a:xfrm>
+            <a:off x="1417320" y="3895344"/>
+            <a:ext cx="10195560" cy="658368"/>
+          </a:xfrm>
+          <a:prstGeom prst="roundRect">
+            <a:avLst>
+              <a:gd name="adj" fmla="val 9722"/>
+            </a:avLst>
+          </a:prstGeom>
+          <a:solidFill>
+            <a:srgbClr val="FFFFFF"/>
+          </a:solidFill>
+          <a:ln w="12700">
+            <a:solidFill>
+              <a:srgbClr val="16A34A"/>
+            </a:solidFill>
+            <a:prstDash val="solid"/>
+          </a:ln>
+          <a:effectLst>
+            <a:outerShdw sx="100000" sy="100000" kx="0" ky="0" algn="bl" rotWithShape="0" blurRad="101600" dist="38100" dir="8100000">
+              <a:srgbClr val="1A1145">
+                <a:alpha val="16000"/>
+              </a:srgbClr>
+            </a:outerShdw>
+          </a:effectLst>
+        </p:spPr>
+      </p:sp>
+      <p:sp>
+        <p:nvSpPr>
+          <p:cNvPr id="22" name="Text 20"/>
+          <p:cNvSpPr/>
+          <p:nvPr/>
+        </p:nvSpPr>
+        <p:spPr>
+          <a:xfrm>
+            <a:off x="1645920" y="3895344"/>
+            <a:ext cx="2286000" cy="658368"/>
+          </a:xfrm>
+          <a:prstGeom prst="rect">
+            <a:avLst/>
+          </a:prstGeom>
+          <a:noFill/>
+          <a:ln/>
+        </p:spPr>
+        <p:txBody>
+          <a:bodyPr wrap="square" lIns="0" tIns="0" rIns="0" bIns="0" rtlCol="0" anchor="ctr"/>
+          <a:lstStyle/>
+          <a:p>
+            <a:pPr indent="0" marL="0">
+              <a:buNone/>
+            </a:pPr>
+            <a:r>
+              <a:rPr lang="en-US" sz="1400" b="1" dirty="0">
+                <a:solidFill>
+                  <a:srgbClr val="16A34A"/>
+                </a:solidFill>
+                <a:latin typeface="Malgun Gothic" pitchFamily="34" charset="0"/>
+                <a:ea typeface="Malgun Gothic" pitchFamily="34" charset="-122"/>
+                <a:cs typeface="Malgun Gothic" pitchFamily="34" charset="-120"/>
+              </a:rPr>
+              <a:t>스코프 분리</a:t>
+            </a:r>
+            <a:endParaRPr lang="en-US" sz="1400" dirty="0"/>
+          </a:p>
+        </p:txBody>
+      </p:sp>
+      <p:sp>
+        <p:nvSpPr>
+          <p:cNvPr id="23" name="Text 21"/>
+          <p:cNvSpPr/>
+          <p:nvPr/>
+        </p:nvSpPr>
+        <p:spPr>
+          <a:xfrm>
+            <a:off x="3931920" y="3895344"/>
+            <a:ext cx="7498080" cy="658368"/>
+          </a:xfrm>
+          <a:prstGeom prst="rect">
+            <a:avLst/>
+          </a:prstGeom>
+          <a:noFill/>
+          <a:ln/>
+        </p:spPr>
+        <p:txBody>
+          <a:bodyPr wrap="square" lIns="0" tIns="0" rIns="0" bIns="0" rtlCol="0" anchor="ctr"/>
+          <a:lstStyle/>
+          <a:p>
+            <a:pPr indent="0" marL="0">
+              <a:buNone/>
+            </a:pPr>
+            <a:r>
+              <a:rPr lang="en-US" sz="1150" dirty="0">
+                <a:solidFill>
+                  <a:srgbClr val="241B3A"/>
+                </a:solidFill>
+                <a:latin typeface="Malgun Gothic" pitchFamily="34" charset="0"/>
+                <a:ea typeface="Malgun Gothic" pitchFamily="34" charset="-122"/>
+                <a:cs typeface="Malgun Gothic" pitchFamily="34" charset="-120"/>
+              </a:rPr>
+              <a:t>Vercel env 3분리 — 각자 자기 DB·Pi 설정 가리키게</a:t>
+            </a:r>
+            <a:endParaRPr lang="en-US" sz="1150" dirty="0"/>
+          </a:p>
+        </p:txBody>
+      </p:sp>
+      <p:sp>
+        <p:nvSpPr>
+          <p:cNvPr id="24" name="Shape 22"/>
+          <p:cNvSpPr/>
+          <p:nvPr/>
+        </p:nvSpPr>
+        <p:spPr>
+          <a:xfrm>
+            <a:off x="640080" y="4690872"/>
+            <a:ext cx="566928" cy="566928"/>
+          </a:xfrm>
+          <a:prstGeom prst="ellipse">
+            <a:avLst/>
           </a:prstGeom>
           <a:solidFill>
             <a:srgbClr val="2A1A66"/>
@@ -9550,14 +10649,14 @@
       </p:sp>
       <p:sp>
         <p:nvSpPr>
-          <p:cNvPr id="7" name="Text 5"/>
-          <p:cNvSpPr/>
-          <p:nvPr/>
-        </p:nvSpPr>
-        <p:spPr>
-          <a:xfrm>
-            <a:off x="914400" y="2057400"/>
-            <a:ext cx="548640" cy="676656"/>
+          <p:cNvPr id="25" name="Text 23"/>
+          <p:cNvSpPr/>
+          <p:nvPr/>
+        </p:nvSpPr>
+        <p:spPr>
+          <a:xfrm>
+            <a:off x="640080" y="4672584"/>
+            <a:ext cx="566928" cy="566928"/>
           </a:xfrm>
           <a:prstGeom prst="rect">
             <a:avLst/>
@@ -9573,46 +10672,7 @@
               <a:buNone/>
             </a:pPr>
             <a:r>
-              <a:rPr lang="en-US" sz="2000" b="1" dirty="0">
-                <a:solidFill>
-                  <a:srgbClr val="F5B731"/>
-                </a:solidFill>
-                <a:latin typeface="Malgun Gothic" pitchFamily="34" charset="0"/>
-                <a:ea typeface="Malgun Gothic" pitchFamily="34" charset="-122"/>
-                <a:cs typeface="Malgun Gothic" pitchFamily="34" charset="-120"/>
-              </a:rPr>
-              <a:t>1</a:t>
-            </a:r>
-            <a:endParaRPr lang="en-US" sz="2000" dirty="0"/>
-          </a:p>
-        </p:txBody>
-      </p:sp>
-      <p:sp>
-        <p:nvSpPr>
-          <p:cNvPr id="8" name="Text 6"/>
-          <p:cNvSpPr/>
-          <p:nvPr/>
-        </p:nvSpPr>
-        <p:spPr>
-          <a:xfrm>
-            <a:off x="1600200" y="2057400"/>
-            <a:ext cx="9601200" cy="676656"/>
-          </a:xfrm>
-          <a:prstGeom prst="rect">
-            <a:avLst/>
-          </a:prstGeom>
-          <a:noFill/>
-          <a:ln/>
-        </p:spPr>
-        <p:txBody>
-          <a:bodyPr wrap="square" lIns="0" tIns="0" rIns="0" bIns="0" rtlCol="0" anchor="ctr"/>
-          <a:lstStyle/>
-          <a:p>
-            <a:pPr indent="0" marL="0">
-              <a:buNone/>
-            </a:pPr>
-            <a:r>
-              <a:rPr lang="en-US" sz="1450" b="1" dirty="0">
+              <a:rPr lang="en-US" sz="1800" b="1" dirty="0">
                 <a:solidFill>
                   <a:srgbClr val="FFFFFF"/>
                 </a:solidFill>
@@ -9620,44 +10680,154 @@
                 <a:ea typeface="Malgun Gothic" pitchFamily="34" charset="-122"/>
                 <a:cs typeface="Malgun Gothic" pitchFamily="34" charset="-120"/>
               </a:rPr>
-              <a:t>DB는 환경마다 분리 — 절대 공유 금지</a:t>
-            </a:r>
-            <a:endParaRPr lang="en-US" sz="1450" dirty="0"/>
-          </a:p>
-        </p:txBody>
-      </p:sp>
-      <p:sp>
-        <p:nvSpPr>
-          <p:cNvPr id="9" name="Shape 7"/>
-          <p:cNvSpPr/>
-          <p:nvPr/>
-        </p:nvSpPr>
-        <p:spPr>
-          <a:xfrm>
-            <a:off x="731520" y="2834640"/>
-            <a:ext cx="10698480" cy="676656"/>
+              <a:t>5</a:t>
+            </a:r>
+            <a:endParaRPr lang="en-US" sz="1800" dirty="0"/>
+          </a:p>
+        </p:txBody>
+      </p:sp>
+      <p:sp>
+        <p:nvSpPr>
+          <p:cNvPr id="26" name="Shape 24"/>
+          <p:cNvSpPr/>
+          <p:nvPr/>
+        </p:nvSpPr>
+        <p:spPr>
+          <a:xfrm>
+            <a:off x="1417320" y="4645152"/>
+            <a:ext cx="10195560" cy="658368"/>
           </a:xfrm>
           <a:prstGeom prst="roundRect">
             <a:avLst>
-              <a:gd name="adj" fmla="val 9459"/>
+              <a:gd name="adj" fmla="val 9722"/>
             </a:avLst>
           </a:prstGeom>
           <a:solidFill>
-            <a:srgbClr val="2A1A66"/>
+            <a:srgbClr val="FFFFFF"/>
           </a:solidFill>
-          <a:ln/>
-        </p:spPr>
-      </p:sp>
-      <p:sp>
-        <p:nvSpPr>
-          <p:cNvPr id="10" name="Text 8"/>
-          <p:cNvSpPr/>
-          <p:nvPr/>
-        </p:nvSpPr>
-        <p:spPr>
-          <a:xfrm>
-            <a:off x="914400" y="2834640"/>
-            <a:ext cx="548640" cy="676656"/>
+          <a:ln w="12700">
+            <a:solidFill>
+              <a:srgbClr val="2A1A66"/>
+            </a:solidFill>
+            <a:prstDash val="solid"/>
+          </a:ln>
+          <a:effectLst>
+            <a:outerShdw sx="100000" sy="100000" kx="0" ky="0" algn="bl" rotWithShape="0" blurRad="101600" dist="38100" dir="8100000">
+              <a:srgbClr val="1A1145">
+                <a:alpha val="16000"/>
+              </a:srgbClr>
+            </a:outerShdw>
+          </a:effectLst>
+        </p:spPr>
+      </p:sp>
+      <p:sp>
+        <p:nvSpPr>
+          <p:cNvPr id="27" name="Text 25"/>
+          <p:cNvSpPr/>
+          <p:nvPr/>
+        </p:nvSpPr>
+        <p:spPr>
+          <a:xfrm>
+            <a:off x="1645920" y="4645152"/>
+            <a:ext cx="2286000" cy="658368"/>
+          </a:xfrm>
+          <a:prstGeom prst="rect">
+            <a:avLst/>
+          </a:prstGeom>
+          <a:noFill/>
+          <a:ln/>
+        </p:spPr>
+        <p:txBody>
+          <a:bodyPr wrap="square" lIns="0" tIns="0" rIns="0" bIns="0" rtlCol="0" anchor="ctr"/>
+          <a:lstStyle/>
+          <a:p>
+            <a:pPr indent="0" marL="0">
+              <a:buNone/>
+            </a:pPr>
+            <a:r>
+              <a:rPr lang="en-US" sz="1400" b="1" dirty="0">
+                <a:solidFill>
+                  <a:srgbClr val="2A1A66"/>
+                </a:solidFill>
+                <a:latin typeface="Malgun Gothic" pitchFamily="34" charset="0"/>
+                <a:ea typeface="Malgun Gothic" pitchFamily="34" charset="-122"/>
+                <a:cs typeface="Malgun Gothic" pitchFamily="34" charset="-120"/>
+              </a:rPr>
+              <a:t>파이프라인</a:t>
+            </a:r>
+            <a:endParaRPr lang="en-US" sz="1400" dirty="0"/>
+          </a:p>
+        </p:txBody>
+      </p:sp>
+      <p:sp>
+        <p:nvSpPr>
+          <p:cNvPr id="28" name="Text 26"/>
+          <p:cNvSpPr/>
+          <p:nvPr/>
+        </p:nvSpPr>
+        <p:spPr>
+          <a:xfrm>
+            <a:off x="3931920" y="4645152"/>
+            <a:ext cx="7498080" cy="658368"/>
+          </a:xfrm>
+          <a:prstGeom prst="rect">
+            <a:avLst/>
+          </a:prstGeom>
+          <a:noFill/>
+          <a:ln/>
+        </p:spPr>
+        <p:txBody>
+          <a:bodyPr wrap="square" lIns="0" tIns="0" rIns="0" bIns="0" rtlCol="0" anchor="ctr"/>
+          <a:lstStyle/>
+          <a:p>
+            <a:pPr indent="0" marL="0">
+              <a:buNone/>
+            </a:pPr>
+            <a:r>
+              <a:rPr lang="en-US" sz="1150" dirty="0">
+                <a:solidFill>
+                  <a:srgbClr val="241B3A"/>
+                </a:solidFill>
+                <a:latin typeface="Malgun Gothic" pitchFamily="34" charset="0"/>
+                <a:ea typeface="Malgun Gothic" pitchFamily="34" charset="-122"/>
+                <a:cs typeface="Malgun Gothic" pitchFamily="34" charset="-120"/>
+              </a:rPr>
+              <a:t>마이그레이션 규율 확립: Dev→Staging→Prod 순차 적용</a:t>
+            </a:r>
+            <a:endParaRPr lang="en-US" sz="1150" dirty="0"/>
+          </a:p>
+        </p:txBody>
+      </p:sp>
+      <p:sp>
+        <p:nvSpPr>
+          <p:cNvPr id="29" name="Shape 27"/>
+          <p:cNvSpPr/>
+          <p:nvPr/>
+        </p:nvSpPr>
+        <p:spPr>
+          <a:xfrm>
+            <a:off x="640080" y="5440680"/>
+            <a:ext cx="566928" cy="566928"/>
+          </a:xfrm>
+          <a:prstGeom prst="ellipse">
+            <a:avLst/>
+          </a:prstGeom>
+          <a:solidFill>
+            <a:srgbClr val="C98A12"/>
+          </a:solidFill>
+          <a:ln/>
+        </p:spPr>
+      </p:sp>
+      <p:sp>
+        <p:nvSpPr>
+          <p:cNvPr id="30" name="Text 28"/>
+          <p:cNvSpPr/>
+          <p:nvPr/>
+        </p:nvSpPr>
+        <p:spPr>
+          <a:xfrm>
+            <a:off x="640080" y="5422392"/>
+            <a:ext cx="566928" cy="566928"/>
           </a:xfrm>
           <a:prstGeom prst="rect">
             <a:avLst/>
@@ -9673,46 +10843,7 @@
               <a:buNone/>
             </a:pPr>
             <a:r>
-              <a:rPr lang="en-US" sz="2000" b="1" dirty="0">
-                <a:solidFill>
-                  <a:srgbClr val="F5B731"/>
-                </a:solidFill>
-                <a:latin typeface="Malgun Gothic" pitchFamily="34" charset="0"/>
-                <a:ea typeface="Malgun Gothic" pitchFamily="34" charset="-122"/>
-                <a:cs typeface="Malgun Gothic" pitchFamily="34" charset="-120"/>
-              </a:rPr>
-              <a:t>2</a:t>
-            </a:r>
-            <a:endParaRPr lang="en-US" sz="2000" dirty="0"/>
-          </a:p>
-        </p:txBody>
-      </p:sp>
-      <p:sp>
-        <p:nvSpPr>
-          <p:cNvPr id="11" name="Text 9"/>
-          <p:cNvSpPr/>
-          <p:nvPr/>
-        </p:nvSpPr>
-        <p:spPr>
-          <a:xfrm>
-            <a:off x="1600200" y="2834640"/>
-            <a:ext cx="9601200" cy="676656"/>
-          </a:xfrm>
-          <a:prstGeom prst="rect">
-            <a:avLst/>
-          </a:prstGeom>
-          <a:noFill/>
-          <a:ln/>
-        </p:spPr>
-        <p:txBody>
-          <a:bodyPr wrap="square" lIns="0" tIns="0" rIns="0" bIns="0" rtlCol="0" anchor="ctr"/>
-          <a:lstStyle/>
-          <a:p>
-            <a:pPr indent="0" marL="0">
-              <a:buNone/>
-            </a:pPr>
-            <a:r>
-              <a:rPr lang="en-US" sz="1450" b="1" dirty="0">
+              <a:rPr lang="en-US" sz="1800" b="1" dirty="0">
                 <a:solidFill>
                   <a:srgbClr val="FFFFFF"/>
                 </a:solidFill>
@@ -9720,83 +10851,56 @@
                 <a:ea typeface="Malgun Gothic" pitchFamily="34" charset="-122"/>
                 <a:cs typeface="Malgun Gothic" pitchFamily="34" charset="-120"/>
               </a:rPr>
-              <a:t>마이그레이션은 Dev → Staging → Prod 순서로만</a:t>
-            </a:r>
-            <a:endParaRPr lang="en-US" sz="1450" dirty="0"/>
-          </a:p>
-        </p:txBody>
-      </p:sp>
-      <p:sp>
-        <p:nvSpPr>
-          <p:cNvPr id="12" name="Shape 10"/>
-          <p:cNvSpPr/>
-          <p:nvPr/>
-        </p:nvSpPr>
-        <p:spPr>
-          <a:xfrm>
-            <a:off x="731520" y="3611880"/>
-            <a:ext cx="10698480" cy="676656"/>
+              <a:t>6</a:t>
+            </a:r>
+            <a:endParaRPr lang="en-US" sz="1800" dirty="0"/>
+          </a:p>
+        </p:txBody>
+      </p:sp>
+      <p:sp>
+        <p:nvSpPr>
+          <p:cNvPr id="31" name="Shape 29"/>
+          <p:cNvSpPr/>
+          <p:nvPr/>
+        </p:nvSpPr>
+        <p:spPr>
+          <a:xfrm>
+            <a:off x="1417320" y="5394960"/>
+            <a:ext cx="10195560" cy="658368"/>
           </a:xfrm>
           <a:prstGeom prst="roundRect">
             <a:avLst>
-              <a:gd name="adj" fmla="val 9459"/>
+              <a:gd name="adj" fmla="val 9722"/>
             </a:avLst>
           </a:prstGeom>
           <a:solidFill>
-            <a:srgbClr val="2A1A66"/>
+            <a:srgbClr val="FFFFFF"/>
           </a:solidFill>
-          <a:ln/>
-        </p:spPr>
-      </p:sp>
-      <p:sp>
-        <p:nvSpPr>
-          <p:cNvPr id="13" name="Text 11"/>
-          <p:cNvSpPr/>
-          <p:nvPr/>
-        </p:nvSpPr>
-        <p:spPr>
-          <a:xfrm>
-            <a:off x="914400" y="3611880"/>
-            <a:ext cx="548640" cy="676656"/>
-          </a:xfrm>
-          <a:prstGeom prst="rect">
-            <a:avLst/>
-          </a:prstGeom>
-          <a:noFill/>
-          <a:ln/>
-        </p:spPr>
-        <p:txBody>
-          <a:bodyPr wrap="square" lIns="0" tIns="0" rIns="0" bIns="0" rtlCol="0" anchor="ctr"/>
-          <a:lstStyle/>
-          <a:p>
-            <a:pPr algn="ctr" indent="0" marL="0">
-              <a:buNone/>
-            </a:pPr>
-            <a:r>
-              <a:rPr lang="en-US" sz="2000" b="1" dirty="0">
-                <a:solidFill>
-                  <a:srgbClr val="F5B731"/>
-                </a:solidFill>
-                <a:latin typeface="Malgun Gothic" pitchFamily="34" charset="0"/>
-                <a:ea typeface="Malgun Gothic" pitchFamily="34" charset="-122"/>
-                <a:cs typeface="Malgun Gothic" pitchFamily="34" charset="-120"/>
-              </a:rPr>
-              <a:t>3</a:t>
-            </a:r>
-            <a:endParaRPr lang="en-US" sz="2000" dirty="0"/>
-          </a:p>
-        </p:txBody>
-      </p:sp>
-      <p:sp>
-        <p:nvSpPr>
-          <p:cNvPr id="14" name="Text 12"/>
-          <p:cNvSpPr/>
-          <p:nvPr/>
-        </p:nvSpPr>
-        <p:spPr>
-          <a:xfrm>
-            <a:off x="1600200" y="3611880"/>
-            <a:ext cx="9601200" cy="676656"/>
+          <a:ln w="12700">
+            <a:solidFill>
+              <a:srgbClr val="C98A12"/>
+            </a:solidFill>
+            <a:prstDash val="solid"/>
+          </a:ln>
+          <a:effectLst>
+            <a:outerShdw sx="100000" sy="100000" kx="0" ky="0" algn="bl" rotWithShape="0" blurRad="101600" dist="38100" dir="8100000">
+              <a:srgbClr val="1A1145">
+                <a:alpha val="16000"/>
+              </a:srgbClr>
+            </a:outerShdw>
+          </a:effectLst>
+        </p:spPr>
+      </p:sp>
+      <p:sp>
+        <p:nvSpPr>
+          <p:cNvPr id="32" name="Text 30"/>
+          <p:cNvSpPr/>
+          <p:nvPr/>
+        </p:nvSpPr>
+        <p:spPr>
+          <a:xfrm>
+            <a:off x="1645920" y="5394960"/>
+            <a:ext cx="2286000" cy="658368"/>
           </a:xfrm>
           <a:prstGeom prst="rect">
             <a:avLst/>
@@ -9812,91 +10916,30 @@
               <a:buNone/>
             </a:pPr>
             <a:r>
-              <a:rPr lang="en-US" sz="1450" b="1" dirty="0">
-                <a:solidFill>
-                  <a:srgbClr val="FFFFFF"/>
-                </a:solidFill>
-                <a:latin typeface="Malgun Gothic" pitchFamily="34" charset="0"/>
-                <a:ea typeface="Malgun Gothic" pitchFamily="34" charset="-122"/>
-                <a:cs typeface="Malgun Gothic" pitchFamily="34" charset="-120"/>
-              </a:rPr>
-              <a:t>운영 데이터·시크릿은 하위 환경으로 흐르지 않는다</a:t>
-            </a:r>
-            <a:endParaRPr lang="en-US" sz="1450" dirty="0"/>
-          </a:p>
-        </p:txBody>
-      </p:sp>
-      <p:sp>
-        <p:nvSpPr>
-          <p:cNvPr id="15" name="Shape 13"/>
-          <p:cNvSpPr/>
-          <p:nvPr/>
-        </p:nvSpPr>
-        <p:spPr>
-          <a:xfrm>
-            <a:off x="731520" y="4389120"/>
-            <a:ext cx="10698480" cy="676656"/>
-          </a:xfrm>
-          <a:prstGeom prst="roundRect">
-            <a:avLst>
-              <a:gd name="adj" fmla="val 9459"/>
-            </a:avLst>
-          </a:prstGeom>
-          <a:solidFill>
-            <a:srgbClr val="2A1A66"/>
-          </a:solidFill>
-          <a:ln/>
-        </p:spPr>
-      </p:sp>
-      <p:sp>
-        <p:nvSpPr>
-          <p:cNvPr id="16" name="Text 14"/>
-          <p:cNvSpPr/>
-          <p:nvPr/>
-        </p:nvSpPr>
-        <p:spPr>
-          <a:xfrm>
-            <a:off x="914400" y="4389120"/>
-            <a:ext cx="548640" cy="676656"/>
-          </a:xfrm>
-          <a:prstGeom prst="rect">
-            <a:avLst/>
-          </a:prstGeom>
-          <a:noFill/>
-          <a:ln/>
-        </p:spPr>
-        <p:txBody>
-          <a:bodyPr wrap="square" lIns="0" tIns="0" rIns="0" bIns="0" rtlCol="0" anchor="ctr"/>
-          <a:lstStyle/>
-          <a:p>
-            <a:pPr algn="ctr" indent="0" marL="0">
-              <a:buNone/>
-            </a:pPr>
-            <a:r>
-              <a:rPr lang="en-US" sz="2000" b="1" dirty="0">
-                <a:solidFill>
-                  <a:srgbClr val="F5B731"/>
-                </a:solidFill>
-                <a:latin typeface="Malgun Gothic" pitchFamily="34" charset="0"/>
-                <a:ea typeface="Malgun Gothic" pitchFamily="34" charset="-122"/>
-                <a:cs typeface="Malgun Gothic" pitchFamily="34" charset="-120"/>
-              </a:rPr>
-              <a:t>4</a:t>
-            </a:r>
-            <a:endParaRPr lang="en-US" sz="2000" dirty="0"/>
-          </a:p>
-        </p:txBody>
-      </p:sp>
-      <p:sp>
-        <p:nvSpPr>
-          <p:cNvPr id="17" name="Text 15"/>
-          <p:cNvSpPr/>
-          <p:nvPr/>
-        </p:nvSpPr>
-        <p:spPr>
-          <a:xfrm>
-            <a:off x="1600200" y="4389120"/>
-            <a:ext cx="9601200" cy="676656"/>
+              <a:rPr lang="en-US" sz="1400" b="1" dirty="0">
+                <a:solidFill>
+                  <a:srgbClr val="C98A12"/>
+                </a:solidFill>
+                <a:latin typeface="Malgun Gothic" pitchFamily="34" charset="0"/>
+                <a:ea typeface="Malgun Gothic" pitchFamily="34" charset="-122"/>
+                <a:cs typeface="Malgun Gothic" pitchFamily="34" charset="-120"/>
+              </a:rPr>
+              <a:t>메인넷 컷오버</a:t>
+            </a:r>
+            <a:endParaRPr lang="en-US" sz="1400" dirty="0"/>
+          </a:p>
+        </p:txBody>
+      </p:sp>
+      <p:sp>
+        <p:nvSpPr>
+          <p:cNvPr id="33" name="Text 31"/>
+          <p:cNvSpPr/>
+          <p:nvPr/>
+        </p:nvSpPr>
+        <p:spPr>
+          <a:xfrm>
+            <a:off x="3931920" y="5394960"/>
+            <a:ext cx="7498080" cy="658368"/>
           </a:xfrm>
           <a:prstGeom prst="rect">
             <a:avLst/>
@@ -9912,91 +10955,69 @@
               <a:buNone/>
             </a:pPr>
             <a:r>
-              <a:rPr lang="en-US" sz="1450" b="1" dirty="0">
-                <a:solidFill>
-                  <a:srgbClr val="FFFFFF"/>
-                </a:solidFill>
-                <a:latin typeface="Malgun Gothic" pitchFamily="34" charset="0"/>
-                <a:ea typeface="Malgun Gothic" pitchFamily="34" charset="-122"/>
-                <a:cs typeface="Malgun Gothic" pitchFamily="34" charset="-120"/>
-              </a:rPr>
-              <a:t>코드는 git, 스키마는 sql/NNN — 둘 다 단방향 승격</a:t>
-            </a:r>
-            <a:endParaRPr lang="en-US" sz="1450" dirty="0"/>
-          </a:p>
-        </p:txBody>
-      </p:sp>
-      <p:sp>
-        <p:nvSpPr>
-          <p:cNvPr id="18" name="Shape 16"/>
-          <p:cNvSpPr/>
-          <p:nvPr/>
-        </p:nvSpPr>
-        <p:spPr>
-          <a:xfrm>
-            <a:off x="731520" y="5166360"/>
-            <a:ext cx="10698480" cy="676656"/>
-          </a:xfrm>
-          <a:prstGeom prst="roundRect">
-            <a:avLst>
-              <a:gd name="adj" fmla="val 9459"/>
-            </a:avLst>
-          </a:prstGeom>
-          <a:solidFill>
-            <a:srgbClr val="2A1A66"/>
-          </a:solidFill>
-          <a:ln/>
-        </p:spPr>
-      </p:sp>
-      <p:sp>
-        <p:nvSpPr>
-          <p:cNvPr id="19" name="Text 17"/>
-          <p:cNvSpPr/>
-          <p:nvPr/>
-        </p:nvSpPr>
-        <p:spPr>
-          <a:xfrm>
-            <a:off x="914400" y="5166360"/>
-            <a:ext cx="548640" cy="676656"/>
-          </a:xfrm>
-          <a:prstGeom prst="rect">
-            <a:avLst/>
-          </a:prstGeom>
-          <a:noFill/>
-          <a:ln/>
-        </p:spPr>
-        <p:txBody>
-          <a:bodyPr wrap="square" lIns="0" tIns="0" rIns="0" bIns="0" rtlCol="0" anchor="ctr"/>
-          <a:lstStyle/>
-          <a:p>
-            <a:pPr algn="ctr" indent="0" marL="0">
-              <a:buNone/>
-            </a:pPr>
-            <a:r>
-              <a:rPr lang="en-US" sz="2000" b="1" dirty="0">
-                <a:solidFill>
-                  <a:srgbClr val="F5B731"/>
-                </a:solidFill>
-                <a:latin typeface="Malgun Gothic" pitchFamily="34" charset="0"/>
-                <a:ea typeface="Malgun Gothic" pitchFamily="34" charset="-122"/>
-                <a:cs typeface="Malgun Gothic" pitchFamily="34" charset="-120"/>
-              </a:rPr>
-              <a:t>5</a:t>
-            </a:r>
-            <a:endParaRPr lang="en-US" sz="2000" dirty="0"/>
-          </a:p>
-        </p:txBody>
-      </p:sp>
-      <p:sp>
-        <p:nvSpPr>
-          <p:cNvPr id="20" name="Text 18"/>
-          <p:cNvSpPr/>
-          <p:nvPr/>
-        </p:nvSpPr>
-        <p:spPr>
-          <a:xfrm>
-            <a:off x="1600200" y="5166360"/>
-            <a:ext cx="9601200" cy="676656"/>
+              <a:rPr lang="en-US" sz="1150" dirty="0">
+                <a:solidFill>
+                  <a:srgbClr val="241B3A"/>
+                </a:solidFill>
+                <a:latin typeface="Malgun Gothic" pitchFamily="34" charset="0"/>
+                <a:ea typeface="Malgun Gothic" pitchFamily="34" charset="-122"/>
+                <a:cs typeface="Malgun Gothic" pitchFamily="34" charset="-120"/>
+              </a:rPr>
+              <a:t>(출시 시점) Prod = Mainnet 전환 — 새 도메인·API Key·지갑</a:t>
+            </a:r>
+            <a:endParaRPr lang="en-US" sz="1150" dirty="0"/>
+          </a:p>
+        </p:txBody>
+      </p:sp>
+      <p:sp>
+        <p:nvSpPr>
+          <p:cNvPr id="34" name="Text 32"/>
+          <p:cNvSpPr/>
+          <p:nvPr/>
+        </p:nvSpPr>
+        <p:spPr>
+          <a:xfrm>
+            <a:off x="11430000" y="6382512"/>
+            <a:ext cx="548640" cy="320040"/>
+          </a:xfrm>
+          <a:prstGeom prst="rect">
+            <a:avLst/>
+          </a:prstGeom>
+          <a:noFill/>
+          <a:ln/>
+        </p:spPr>
+        <p:txBody>
+          <a:bodyPr wrap="square" lIns="0" tIns="0" rIns="0" bIns="0" rtlCol="0" anchor="ctr"/>
+          <a:lstStyle/>
+          <a:p>
+            <a:pPr algn="r" indent="0" marL="0">
+              <a:buNone/>
+            </a:pPr>
+            <a:r>
+              <a:rPr lang="en-US" sz="1100" dirty="0">
+                <a:solidFill>
+                  <a:srgbClr val="9B8BC4"/>
+                </a:solidFill>
+                <a:latin typeface="Malgun Gothic" pitchFamily="34" charset="0"/>
+                <a:ea typeface="Malgun Gothic" pitchFamily="34" charset="-122"/>
+                <a:cs typeface="Malgun Gothic" pitchFamily="34" charset="-120"/>
+              </a:rPr>
+              <a:t>09</a:t>
+            </a:r>
+            <a:endParaRPr lang="en-US" sz="1100" dirty="0"/>
+          </a:p>
+        </p:txBody>
+      </p:sp>
+      <p:sp>
+        <p:nvSpPr>
+          <p:cNvPr id="35" name="Text 33"/>
+          <p:cNvSpPr/>
+          <p:nvPr/>
+        </p:nvSpPr>
+        <p:spPr>
+          <a:xfrm>
+            <a:off x="548640" y="6382512"/>
+            <a:ext cx="4572000" cy="320040"/>
           </a:xfrm>
           <a:prstGeom prst="rect">
             <a:avLst/>
@@ -10012,45 +11033,6 @@
               <a:buNone/>
             </a:pPr>
             <a:r>
-              <a:rPr lang="en-US" sz="1450" b="1" dirty="0">
-                <a:solidFill>
-                  <a:srgbClr val="FFFFFF"/>
-                </a:solidFill>
-                <a:latin typeface="Malgun Gothic" pitchFamily="34" charset="0"/>
-                <a:ea typeface="Malgun Gothic" pitchFamily="34" charset="-122"/>
-                <a:cs typeface="Malgun Gothic" pitchFamily="34" charset="-120"/>
-              </a:rPr>
-              <a:t>운영 직접 변경 금지 — 항상 스테이징에서 리허설</a:t>
-            </a:r>
-            <a:endParaRPr lang="en-US" sz="1450" dirty="0"/>
-          </a:p>
-        </p:txBody>
-      </p:sp>
-      <p:sp>
-        <p:nvSpPr>
-          <p:cNvPr id="21" name="Text 19"/>
-          <p:cNvSpPr/>
-          <p:nvPr/>
-        </p:nvSpPr>
-        <p:spPr>
-          <a:xfrm>
-            <a:off x="731520" y="6309360"/>
-            <a:ext cx="10058400" cy="320040"/>
-          </a:xfrm>
-          <a:prstGeom prst="rect">
-            <a:avLst/>
-          </a:prstGeom>
-          <a:noFill/>
-          <a:ln/>
-        </p:spPr>
-        <p:txBody>
-          <a:bodyPr wrap="square" lIns="0" tIns="0" rIns="0" bIns="0" rtlCol="0" anchor="ctr"/>
-          <a:lstStyle/>
-          <a:p>
-            <a:pPr indent="0" marL="0">
-              <a:buNone/>
-            </a:pPr>
-            <a:r>
               <a:rPr lang="en-US" sz="1000" dirty="0">
                 <a:solidFill>
                   <a:srgbClr val="9B8BC4"/>
@@ -10059,7 +11041,7 @@
                 <a:ea typeface="Malgun Gothic" pitchFamily="34" charset="-122"/>
                 <a:cs typeface="Malgun Gothic" pitchFamily="34" charset="-120"/>
               </a:rPr>
-              <a:t>cafe.pi · 인프라 환경 전략 · 2026-06-26</a:t>
+              <a:t>cafe.pi · Infrastructure</a:t>
             </a:r>
             <a:endParaRPr lang="en-US" sz="1000" dirty="0"/>
           </a:p>
